--- a/presentations/WolfBox-Pitch.pptx
+++ b/presentations/WolfBox-Pitch.pptx
@@ -2,22 +2,22 @@
 <file path=ppt/presentation.xml><?xml version="1.0" encoding="utf-8"?>
 <p:presentation xmlns:p="http://schemas.openxmlformats.org/presentationml/2006/main">
   <p:sldMasterIdLst>
-    <p:sldMasterId xmlns:r="http://schemas.openxmlformats.org/officeDocument/2006/relationships" id="2147483648" r:id="R80c2fa32894b4002"/>
+    <p:sldMasterId xmlns:r="http://schemas.openxmlformats.org/officeDocument/2006/relationships" id="2147483648" r:id="R4258b1474edc45ce"/>
   </p:sldMasterIdLst>
   <p:notesMasterIdLst>
-    <p:notesMasterId xmlns:r="http://schemas.openxmlformats.org/officeDocument/2006/relationships" r:id="R247aee169b0d49e4"/>
+    <p:notesMasterId xmlns:r="http://schemas.openxmlformats.org/officeDocument/2006/relationships" r:id="R4075c56e842e44ea"/>
   </p:notesMasterIdLst>
   <p:sldIdLst>
-    <p:sldId xmlns:r="http://schemas.openxmlformats.org/officeDocument/2006/relationships" id="256" r:id="Rc22d564fab584916"/>
-    <p:sldId xmlns:r="http://schemas.openxmlformats.org/officeDocument/2006/relationships" id="257" r:id="Rf0dd24cc07cc40f3"/>
-    <p:sldId xmlns:r="http://schemas.openxmlformats.org/officeDocument/2006/relationships" id="258" r:id="R40242169efc84729"/>
-    <p:sldId xmlns:r="http://schemas.openxmlformats.org/officeDocument/2006/relationships" id="259" r:id="R8c7ed1bafdca4661"/>
-    <p:sldId xmlns:r="http://schemas.openxmlformats.org/officeDocument/2006/relationships" id="260" r:id="R58c15790485e4416"/>
-    <p:sldId xmlns:r="http://schemas.openxmlformats.org/officeDocument/2006/relationships" id="261" r:id="R05db921b063a4912"/>
-    <p:sldId xmlns:r="http://schemas.openxmlformats.org/officeDocument/2006/relationships" id="262" r:id="R77d25c78a76644d9"/>
-    <p:sldId xmlns:r="http://schemas.openxmlformats.org/officeDocument/2006/relationships" id="263" r:id="Raae5a2bab1584f9c"/>
-    <p:sldId xmlns:r="http://schemas.openxmlformats.org/officeDocument/2006/relationships" id="264" r:id="R64484680fc5943d6"/>
-    <p:sldId xmlns:r="http://schemas.openxmlformats.org/officeDocument/2006/relationships" id="265" r:id="R2d2ef9a6dd1a4c99"/>
+    <p:sldId xmlns:r="http://schemas.openxmlformats.org/officeDocument/2006/relationships" id="256" r:id="Rf35bb69c450045e7"/>
+    <p:sldId xmlns:r="http://schemas.openxmlformats.org/officeDocument/2006/relationships" id="257" r:id="Re18e9576de824cc8"/>
+    <p:sldId xmlns:r="http://schemas.openxmlformats.org/officeDocument/2006/relationships" id="258" r:id="R44a302fe62e44324"/>
+    <p:sldId xmlns:r="http://schemas.openxmlformats.org/officeDocument/2006/relationships" id="259" r:id="Recf9699d42ee465d"/>
+    <p:sldId xmlns:r="http://schemas.openxmlformats.org/officeDocument/2006/relationships" id="260" r:id="Rc91709b8b6d94853"/>
+    <p:sldId xmlns:r="http://schemas.openxmlformats.org/officeDocument/2006/relationships" id="261" r:id="R6cb8454577604a80"/>
+    <p:sldId xmlns:r="http://schemas.openxmlformats.org/officeDocument/2006/relationships" id="262" r:id="R06d5d53e93214dfe"/>
+    <p:sldId xmlns:r="http://schemas.openxmlformats.org/officeDocument/2006/relationships" id="263" r:id="Rae23d5136ef647f0"/>
+    <p:sldId xmlns:r="http://schemas.openxmlformats.org/officeDocument/2006/relationships" id="264" r:id="Re7b0f8fd43864927"/>
+    <p:sldId xmlns:r="http://schemas.openxmlformats.org/officeDocument/2006/relationships" id="265" r:id="R45afe5fe739645e5"/>
   </p:sldIdLst>
   <p:sldSz cx="12192000" cy="6858000"/>
   <p:notesSz cx="6858000" cy="9144000"/>
@@ -461,7 +461,7 @@
           </a:p>
           <a:p xmlns:a="http://schemas.openxmlformats.org/drawingml/2006/main">
             <a:r>
-              <a:t>Sources: WolfBox repository, commit 1036db1 (pulled October 31, 2026). SPEC.md; README.md. Screenshots, where used, are bundled native macOS demo fixtures with synthetic student records and fake Gemma responses. These images illustrate the interface, not a live production session.</a:t>
+              <a:t>Sources: WolfBox repository, commit 1036db1 (pulled October 31, 2026). SPEC.md; README.md. Screenshots, where used, are bundled native macOS demo fixtures with synthetic student records and fake Gemma responses. These images illustrate the interface, not a live production session. Theme reference: NC State University Brand, https://brand.ncsu.edu/designing-for-nc-state/color/ (Wolfpack Red #CC0000, Wolfpack Black #000000, Wolfpack White #FFFFFF).</a:t>
             </a:r>
           </a:p>
         </p:txBody>
@@ -541,7 +541,7 @@
           </a:p>
           <a:p xmlns:a="http://schemas.openxmlformats.org/drawingml/2006/main">
             <a:r>
-              <a:t>Sources: WolfBox repository, commit 1036db1 (pulled October 31, 2026). README.md; SPEC.md Goals and non-goals; apple/VERIFICATION.md; CanvasLink/README.txt. Screenshots, where used, are bundled native macOS demo fixtures with synthetic student records and fake Gemma responses. These images illustrate the interface, not a live production session.</a:t>
+              <a:t>Sources: WolfBox repository, commit 1036db1 (pulled October 31, 2026). README.md; SPEC.md Goals and non-goals; apple/VERIFICATION.md; CanvasLink/README.txt. Screenshots, where used, are bundled native macOS demo fixtures with synthetic student records and fake Gemma responses. These images illustrate the interface, not a live production session. Theme reference: NC State University Brand, https://brand.ncsu.edu/designing-for-nc-state/color/ (Wolfpack Red #CC0000, Wolfpack Black #000000, Wolfpack White #FFFFFF).</a:t>
             </a:r>
           </a:p>
         </p:txBody>
@@ -621,7 +621,7 @@
           </a:p>
           <a:p xmlns:a="http://schemas.openxmlformats.org/drawingml/2006/main">
             <a:r>
-              <a:t>Sources: WolfBox repository, commit 1036db1 (pulled October 31, 2026). SPEC.md; README.md. Screenshots, where used, are bundled native macOS demo fixtures with synthetic student records and fake Gemma responses. These images illustrate the interface, not a live production session.</a:t>
+              <a:t>Sources: WolfBox repository, commit 1036db1 (pulled October 31, 2026). SPEC.md; README.md. Screenshots, where used, are bundled native macOS demo fixtures with synthetic student records and fake Gemma responses. These images illustrate the interface, not a live production session. Theme reference: NC State University Brand, https://brand.ncsu.edu/designing-for-nc-state/color/ (Wolfpack Red #CC0000, Wolfpack Black #000000, Wolfpack White #FFFFFF).</a:t>
             </a:r>
           </a:p>
         </p:txBody>
@@ -701,7 +701,7 @@
           </a:p>
           <a:p xmlns:a="http://schemas.openxmlformats.org/drawingml/2006/main">
             <a:r>
-              <a:t>Sources: WolfBox repository, commit 1036db1 (pulled October 31, 2026). SPEC.md §5 LEARN and §6; README.md Demo flow; apple/README.md Learn; apple/screenshots/learn.png. Screenshots, where used, are bundled native macOS demo fixtures with synthetic student records and fake Gemma responses. These images illustrate the interface, not a live production session.</a:t>
+              <a:t>Sources: WolfBox repository, commit 1036db1 (pulled October 31, 2026). SPEC.md §5 LEARN and §6; README.md Demo flow; apple/README.md Learn; apple/screenshots/learn.png. Screenshots, where used, are bundled native macOS demo fixtures with synthetic student records and fake Gemma responses. These images illustrate the interface, not a live production session. Theme reference: NC State University Brand, https://brand.ncsu.edu/designing-for-nc-state/color/ (Wolfpack Red #CC0000, Wolfpack Black #000000, Wolfpack White #FFFFFF).</a:t>
             </a:r>
           </a:p>
         </p:txBody>
@@ -781,7 +781,7 @@
           </a:p>
           <a:p xmlns:a="http://schemas.openxmlformats.org/drawingml/2006/main">
             <a:r>
-              <a:t>Sources: WolfBox repository, commit 1036db1 (pulled October 31, 2026). SPEC.md §5 HELP; apple/README.md Learn and TA; apple/screenshots/ta.png. Screenshots, where used, are bundled native macOS demo fixtures with synthetic student records and fake Gemma responses. These images illustrate the interface, not a live production session.</a:t>
+              <a:t>Sources: WolfBox repository, commit 1036db1 (pulled October 31, 2026). SPEC.md §5 HELP; apple/README.md Learn and TA; apple/screenshots/ta.png. Screenshots, where used, are bundled native macOS demo fixtures with synthetic student records and fake Gemma responses. These images illustrate the interface, not a live production session. Theme reference: NC State University Brand, https://brand.ncsu.edu/designing-for-nc-state/color/ (Wolfpack Red #CC0000, Wolfpack Black #000000, Wolfpack White #FFFFFF).</a:t>
             </a:r>
           </a:p>
         </p:txBody>
@@ -861,7 +861,7 @@
           </a:p>
           <a:p xmlns:a="http://schemas.openxmlformats.org/drawingml/2006/main">
             <a:r>
-              <a:t>Sources: WolfBox repository, commit 1036db1 (pulled October 31, 2026). SPEC.md §5 SYNC; README.md Canvas assignments; apple/README.md Course; apple/screenshots/course.png. Screenshots, where used, are bundled native macOS demo fixtures with synthetic student records and fake Gemma responses. These images illustrate the interface, not a live production session.</a:t>
+              <a:t>Sources: WolfBox repository, commit 1036db1 (pulled October 31, 2026). SPEC.md §5 SYNC; README.md Canvas assignments; apple/README.md Course; apple/screenshots/course.png. Screenshots, where used, are bundled native macOS demo fixtures with synthetic student records and fake Gemma responses. These images illustrate the interface, not a live production session. Theme reference: NC State University Brand, https://brand.ncsu.edu/designing-for-nc-state/color/ (Wolfpack Red #CC0000, Wolfpack Black #000000, Wolfpack White #FFFFFF).</a:t>
             </a:r>
           </a:p>
         </p:txBody>
@@ -941,7 +941,7 @@
           </a:p>
           <a:p xmlns:a="http://schemas.openxmlformats.org/drawingml/2006/main">
             <a:r>
-              <a:t>Sources: WolfBox repository, commit 1036db1 (pulled October 31, 2026). SPEC.md §5 PLAN; README.md Registration planner: public NC State schedules; apple/README.md Plan; apple/screenshots/plan.png. Screenshots, where used, are bundled native macOS demo fixtures with synthetic student records and fake Gemma responses. These images illustrate the interface, not a live production session.</a:t>
+              <a:t>Sources: WolfBox repository, commit 1036db1 (pulled October 31, 2026). SPEC.md §5 PLAN; README.md Registration planner: public NC State schedules; apple/README.md Plan; apple/screenshots/plan.png. Screenshots, where used, are bundled native macOS demo fixtures with synthetic student records and fake Gemma responses. These images illustrate the interface, not a live production session. Theme reference: NC State University Brand, https://brand.ncsu.edu/designing-for-nc-state/color/ (Wolfpack Red #CC0000, Wolfpack Black #000000, Wolfpack White #FFFFFF).</a:t>
             </a:r>
           </a:p>
         </p:txBody>
@@ -1021,7 +1021,7 @@
           </a:p>
           <a:p xmlns:a="http://schemas.openxmlformats.org/drawingml/2006/main">
             <a:r>
-              <a:t>Sources: WolfBox repository, commit 1036db1 (pulled October 31, 2026). CanvasLink/README.txt; CanvasLink/canvas_link.py; CanvasLink/CanvasDisplay/CanvasDisplay.ino; commit 1036db1. Screenshots, where used, are bundled native macOS demo fixtures with synthetic student records and fake Gemma responses. These images illustrate the interface, not a live production session.</a:t>
+              <a:t>Sources: WolfBox repository, commit 1036db1 (pulled October 31, 2026). CanvasLink/README.txt; CanvasLink/canvas_link.py; CanvasLink/CanvasDisplay/CanvasDisplay.ino; commit 1036db1. Screenshots, where used, are bundled native macOS demo fixtures with synthetic student records and fake Gemma responses. These images illustrate the interface, not a live production session. Theme reference: NC State University Brand, https://brand.ncsu.edu/designing-for-nc-state/color/ (Wolfpack Red #CC0000, Wolfpack Black #000000, Wolfpack White #FFFFFF).</a:t>
             </a:r>
           </a:p>
         </p:txBody>
@@ -1101,7 +1101,7 @@
           </a:p>
           <a:p xmlns:a="http://schemas.openxmlformats.org/drawingml/2006/main">
             <a:r>
-              <a:t>Sources: WolfBox repository, commit 1036db1 (pulled October 31, 2026). README.md Architecture, Online Gemma mode, Offline mode, Maritime deployment; IMPLEMENTATION.md §7. Screenshots, where used, are bundled native macOS demo fixtures with synthetic student records and fake Gemma responses. These images illustrate the interface, not a live production session.</a:t>
+              <a:t>Sources: WolfBox repository, commit 1036db1 (pulled October 31, 2026). README.md Architecture, Online Gemma mode, Offline mode, Maritime deployment; IMPLEMENTATION.md §7. Screenshots, where used, are bundled native macOS demo fixtures with synthetic student records and fake Gemma responses. These images illustrate the interface, not a live production session. Theme reference: NC State University Brand, https://brand.ncsu.edu/designing-for-nc-state/color/ (Wolfpack Red #CC0000, Wolfpack Black #000000, Wolfpack White #FFFFFF).</a:t>
             </a:r>
           </a:p>
         </p:txBody>
@@ -1181,7 +1181,7 @@
           </a:p>
           <a:p xmlns:a="http://schemas.openxmlformats.org/drawingml/2006/main">
             <a:r>
-              <a:t>Sources: WolfBox repository, commit 1036db1 (pulled October 31, 2026). SPEC.md §6; README.md Demo flow; CanvasLink/README.txt. Screenshots, where used, are bundled native macOS demo fixtures with synthetic student records and fake Gemma responses. These images illustrate the interface, not a live production session.</a:t>
+              <a:t>Sources: WolfBox repository, commit 1036db1 (pulled October 31, 2026). SPEC.md §6; README.md Demo flow; CanvasLink/README.txt. Screenshots, where used, are bundled native macOS demo fixtures with synthetic student records and fake Gemma responses. These images illustrate the interface, not a live production session. Theme reference: NC State University Brand, https://brand.ncsu.edu/designing-for-nc-state/color/ (Wolfpack Red #CC0000, Wolfpack Black #000000, Wolfpack White #FFFFFF).</a:t>
             </a:r>
           </a:p>
         </p:txBody>
@@ -1228,7 +1228,7 @@
           <p:cNvPr id="3" name="Title">
             <a:extLst xmlns:a="http://schemas.openxmlformats.org/drawingml/2006/main">
               <a:ext uri="{FF2B5EF4-FFF2-40B4-BE49-F238E27FC236}">
-                <a16:creationId xmlns:a16="http://schemas.microsoft.com/office/drawing/2014/main" id="{BCE75985-D74B-48B3-AA15-93BCEF74930E}"/>
+                <a16:creationId xmlns:a16="http://schemas.microsoft.com/office/drawing/2014/main" id="{1E779453-920D-4B3C-BAD1-B01B5EAC905B}"/>
               </a:ext>
             </a:extLst>
           </p:cNvPr>
@@ -1457,7 +1457,7 @@
           <p:cNvPr id="2" name="Subtitle">
             <a:extLst xmlns:a="http://schemas.openxmlformats.org/drawingml/2006/main">
               <a:ext uri="{FF2B5EF4-FFF2-40B4-BE49-F238E27FC236}">
-                <a16:creationId xmlns:a16="http://schemas.microsoft.com/office/drawing/2014/main" id="{1622295C-F045-435B-95D5-F749FE5D7BEA}"/>
+                <a16:creationId xmlns:a16="http://schemas.microsoft.com/office/drawing/2014/main" id="{6003BDE5-5EE3-49A1-8094-8D913F2EDB3B}"/>
               </a:ext>
             </a:extLst>
           </p:cNvPr>
@@ -1703,7 +1703,7 @@
           <p:cNvPr id="2" name="Section title">
             <a:extLst xmlns:a="http://schemas.openxmlformats.org/drawingml/2006/main">
               <a:ext uri="{FF2B5EF4-FFF2-40B4-BE49-F238E27FC236}">
-                <a16:creationId xmlns:a16="http://schemas.microsoft.com/office/drawing/2014/main" id="{1B4F0211-BE43-46CC-8ADB-18E7D038F7F8}"/>
+                <a16:creationId xmlns:a16="http://schemas.microsoft.com/office/drawing/2014/main" id="{06F464C7-20C4-48F4-93CA-25C2DD830429}"/>
               </a:ext>
             </a:extLst>
           </p:cNvPr>
@@ -1949,7 +1949,7 @@
           <p:cNvPr id="3" name="Title">
             <a:extLst xmlns:a="http://schemas.openxmlformats.org/drawingml/2006/main">
               <a:ext uri="{FF2B5EF4-FFF2-40B4-BE49-F238E27FC236}">
-                <a16:creationId xmlns:a16="http://schemas.microsoft.com/office/drawing/2014/main" id="{98E2AABB-6CDC-48A8-8D24-090AAEFC90ED}"/>
+                <a16:creationId xmlns:a16="http://schemas.microsoft.com/office/drawing/2014/main" id="{FEE9CD6D-AFF6-40AE-9E61-6A6E4E32192A}"/>
               </a:ext>
             </a:extLst>
           </p:cNvPr>
@@ -2178,7 +2178,7 @@
           <p:cNvPr id="2" name="Body">
             <a:extLst xmlns:a="http://schemas.openxmlformats.org/drawingml/2006/main">
               <a:ext uri="{FF2B5EF4-FFF2-40B4-BE49-F238E27FC236}">
-                <a16:creationId xmlns:a16="http://schemas.microsoft.com/office/drawing/2014/main" id="{69C73DC2-3A7C-47BE-8374-E61E8A5F5E1E}"/>
+                <a16:creationId xmlns:a16="http://schemas.microsoft.com/office/drawing/2014/main" id="{E677EE95-05AA-49F4-A10F-C9C44B79EB99}"/>
               </a:ext>
             </a:extLst>
           </p:cNvPr>
@@ -2424,7 +2424,7 @@
           <p:cNvPr id="4" name="Title">
             <a:extLst xmlns:a="http://schemas.openxmlformats.org/drawingml/2006/main">
               <a:ext uri="{FF2B5EF4-FFF2-40B4-BE49-F238E27FC236}">
-                <a16:creationId xmlns:a16="http://schemas.microsoft.com/office/drawing/2014/main" id="{E357F512-AF16-4DA1-8555-5B47536282DE}"/>
+                <a16:creationId xmlns:a16="http://schemas.microsoft.com/office/drawing/2014/main" id="{9BE7A8F1-DB7A-4A29-A163-CCC26A79C7C9}"/>
               </a:ext>
             </a:extLst>
           </p:cNvPr>
@@ -2653,7 +2653,7 @@
           <p:cNvPr id="2" name="Left column">
             <a:extLst xmlns:a="http://schemas.openxmlformats.org/drawingml/2006/main">
               <a:ext uri="{FF2B5EF4-FFF2-40B4-BE49-F238E27FC236}">
-                <a16:creationId xmlns:a16="http://schemas.microsoft.com/office/drawing/2014/main" id="{39039E83-8746-49E4-8128-D16E0258857A}"/>
+                <a16:creationId xmlns:a16="http://schemas.microsoft.com/office/drawing/2014/main" id="{6C1AFC4C-1C44-4900-9BE2-E6B37A2F0A19}"/>
               </a:ext>
             </a:extLst>
           </p:cNvPr>
@@ -2882,7 +2882,7 @@
           <p:cNvPr id="3" name="Right column">
             <a:extLst xmlns:a="http://schemas.openxmlformats.org/drawingml/2006/main">
               <a:ext uri="{FF2B5EF4-FFF2-40B4-BE49-F238E27FC236}">
-                <a16:creationId xmlns:a16="http://schemas.microsoft.com/office/drawing/2014/main" id="{0DB0CA54-C711-41F6-BAF9-6021AC6B6FFD}"/>
+                <a16:creationId xmlns:a16="http://schemas.microsoft.com/office/drawing/2014/main" id="{F3AF653C-9DA6-430A-A42E-5DEE459BD89E}"/>
               </a:ext>
             </a:extLst>
           </p:cNvPr>
@@ -3128,7 +3128,7 @@
           <p:cNvPr id="3" name="Title">
             <a:extLst xmlns:a="http://schemas.openxmlformats.org/drawingml/2006/main">
               <a:ext uri="{FF2B5EF4-FFF2-40B4-BE49-F238E27FC236}">
-                <a16:creationId xmlns:a16="http://schemas.microsoft.com/office/drawing/2014/main" id="{88BF78AE-9116-464C-BB7F-FC898751E6DC}"/>
+                <a16:creationId xmlns:a16="http://schemas.microsoft.com/office/drawing/2014/main" id="{0B479A41-E9D2-4B6A-9D6F-5E7AD1E05BF8}"/>
               </a:ext>
             </a:extLst>
           </p:cNvPr>
@@ -3357,7 +3357,7 @@
           <p:cNvPr id="2" name="Left column">
             <a:extLst xmlns:a="http://schemas.openxmlformats.org/drawingml/2006/main">
               <a:ext uri="{FF2B5EF4-FFF2-40B4-BE49-F238E27FC236}">
-                <a16:creationId xmlns:a16="http://schemas.microsoft.com/office/drawing/2014/main" id="{93166AA5-D25F-4A4A-B83A-3DF2E8DDC7F9}"/>
+                <a16:creationId xmlns:a16="http://schemas.microsoft.com/office/drawing/2014/main" id="{D5162B22-8967-49AE-BEEE-9AACFDD89876}"/>
               </a:ext>
             </a:extLst>
           </p:cNvPr>
@@ -3624,12 +3624,12 @@
   </p:cSld>
   <p:clrMap bg1="lt1" tx1="dk1" bg2="lt2" tx2="dk2" accent1="accent1" accent2="accent2" accent3="accent3" accent4="accent4" accent5="accent5" accent6="accent6" hlink="hlink" folHlink="folHlink"/>
   <p:sldLayoutIdLst>
-    <p:sldLayoutId xmlns:r="http://schemas.openxmlformats.org/officeDocument/2006/relationships" id="2147483649" r:id="Rca3e4dadf54d406e"/>
-    <p:sldLayoutId xmlns:r="http://schemas.openxmlformats.org/officeDocument/2006/relationships" id="2147483650" r:id="R0856ea3feac84282"/>
-    <p:sldLayoutId xmlns:r="http://schemas.openxmlformats.org/officeDocument/2006/relationships" id="2147483651" r:id="R05965295a43d493e"/>
-    <p:sldLayoutId xmlns:r="http://schemas.openxmlformats.org/officeDocument/2006/relationships" id="2147483652" r:id="R4d8deab6868c47ce"/>
-    <p:sldLayoutId xmlns:r="http://schemas.openxmlformats.org/officeDocument/2006/relationships" id="2147483653" r:id="R50cd49f7ea1c46da"/>
-    <p:sldLayoutId xmlns:r="http://schemas.openxmlformats.org/officeDocument/2006/relationships" id="2147483654" r:id="Rb81a1c3b4a00435e"/>
+    <p:sldLayoutId xmlns:r="http://schemas.openxmlformats.org/officeDocument/2006/relationships" id="2147483649" r:id="R54bd151cd06c4e86"/>
+    <p:sldLayoutId xmlns:r="http://schemas.openxmlformats.org/officeDocument/2006/relationships" id="2147483650" r:id="R459776197b7a4c09"/>
+    <p:sldLayoutId xmlns:r="http://schemas.openxmlformats.org/officeDocument/2006/relationships" id="2147483651" r:id="Re0757089afc044d3"/>
+    <p:sldLayoutId xmlns:r="http://schemas.openxmlformats.org/officeDocument/2006/relationships" id="2147483652" r:id="R9f13a1129cd04c58"/>
+    <p:sldLayoutId xmlns:r="http://schemas.openxmlformats.org/officeDocument/2006/relationships" id="2147483653" r:id="Rdbdbb1f8ff084264"/>
+    <p:sldLayoutId xmlns:r="http://schemas.openxmlformats.org/officeDocument/2006/relationships" id="2147483654" r:id="Ra40e8e1009c24042"/>
   </p:sldLayoutIdLst>
   <p:txStyles>
     <p:titleStyle>
@@ -4162,7 +4162,7 @@
     <p:bg>
       <p:bgPr>
         <a:solidFill xmlns:a="http://schemas.openxmlformats.org/drawingml/2006/main">
-          <a:srgbClr val="233D34"/>
+          <a:srgbClr val="CC0000"/>
         </a:solidFill>
       </p:bgPr>
     </p:bg>
@@ -4177,10 +4177,10 @@
       </p:grpSpPr>
       <p:sp>
         <p:nvSpPr>
-          <p:cNvPr id="6" name="">
+          <p:cNvPr id="7" name="">
             <a:extLst xmlns:a="http://schemas.openxmlformats.org/drawingml/2006/main">
               <a:ext uri="{FF2B5EF4-FFF2-40B4-BE49-F238E27FC236}">
-                <a16:creationId xmlns:a16="http://schemas.microsoft.com/office/drawing/2014/main" id="{DA67F15E-6E46-4565-AF30-DFE6EAB1B0EC}"/>
+                <a16:creationId xmlns:a16="http://schemas.microsoft.com/office/drawing/2014/main" id="{477BE3BE-6B38-40A2-97D9-36B2C79F2D26}"/>
               </a:ext>
             </a:extLst>
           </p:cNvPr>
@@ -4208,7 +4208,7 @@
             <a:defPPr>
               <a:defRPr sz="1425" b="0">
                 <a:solidFill>
-                  <a:srgbClr val="DDE8DF"/>
+                  <a:srgbClr val="FFFFFF"/>
                 </a:solidFill>
                 <a:latin typeface="Arial"/>
                 <a:ea typeface="Arial"/>
@@ -4218,7 +4218,7 @@
             <a:lvl1pPr>
               <a:defRPr sz="1425" b="0">
                 <a:solidFill>
-                  <a:srgbClr val="DDE8DF"/>
+                  <a:srgbClr val="FFFFFF"/>
                 </a:solidFill>
                 <a:latin typeface="Arial"/>
                 <a:ea typeface="Arial"/>
@@ -4228,7 +4228,7 @@
             <a:lvl2pPr>
               <a:defRPr sz="1425" b="0">
                 <a:solidFill>
-                  <a:srgbClr val="DDE8DF"/>
+                  <a:srgbClr val="FFFFFF"/>
                 </a:solidFill>
                 <a:latin typeface="Arial"/>
                 <a:ea typeface="Arial"/>
@@ -4238,7 +4238,7 @@
             <a:lvl3pPr>
               <a:defRPr sz="1425" b="0">
                 <a:solidFill>
-                  <a:srgbClr val="DDE8DF"/>
+                  <a:srgbClr val="FFFFFF"/>
                 </a:solidFill>
                 <a:latin typeface="Arial"/>
                 <a:ea typeface="Arial"/>
@@ -4248,7 +4248,7 @@
             <a:lvl4pPr>
               <a:defRPr sz="1425" b="0">
                 <a:solidFill>
-                  <a:srgbClr val="DDE8DF"/>
+                  <a:srgbClr val="FFFFFF"/>
                 </a:solidFill>
                 <a:latin typeface="Arial"/>
                 <a:ea typeface="Arial"/>
@@ -4258,7 +4258,7 @@
             <a:lvl5pPr>
               <a:defRPr sz="1425" b="0">
                 <a:solidFill>
-                  <a:srgbClr val="DDE8DF"/>
+                  <a:srgbClr val="FFFFFF"/>
                 </a:solidFill>
                 <a:latin typeface="Arial"/>
                 <a:ea typeface="Arial"/>
@@ -4268,7 +4268,7 @@
             <a:lvl6pPr>
               <a:defRPr sz="1425" b="0">
                 <a:solidFill>
-                  <a:srgbClr val="DDE8DF"/>
+                  <a:srgbClr val="FFFFFF"/>
                 </a:solidFill>
                 <a:latin typeface="Arial"/>
                 <a:ea typeface="Arial"/>
@@ -4278,7 +4278,7 @@
             <a:lvl7pPr>
               <a:defRPr sz="1425" b="0">
                 <a:solidFill>
-                  <a:srgbClr val="DDE8DF"/>
+                  <a:srgbClr val="FFFFFF"/>
                 </a:solidFill>
                 <a:latin typeface="Arial"/>
                 <a:ea typeface="Arial"/>
@@ -4288,7 +4288,7 @@
             <a:lvl8pPr>
               <a:defRPr sz="1425" b="0">
                 <a:solidFill>
-                  <a:srgbClr val="DDE8DF"/>
+                  <a:srgbClr val="FFFFFF"/>
                 </a:solidFill>
                 <a:latin typeface="Arial"/>
                 <a:ea typeface="Arial"/>
@@ -4298,7 +4298,7 @@
             <a:lvl9pPr>
               <a:defRPr sz="1425" b="0">
                 <a:solidFill>
-                  <a:srgbClr val="DDE8DF"/>
+                  <a:srgbClr val="FFFFFF"/>
                 </a:solidFill>
                 <a:latin typeface="Arial"/>
                 <a:ea typeface="Arial"/>
@@ -4310,7 +4310,7 @@
             <a:pPr>
               <a:defRPr sz="1425" b="0">
                 <a:solidFill>
-                  <a:srgbClr val="DDE8DF"/>
+                  <a:srgbClr val="FFFFFF"/>
                 </a:solidFill>
                 <a:latin typeface="Arial"/>
                 <a:ea typeface="Arial"/>
@@ -4320,7 +4320,7 @@
             <a:r>
               <a:rPr sz="1425" b="0">
                 <a:solidFill>
-                  <a:srgbClr val="DDE8DF"/>
+                  <a:srgbClr val="FFFFFF"/>
                 </a:solidFill>
                 <a:latin typeface="Arial"/>
                 <a:ea typeface="Arial"/>
@@ -4336,7 +4336,163 @@
           <p:cNvPr id="2" name="">
             <a:extLst xmlns:a="http://schemas.openxmlformats.org/drawingml/2006/main">
               <a:ext uri="{FF2B5EF4-FFF2-40B4-BE49-F238E27FC236}">
-                <a16:creationId xmlns:a16="http://schemas.microsoft.com/office/drawing/2014/main" id="{72E15AD6-0C40-4C29-8C5A-9542DDF32672}"/>
+                <a16:creationId xmlns:a16="http://schemas.microsoft.com/office/drawing/2014/main" id="{CF01C86C-2FA2-42A9-AEEA-0B2228A1507D}"/>
+              </a:ext>
+            </a:extLst>
+          </p:cNvPr>
+          <p:cNvSpPr>
+            <a:spLocks xmlns:a="http://schemas.openxmlformats.org/drawingml/2006/main" noGrp="1"/>
+          </p:cNvSpPr>
+          <p:nvPr/>
+        </p:nvSpPr>
+        <p:spPr>
+          <a:xfrm xmlns:a="http://schemas.openxmlformats.org/drawingml/2006/main">
+            <a:off x="666750" y="666750"/>
+            <a:ext cx="9525000" cy="457200"/>
+          </a:xfrm>
+          <a:prstGeom xmlns:a="http://schemas.openxmlformats.org/drawingml/2006/main" prst="rect">
+            <a:avLst/>
+          </a:prstGeom>
+          <a:noFill xmlns:a="http://schemas.openxmlformats.org/drawingml/2006/main"/>
+          <a:ln xmlns:a="http://schemas.openxmlformats.org/drawingml/2006/main" w="0">
+            <a:noFill/>
+          </a:ln>
+        </p:spPr>
+        <p:txBody>
+          <a:bodyPr xmlns:a="http://schemas.openxmlformats.org/drawingml/2006/main" wrap="square" lIns="0" tIns="0" rIns="0" bIns="0"/>
+          <a:lstStyle xmlns:a="http://schemas.openxmlformats.org/drawingml/2006/main">
+            <a:defPPr>
+              <a:defRPr sz="1950" b="1">
+                <a:solidFill>
+                  <a:srgbClr val="FFFFFF"/>
+                </a:solidFill>
+                <a:latin typeface="Arial"/>
+                <a:ea typeface="Arial"/>
+                <a:cs typeface="Arial"/>
+              </a:defRPr>
+            </a:defPPr>
+            <a:lvl1pPr>
+              <a:defRPr sz="1950" b="1">
+                <a:solidFill>
+                  <a:srgbClr val="FFFFFF"/>
+                </a:solidFill>
+                <a:latin typeface="Arial"/>
+                <a:ea typeface="Arial"/>
+                <a:cs typeface="Arial"/>
+              </a:defRPr>
+            </a:lvl1pPr>
+            <a:lvl2pPr>
+              <a:defRPr sz="1950" b="1">
+                <a:solidFill>
+                  <a:srgbClr val="FFFFFF"/>
+                </a:solidFill>
+                <a:latin typeface="Arial"/>
+                <a:ea typeface="Arial"/>
+                <a:cs typeface="Arial"/>
+              </a:defRPr>
+            </a:lvl2pPr>
+            <a:lvl3pPr>
+              <a:defRPr sz="1950" b="1">
+                <a:solidFill>
+                  <a:srgbClr val="FFFFFF"/>
+                </a:solidFill>
+                <a:latin typeface="Arial"/>
+                <a:ea typeface="Arial"/>
+                <a:cs typeface="Arial"/>
+              </a:defRPr>
+            </a:lvl3pPr>
+            <a:lvl4pPr>
+              <a:defRPr sz="1950" b="1">
+                <a:solidFill>
+                  <a:srgbClr val="FFFFFF"/>
+                </a:solidFill>
+                <a:latin typeface="Arial"/>
+                <a:ea typeface="Arial"/>
+                <a:cs typeface="Arial"/>
+              </a:defRPr>
+            </a:lvl4pPr>
+            <a:lvl5pPr>
+              <a:defRPr sz="1950" b="1">
+                <a:solidFill>
+                  <a:srgbClr val="FFFFFF"/>
+                </a:solidFill>
+                <a:latin typeface="Arial"/>
+                <a:ea typeface="Arial"/>
+                <a:cs typeface="Arial"/>
+              </a:defRPr>
+            </a:lvl5pPr>
+            <a:lvl6pPr>
+              <a:defRPr sz="1950" b="1">
+                <a:solidFill>
+                  <a:srgbClr val="FFFFFF"/>
+                </a:solidFill>
+                <a:latin typeface="Arial"/>
+                <a:ea typeface="Arial"/>
+                <a:cs typeface="Arial"/>
+              </a:defRPr>
+            </a:lvl6pPr>
+            <a:lvl7pPr>
+              <a:defRPr sz="1950" b="1">
+                <a:solidFill>
+                  <a:srgbClr val="FFFFFF"/>
+                </a:solidFill>
+                <a:latin typeface="Arial"/>
+                <a:ea typeface="Arial"/>
+                <a:cs typeface="Arial"/>
+              </a:defRPr>
+            </a:lvl7pPr>
+            <a:lvl8pPr>
+              <a:defRPr sz="1950" b="1">
+                <a:solidFill>
+                  <a:srgbClr val="FFFFFF"/>
+                </a:solidFill>
+                <a:latin typeface="Arial"/>
+                <a:ea typeface="Arial"/>
+                <a:cs typeface="Arial"/>
+              </a:defRPr>
+            </a:lvl8pPr>
+            <a:lvl9pPr>
+              <a:defRPr sz="1950" b="1">
+                <a:solidFill>
+                  <a:srgbClr val="FFFFFF"/>
+                </a:solidFill>
+                <a:latin typeface="Arial"/>
+                <a:ea typeface="Arial"/>
+                <a:cs typeface="Arial"/>
+              </a:defRPr>
+            </a:lvl9pPr>
+          </a:lstStyle>
+          <a:p xmlns:a="http://schemas.openxmlformats.org/drawingml/2006/main">
+            <a:pPr>
+              <a:defRPr sz="1950" b="1">
+                <a:solidFill>
+                  <a:srgbClr val="FFFFFF"/>
+                </a:solidFill>
+                <a:latin typeface="Arial"/>
+                <a:ea typeface="Arial"/>
+                <a:cs typeface="Arial"/>
+              </a:defRPr>
+            </a:pPr>
+            <a:r>
+              <a:rPr sz="1950" b="1">
+                <a:solidFill>
+                  <a:srgbClr val="FFFFFF"/>
+                </a:solidFill>
+                <a:latin typeface="Arial"/>
+                <a:ea typeface="Arial"/>
+                <a:cs typeface="Arial"/>
+              </a:rPr>
+              <a:t>NC STATE UNIVERSITY</a:t>
+            </a:r>
+          </a:p>
+        </p:txBody>
+      </p:sp>
+      <p:sp>
+        <p:nvSpPr>
+          <p:cNvPr id="3" name="">
+            <a:extLst xmlns:a="http://schemas.openxmlformats.org/drawingml/2006/main">
+              <a:ext uri="{FF2B5EF4-FFF2-40B4-BE49-F238E27FC236}">
+                <a16:creationId xmlns:a16="http://schemas.microsoft.com/office/drawing/2014/main" id="{E9C25BB0-1FF3-47D1-8688-F4A2667EC696}"/>
               </a:ext>
             </a:extLst>
           </p:cNvPr>
@@ -4364,7 +4520,7 @@
             <a:defPPr>
               <a:defRPr sz="8400" b="1">
                 <a:solidFill>
-                  <a:srgbClr val="F6F4EC"/>
+                  <a:srgbClr val="FFFFFF"/>
                 </a:solidFill>
                 <a:latin typeface="Arial"/>
                 <a:ea typeface="Arial"/>
@@ -4374,7 +4530,7 @@
             <a:lvl1pPr>
               <a:defRPr sz="8400" b="1">
                 <a:solidFill>
-                  <a:srgbClr val="F6F4EC"/>
+                  <a:srgbClr val="FFFFFF"/>
                 </a:solidFill>
                 <a:latin typeface="Arial"/>
                 <a:ea typeface="Arial"/>
@@ -4384,7 +4540,7 @@
             <a:lvl2pPr>
               <a:defRPr sz="8400" b="1">
                 <a:solidFill>
-                  <a:srgbClr val="F6F4EC"/>
+                  <a:srgbClr val="FFFFFF"/>
                 </a:solidFill>
                 <a:latin typeface="Arial"/>
                 <a:ea typeface="Arial"/>
@@ -4394,7 +4550,7 @@
             <a:lvl3pPr>
               <a:defRPr sz="8400" b="1">
                 <a:solidFill>
-                  <a:srgbClr val="F6F4EC"/>
+                  <a:srgbClr val="FFFFFF"/>
                 </a:solidFill>
                 <a:latin typeface="Arial"/>
                 <a:ea typeface="Arial"/>
@@ -4404,7 +4560,7 @@
             <a:lvl4pPr>
               <a:defRPr sz="8400" b="1">
                 <a:solidFill>
-                  <a:srgbClr val="F6F4EC"/>
+                  <a:srgbClr val="FFFFFF"/>
                 </a:solidFill>
                 <a:latin typeface="Arial"/>
                 <a:ea typeface="Arial"/>
@@ -4414,7 +4570,7 @@
             <a:lvl5pPr>
               <a:defRPr sz="8400" b="1">
                 <a:solidFill>
-                  <a:srgbClr val="F6F4EC"/>
+                  <a:srgbClr val="FFFFFF"/>
                 </a:solidFill>
                 <a:latin typeface="Arial"/>
                 <a:ea typeface="Arial"/>
@@ -4424,7 +4580,7 @@
             <a:lvl6pPr>
               <a:defRPr sz="8400" b="1">
                 <a:solidFill>
-                  <a:srgbClr val="F6F4EC"/>
+                  <a:srgbClr val="FFFFFF"/>
                 </a:solidFill>
                 <a:latin typeface="Arial"/>
                 <a:ea typeface="Arial"/>
@@ -4434,7 +4590,7 @@
             <a:lvl7pPr>
               <a:defRPr sz="8400" b="1">
                 <a:solidFill>
-                  <a:srgbClr val="F6F4EC"/>
+                  <a:srgbClr val="FFFFFF"/>
                 </a:solidFill>
                 <a:latin typeface="Arial"/>
                 <a:ea typeface="Arial"/>
@@ -4444,7 +4600,7 @@
             <a:lvl8pPr>
               <a:defRPr sz="8400" b="1">
                 <a:solidFill>
-                  <a:srgbClr val="F6F4EC"/>
+                  <a:srgbClr val="FFFFFF"/>
                 </a:solidFill>
                 <a:latin typeface="Arial"/>
                 <a:ea typeface="Arial"/>
@@ -4454,7 +4610,7 @@
             <a:lvl9pPr>
               <a:defRPr sz="8400" b="1">
                 <a:solidFill>
-                  <a:srgbClr val="F6F4EC"/>
+                  <a:srgbClr val="FFFFFF"/>
                 </a:solidFill>
                 <a:latin typeface="Arial"/>
                 <a:ea typeface="Arial"/>
@@ -4466,7 +4622,7 @@
             <a:pPr>
               <a:defRPr sz="8400" b="1">
                 <a:solidFill>
-                  <a:srgbClr val="F6F4EC"/>
+                  <a:srgbClr val="FFFFFF"/>
                 </a:solidFill>
                 <a:latin typeface="Arial"/>
                 <a:ea typeface="Arial"/>
@@ -4476,7 +4632,7 @@
             <a:r>
               <a:rPr sz="8400" b="1">
                 <a:solidFill>
-                  <a:srgbClr val="F6F4EC"/>
+                  <a:srgbClr val="FFFFFF"/>
                 </a:solidFill>
                 <a:latin typeface="Arial"/>
                 <a:ea typeface="Arial"/>
@@ -4489,10 +4645,10 @@
       </p:sp>
       <p:sp>
         <p:nvSpPr>
-          <p:cNvPr id="3" name="">
+          <p:cNvPr id="4" name="">
             <a:extLst xmlns:a="http://schemas.openxmlformats.org/drawingml/2006/main">
               <a:ext uri="{FF2B5EF4-FFF2-40B4-BE49-F238E27FC236}">
-                <a16:creationId xmlns:a16="http://schemas.microsoft.com/office/drawing/2014/main" id="{5843206F-AC3F-494F-BE12-C281FB567B04}"/>
+                <a16:creationId xmlns:a16="http://schemas.microsoft.com/office/drawing/2014/main" id="{17B0735E-899E-4010-BCFE-084B7F7EBBF2}"/>
               </a:ext>
             </a:extLst>
           </p:cNvPr>
@@ -4520,7 +4676,7 @@
             <a:defPPr>
               <a:defRPr sz="3450" b="0">
                 <a:solidFill>
-                  <a:srgbClr val="DDE8DF"/>
+                  <a:srgbClr val="FFFFFF"/>
                 </a:solidFill>
                 <a:latin typeface="Arial"/>
                 <a:ea typeface="Arial"/>
@@ -4530,7 +4686,7 @@
             <a:lvl1pPr>
               <a:defRPr sz="3450" b="0">
                 <a:solidFill>
-                  <a:srgbClr val="DDE8DF"/>
+                  <a:srgbClr val="FFFFFF"/>
                 </a:solidFill>
                 <a:latin typeface="Arial"/>
                 <a:ea typeface="Arial"/>
@@ -4540,7 +4696,7 @@
             <a:lvl2pPr>
               <a:defRPr sz="3450" b="0">
                 <a:solidFill>
-                  <a:srgbClr val="DDE8DF"/>
+                  <a:srgbClr val="FFFFFF"/>
                 </a:solidFill>
                 <a:latin typeface="Arial"/>
                 <a:ea typeface="Arial"/>
@@ -4550,7 +4706,7 @@
             <a:lvl3pPr>
               <a:defRPr sz="3450" b="0">
                 <a:solidFill>
-                  <a:srgbClr val="DDE8DF"/>
+                  <a:srgbClr val="FFFFFF"/>
                 </a:solidFill>
                 <a:latin typeface="Arial"/>
                 <a:ea typeface="Arial"/>
@@ -4560,7 +4716,7 @@
             <a:lvl4pPr>
               <a:defRPr sz="3450" b="0">
                 <a:solidFill>
-                  <a:srgbClr val="DDE8DF"/>
+                  <a:srgbClr val="FFFFFF"/>
                 </a:solidFill>
                 <a:latin typeface="Arial"/>
                 <a:ea typeface="Arial"/>
@@ -4570,7 +4726,7 @@
             <a:lvl5pPr>
               <a:defRPr sz="3450" b="0">
                 <a:solidFill>
-                  <a:srgbClr val="DDE8DF"/>
+                  <a:srgbClr val="FFFFFF"/>
                 </a:solidFill>
                 <a:latin typeface="Arial"/>
                 <a:ea typeface="Arial"/>
@@ -4580,7 +4736,7 @@
             <a:lvl6pPr>
               <a:defRPr sz="3450" b="0">
                 <a:solidFill>
-                  <a:srgbClr val="DDE8DF"/>
+                  <a:srgbClr val="FFFFFF"/>
                 </a:solidFill>
                 <a:latin typeface="Arial"/>
                 <a:ea typeface="Arial"/>
@@ -4590,7 +4746,7 @@
             <a:lvl7pPr>
               <a:defRPr sz="3450" b="0">
                 <a:solidFill>
-                  <a:srgbClr val="DDE8DF"/>
+                  <a:srgbClr val="FFFFFF"/>
                 </a:solidFill>
                 <a:latin typeface="Arial"/>
                 <a:ea typeface="Arial"/>
@@ -4600,7 +4756,7 @@
             <a:lvl8pPr>
               <a:defRPr sz="3450" b="0">
                 <a:solidFill>
-                  <a:srgbClr val="DDE8DF"/>
+                  <a:srgbClr val="FFFFFF"/>
                 </a:solidFill>
                 <a:latin typeface="Arial"/>
                 <a:ea typeface="Arial"/>
@@ -4610,7 +4766,7 @@
             <a:lvl9pPr>
               <a:defRPr sz="3450" b="0">
                 <a:solidFill>
-                  <a:srgbClr val="DDE8DF"/>
+                  <a:srgbClr val="FFFFFF"/>
                 </a:solidFill>
                 <a:latin typeface="Arial"/>
                 <a:ea typeface="Arial"/>
@@ -4622,7 +4778,7 @@
             <a:pPr>
               <a:defRPr sz="3450" b="0">
                 <a:solidFill>
-                  <a:srgbClr val="DDE8DF"/>
+                  <a:srgbClr val="FFFFFF"/>
                 </a:solidFill>
                 <a:latin typeface="Arial"/>
                 <a:ea typeface="Arial"/>
@@ -4632,7 +4788,7 @@
             <a:r>
               <a:rPr sz="3450" b="0">
                 <a:solidFill>
-                  <a:srgbClr val="DDE8DF"/>
+                  <a:srgbClr val="FFFFFF"/>
                 </a:solidFill>
                 <a:latin typeface="Arial"/>
                 <a:ea typeface="Arial"/>
@@ -4645,10 +4801,10 @@
       </p:sp>
       <p:sp>
         <p:nvSpPr>
-          <p:cNvPr id="4" name="">
+          <p:cNvPr id="5" name="">
             <a:extLst xmlns:a="http://schemas.openxmlformats.org/drawingml/2006/main">
               <a:ext uri="{FF2B5EF4-FFF2-40B4-BE49-F238E27FC236}">
-                <a16:creationId xmlns:a16="http://schemas.microsoft.com/office/drawing/2014/main" id="{190EF1F4-31FB-4FD3-AB92-7C693B7E8F32}"/>
+                <a16:creationId xmlns:a16="http://schemas.microsoft.com/office/drawing/2014/main" id="{A55BFDA0-FF63-4BCD-B2ED-2F75B0D36D47}"/>
               </a:ext>
             </a:extLst>
           </p:cNvPr>
@@ -4676,7 +4832,7 @@
             <a:defPPr>
               <a:defRPr sz="2175" b="0">
                 <a:solidFill>
-                  <a:srgbClr val="F6F4EC"/>
+                  <a:srgbClr val="FFFFFF"/>
                 </a:solidFill>
                 <a:latin typeface="Arial"/>
                 <a:ea typeface="Arial"/>
@@ -4686,7 +4842,7 @@
             <a:lvl1pPr>
               <a:defRPr sz="2175" b="0">
                 <a:solidFill>
-                  <a:srgbClr val="F6F4EC"/>
+                  <a:srgbClr val="FFFFFF"/>
                 </a:solidFill>
                 <a:latin typeface="Arial"/>
                 <a:ea typeface="Arial"/>
@@ -4696,7 +4852,7 @@
             <a:lvl2pPr>
               <a:defRPr sz="2175" b="0">
                 <a:solidFill>
-                  <a:srgbClr val="F6F4EC"/>
+                  <a:srgbClr val="FFFFFF"/>
                 </a:solidFill>
                 <a:latin typeface="Arial"/>
                 <a:ea typeface="Arial"/>
@@ -4706,7 +4862,7 @@
             <a:lvl3pPr>
               <a:defRPr sz="2175" b="0">
                 <a:solidFill>
-                  <a:srgbClr val="F6F4EC"/>
+                  <a:srgbClr val="FFFFFF"/>
                 </a:solidFill>
                 <a:latin typeface="Arial"/>
                 <a:ea typeface="Arial"/>
@@ -4716,7 +4872,7 @@
             <a:lvl4pPr>
               <a:defRPr sz="2175" b="0">
                 <a:solidFill>
-                  <a:srgbClr val="F6F4EC"/>
+                  <a:srgbClr val="FFFFFF"/>
                 </a:solidFill>
                 <a:latin typeface="Arial"/>
                 <a:ea typeface="Arial"/>
@@ -4726,7 +4882,7 @@
             <a:lvl5pPr>
               <a:defRPr sz="2175" b="0">
                 <a:solidFill>
-                  <a:srgbClr val="F6F4EC"/>
+                  <a:srgbClr val="FFFFFF"/>
                 </a:solidFill>
                 <a:latin typeface="Arial"/>
                 <a:ea typeface="Arial"/>
@@ -4736,7 +4892,7 @@
             <a:lvl6pPr>
               <a:defRPr sz="2175" b="0">
                 <a:solidFill>
-                  <a:srgbClr val="F6F4EC"/>
+                  <a:srgbClr val="FFFFFF"/>
                 </a:solidFill>
                 <a:latin typeface="Arial"/>
                 <a:ea typeface="Arial"/>
@@ -4746,7 +4902,7 @@
             <a:lvl7pPr>
               <a:defRPr sz="2175" b="0">
                 <a:solidFill>
-                  <a:srgbClr val="F6F4EC"/>
+                  <a:srgbClr val="FFFFFF"/>
                 </a:solidFill>
                 <a:latin typeface="Arial"/>
                 <a:ea typeface="Arial"/>
@@ -4756,7 +4912,7 @@
             <a:lvl8pPr>
               <a:defRPr sz="2175" b="0">
                 <a:solidFill>
-                  <a:srgbClr val="F6F4EC"/>
+                  <a:srgbClr val="FFFFFF"/>
                 </a:solidFill>
                 <a:latin typeface="Arial"/>
                 <a:ea typeface="Arial"/>
@@ -4766,7 +4922,7 @@
             <a:lvl9pPr>
               <a:defRPr sz="2175" b="0">
                 <a:solidFill>
-                  <a:srgbClr val="F6F4EC"/>
+                  <a:srgbClr val="FFFFFF"/>
                 </a:solidFill>
                 <a:latin typeface="Arial"/>
                 <a:ea typeface="Arial"/>
@@ -4778,7 +4934,7 @@
             <a:pPr>
               <a:defRPr sz="2175" b="0">
                 <a:solidFill>
-                  <a:srgbClr val="F6F4EC"/>
+                  <a:srgbClr val="FFFFFF"/>
                 </a:solidFill>
                 <a:latin typeface="Arial"/>
                 <a:ea typeface="Arial"/>
@@ -4788,7 +4944,7 @@
             <a:r>
               <a:rPr sz="2175" b="0">
                 <a:solidFill>
-                  <a:srgbClr val="F6F4EC"/>
+                  <a:srgbClr val="FFFFFF"/>
                 </a:solidFill>
                 <a:latin typeface="Arial"/>
                 <a:ea typeface="Arial"/>
@@ -4801,10 +4957,10 @@
       </p:sp>
       <p:sp>
         <p:nvSpPr>
-          <p:cNvPr id="5" name="">
+          <p:cNvPr id="6" name="">
             <a:extLst xmlns:a="http://schemas.openxmlformats.org/drawingml/2006/main">
               <a:ext uri="{FF2B5EF4-FFF2-40B4-BE49-F238E27FC236}">
-                <a16:creationId xmlns:a16="http://schemas.microsoft.com/office/drawing/2014/main" id="{E1C989FB-EF8D-4D6C-9644-EF1C7D069FE9}"/>
+                <a16:creationId xmlns:a16="http://schemas.microsoft.com/office/drawing/2014/main" id="{1A0510CC-201E-407A-9376-BB57BADE0AC2}"/>
               </a:ext>
             </a:extLst>
           </p:cNvPr>
@@ -4832,7 +4988,7 @@
             <a:defPPr>
               <a:defRPr sz="1575" b="0">
                 <a:solidFill>
-                  <a:srgbClr val="DDE8DF"/>
+                  <a:srgbClr val="FFFFFF"/>
                 </a:solidFill>
                 <a:latin typeface="Arial"/>
                 <a:ea typeface="Arial"/>
@@ -4842,7 +4998,7 @@
             <a:lvl1pPr>
               <a:defRPr sz="1575" b="0">
                 <a:solidFill>
-                  <a:srgbClr val="DDE8DF"/>
+                  <a:srgbClr val="FFFFFF"/>
                 </a:solidFill>
                 <a:latin typeface="Arial"/>
                 <a:ea typeface="Arial"/>
@@ -4852,7 +5008,7 @@
             <a:lvl2pPr>
               <a:defRPr sz="1575" b="0">
                 <a:solidFill>
-                  <a:srgbClr val="DDE8DF"/>
+                  <a:srgbClr val="FFFFFF"/>
                 </a:solidFill>
                 <a:latin typeface="Arial"/>
                 <a:ea typeface="Arial"/>
@@ -4862,7 +5018,7 @@
             <a:lvl3pPr>
               <a:defRPr sz="1575" b="0">
                 <a:solidFill>
-                  <a:srgbClr val="DDE8DF"/>
+                  <a:srgbClr val="FFFFFF"/>
                 </a:solidFill>
                 <a:latin typeface="Arial"/>
                 <a:ea typeface="Arial"/>
@@ -4872,7 +5028,7 @@
             <a:lvl4pPr>
               <a:defRPr sz="1575" b="0">
                 <a:solidFill>
-                  <a:srgbClr val="DDE8DF"/>
+                  <a:srgbClr val="FFFFFF"/>
                 </a:solidFill>
                 <a:latin typeface="Arial"/>
                 <a:ea typeface="Arial"/>
@@ -4882,7 +5038,7 @@
             <a:lvl5pPr>
               <a:defRPr sz="1575" b="0">
                 <a:solidFill>
-                  <a:srgbClr val="DDE8DF"/>
+                  <a:srgbClr val="FFFFFF"/>
                 </a:solidFill>
                 <a:latin typeface="Arial"/>
                 <a:ea typeface="Arial"/>
@@ -4892,7 +5048,7 @@
             <a:lvl6pPr>
               <a:defRPr sz="1575" b="0">
                 <a:solidFill>
-                  <a:srgbClr val="DDE8DF"/>
+                  <a:srgbClr val="FFFFFF"/>
                 </a:solidFill>
                 <a:latin typeface="Arial"/>
                 <a:ea typeface="Arial"/>
@@ -4902,7 +5058,7 @@
             <a:lvl7pPr>
               <a:defRPr sz="1575" b="0">
                 <a:solidFill>
-                  <a:srgbClr val="DDE8DF"/>
+                  <a:srgbClr val="FFFFFF"/>
                 </a:solidFill>
                 <a:latin typeface="Arial"/>
                 <a:ea typeface="Arial"/>
@@ -4912,7 +5068,7 @@
             <a:lvl8pPr>
               <a:defRPr sz="1575" b="0">
                 <a:solidFill>
-                  <a:srgbClr val="DDE8DF"/>
+                  <a:srgbClr val="FFFFFF"/>
                 </a:solidFill>
                 <a:latin typeface="Arial"/>
                 <a:ea typeface="Arial"/>
@@ -4922,7 +5078,7 @@
             <a:lvl9pPr>
               <a:defRPr sz="1575" b="0">
                 <a:solidFill>
-                  <a:srgbClr val="DDE8DF"/>
+                  <a:srgbClr val="FFFFFF"/>
                 </a:solidFill>
                 <a:latin typeface="Arial"/>
                 <a:ea typeface="Arial"/>
@@ -4934,7 +5090,7 @@
             <a:pPr>
               <a:defRPr sz="1575" b="0">
                 <a:solidFill>
-                  <a:srgbClr val="DDE8DF"/>
+                  <a:srgbClr val="FFFFFF"/>
                 </a:solidFill>
                 <a:latin typeface="Arial"/>
                 <a:ea typeface="Arial"/>
@@ -4944,7 +5100,7 @@
             <a:r>
               <a:rPr sz="1575" b="0">
                 <a:solidFill>
-                  <a:srgbClr val="DDE8DF"/>
+                  <a:srgbClr val="FFFFFF"/>
                 </a:solidFill>
                 <a:latin typeface="Arial"/>
                 <a:ea typeface="Arial"/>
@@ -4957,7 +5113,7 @@
             <a:pPr>
               <a:defRPr sz="1575" b="0">
                 <a:solidFill>
-                  <a:srgbClr val="DDE8DF"/>
+                  <a:srgbClr val="FFFFFF"/>
                 </a:solidFill>
                 <a:latin typeface="Arial"/>
                 <a:ea typeface="Arial"/>
@@ -4967,7 +5123,7 @@
             <a:r>
               <a:rPr sz="1575" b="0">
                 <a:solidFill>
-                  <a:srgbClr val="DDE8DF"/>
+                  <a:srgbClr val="FFFFFF"/>
                 </a:solidFill>
                 <a:latin typeface="Arial"/>
                 <a:ea typeface="Arial"/>
@@ -4981,7 +5137,7 @@
     </p:spTree>
     <p:extLst>
       <p:ext uri="{BB962C8B-B14F-4D97-AF65-F5344CB8AC3E}">
-        <p14:creationId xmlns:p14="http://schemas.microsoft.com/office/powerpoint/2010/main" val="1835274904"/>
+        <p14:creationId xmlns:p14="http://schemas.microsoft.com/office/powerpoint/2010/main" val="41264296"/>
       </p:ext>
     </p:extLst>
   </p:cSld>
@@ -4994,7 +5150,7 @@
     <p:bg>
       <p:bgPr>
         <a:solidFill xmlns:a="http://schemas.openxmlformats.org/drawingml/2006/main">
-          <a:srgbClr val="F6F4EC"/>
+          <a:srgbClr val="CC0000"/>
         </a:solidFill>
       </p:bgPr>
     </p:bg>
@@ -5012,7 +5168,7 @@
           <p:cNvPr id="8" name="">
             <a:extLst xmlns:a="http://schemas.openxmlformats.org/drawingml/2006/main">
               <a:ext uri="{FF2B5EF4-FFF2-40B4-BE49-F238E27FC236}">
-                <a16:creationId xmlns:a16="http://schemas.microsoft.com/office/drawing/2014/main" id="{379ED05C-37C1-4B4E-85E0-FC160545ED58}"/>
+                <a16:creationId xmlns:a16="http://schemas.microsoft.com/office/drawing/2014/main" id="{9F967062-F073-4D2E-9A24-9A742FBABE41}"/>
               </a:ext>
             </a:extLst>
           </p:cNvPr>
@@ -5040,7 +5196,7 @@
             <a:defPPr>
               <a:defRPr sz="3600" b="1">
                 <a:solidFill>
-                  <a:srgbClr val="233D34"/>
+                  <a:srgbClr val="FFFFFF"/>
                 </a:solidFill>
                 <a:latin typeface="Arial"/>
                 <a:ea typeface="Arial"/>
@@ -5050,7 +5206,7 @@
             <a:lvl1pPr>
               <a:defRPr sz="3600" b="1">
                 <a:solidFill>
-                  <a:srgbClr val="233D34"/>
+                  <a:srgbClr val="FFFFFF"/>
                 </a:solidFill>
                 <a:latin typeface="Arial"/>
                 <a:ea typeface="Arial"/>
@@ -5060,7 +5216,7 @@
             <a:lvl2pPr>
               <a:defRPr sz="3600" b="1">
                 <a:solidFill>
-                  <a:srgbClr val="233D34"/>
+                  <a:srgbClr val="FFFFFF"/>
                 </a:solidFill>
                 <a:latin typeface="Arial"/>
                 <a:ea typeface="Arial"/>
@@ -5070,7 +5226,7 @@
             <a:lvl3pPr>
               <a:defRPr sz="3600" b="1">
                 <a:solidFill>
-                  <a:srgbClr val="233D34"/>
+                  <a:srgbClr val="FFFFFF"/>
                 </a:solidFill>
                 <a:latin typeface="Arial"/>
                 <a:ea typeface="Arial"/>
@@ -5080,7 +5236,7 @@
             <a:lvl4pPr>
               <a:defRPr sz="3600" b="1">
                 <a:solidFill>
-                  <a:srgbClr val="233D34"/>
+                  <a:srgbClr val="FFFFFF"/>
                 </a:solidFill>
                 <a:latin typeface="Arial"/>
                 <a:ea typeface="Arial"/>
@@ -5090,7 +5246,7 @@
             <a:lvl5pPr>
               <a:defRPr sz="3600" b="1">
                 <a:solidFill>
-                  <a:srgbClr val="233D34"/>
+                  <a:srgbClr val="FFFFFF"/>
                 </a:solidFill>
                 <a:latin typeface="Arial"/>
                 <a:ea typeface="Arial"/>
@@ -5100,7 +5256,7 @@
             <a:lvl6pPr>
               <a:defRPr sz="3600" b="1">
                 <a:solidFill>
-                  <a:srgbClr val="233D34"/>
+                  <a:srgbClr val="FFFFFF"/>
                 </a:solidFill>
                 <a:latin typeface="Arial"/>
                 <a:ea typeface="Arial"/>
@@ -5110,7 +5266,7 @@
             <a:lvl7pPr>
               <a:defRPr sz="3600" b="1">
                 <a:solidFill>
-                  <a:srgbClr val="233D34"/>
+                  <a:srgbClr val="FFFFFF"/>
                 </a:solidFill>
                 <a:latin typeface="Arial"/>
                 <a:ea typeface="Arial"/>
@@ -5120,7 +5276,7 @@
             <a:lvl8pPr>
               <a:defRPr sz="3600" b="1">
                 <a:solidFill>
-                  <a:srgbClr val="233D34"/>
+                  <a:srgbClr val="FFFFFF"/>
                 </a:solidFill>
                 <a:latin typeface="Arial"/>
                 <a:ea typeface="Arial"/>
@@ -5130,7 +5286,7 @@
             <a:lvl9pPr>
               <a:defRPr sz="3600" b="1">
                 <a:solidFill>
-                  <a:srgbClr val="233D34"/>
+                  <a:srgbClr val="FFFFFF"/>
                 </a:solidFill>
                 <a:latin typeface="Arial"/>
                 <a:ea typeface="Arial"/>
@@ -5142,7 +5298,7 @@
             <a:pPr>
               <a:defRPr sz="3600" b="1">
                 <a:solidFill>
-                  <a:srgbClr val="233D34"/>
+                  <a:srgbClr val="FFFFFF"/>
                 </a:solidFill>
                 <a:latin typeface="Arial"/>
                 <a:ea typeface="Arial"/>
@@ -5152,7 +5308,7 @@
             <a:r>
               <a:rPr sz="3600" b="1">
                 <a:solidFill>
-                  <a:srgbClr val="233D34"/>
+                  <a:srgbClr val="FFFFFF"/>
                 </a:solidFill>
                 <a:latin typeface="Arial"/>
                 <a:ea typeface="Arial"/>
@@ -5168,7 +5324,7 @@
           <p:cNvPr id="2" name="">
             <a:extLst xmlns:a="http://schemas.openxmlformats.org/drawingml/2006/main">
               <a:ext uri="{FF2B5EF4-FFF2-40B4-BE49-F238E27FC236}">
-                <a16:creationId xmlns:a16="http://schemas.microsoft.com/office/drawing/2014/main" id="{3B0D15B5-C217-4496-8A87-885C31C8437B}"/>
+                <a16:creationId xmlns:a16="http://schemas.microsoft.com/office/drawing/2014/main" id="{53C8A3DD-84D0-45ED-B45E-1D74D232AA01}"/>
               </a:ext>
             </a:extLst>
           </p:cNvPr>
@@ -5196,7 +5352,7 @@
             <a:defPPr>
               <a:defRPr sz="1425" b="0">
                 <a:solidFill>
-                  <a:srgbClr val="647168"/>
+                  <a:srgbClr val="FFFFFF"/>
                 </a:solidFill>
                 <a:latin typeface="Arial"/>
                 <a:ea typeface="Arial"/>
@@ -5206,7 +5362,7 @@
             <a:lvl1pPr>
               <a:defRPr sz="1425" b="0">
                 <a:solidFill>
-                  <a:srgbClr val="647168"/>
+                  <a:srgbClr val="FFFFFF"/>
                 </a:solidFill>
                 <a:latin typeface="Arial"/>
                 <a:ea typeface="Arial"/>
@@ -5216,7 +5372,7 @@
             <a:lvl2pPr>
               <a:defRPr sz="1425" b="0">
                 <a:solidFill>
-                  <a:srgbClr val="647168"/>
+                  <a:srgbClr val="FFFFFF"/>
                 </a:solidFill>
                 <a:latin typeface="Arial"/>
                 <a:ea typeface="Arial"/>
@@ -5226,7 +5382,7 @@
             <a:lvl3pPr>
               <a:defRPr sz="1425" b="0">
                 <a:solidFill>
-                  <a:srgbClr val="647168"/>
+                  <a:srgbClr val="FFFFFF"/>
                 </a:solidFill>
                 <a:latin typeface="Arial"/>
                 <a:ea typeface="Arial"/>
@@ -5236,7 +5392,7 @@
             <a:lvl4pPr>
               <a:defRPr sz="1425" b="0">
                 <a:solidFill>
-                  <a:srgbClr val="647168"/>
+                  <a:srgbClr val="FFFFFF"/>
                 </a:solidFill>
                 <a:latin typeface="Arial"/>
                 <a:ea typeface="Arial"/>
@@ -5246,7 +5402,7 @@
             <a:lvl5pPr>
               <a:defRPr sz="1425" b="0">
                 <a:solidFill>
-                  <a:srgbClr val="647168"/>
+                  <a:srgbClr val="FFFFFF"/>
                 </a:solidFill>
                 <a:latin typeface="Arial"/>
                 <a:ea typeface="Arial"/>
@@ -5256,7 +5412,7 @@
             <a:lvl6pPr>
               <a:defRPr sz="1425" b="0">
                 <a:solidFill>
-                  <a:srgbClr val="647168"/>
+                  <a:srgbClr val="FFFFFF"/>
                 </a:solidFill>
                 <a:latin typeface="Arial"/>
                 <a:ea typeface="Arial"/>
@@ -5266,7 +5422,7 @@
             <a:lvl7pPr>
               <a:defRPr sz="1425" b="0">
                 <a:solidFill>
-                  <a:srgbClr val="647168"/>
+                  <a:srgbClr val="FFFFFF"/>
                 </a:solidFill>
                 <a:latin typeface="Arial"/>
                 <a:ea typeface="Arial"/>
@@ -5276,7 +5432,7 @@
             <a:lvl8pPr>
               <a:defRPr sz="1425" b="0">
                 <a:solidFill>
-                  <a:srgbClr val="647168"/>
+                  <a:srgbClr val="FFFFFF"/>
                 </a:solidFill>
                 <a:latin typeface="Arial"/>
                 <a:ea typeface="Arial"/>
@@ -5286,7 +5442,7 @@
             <a:lvl9pPr>
               <a:defRPr sz="1425" b="0">
                 <a:solidFill>
-                  <a:srgbClr val="647168"/>
+                  <a:srgbClr val="FFFFFF"/>
                 </a:solidFill>
                 <a:latin typeface="Arial"/>
                 <a:ea typeface="Arial"/>
@@ -5298,7 +5454,7 @@
             <a:pPr>
               <a:defRPr sz="1425" b="0">
                 <a:solidFill>
-                  <a:srgbClr val="647168"/>
+                  <a:srgbClr val="FFFFFF"/>
                 </a:solidFill>
                 <a:latin typeface="Arial"/>
                 <a:ea typeface="Arial"/>
@@ -5308,7 +5464,7 @@
             <a:r>
               <a:rPr sz="1425" b="0">
                 <a:solidFill>
-                  <a:srgbClr val="647168"/>
+                  <a:srgbClr val="FFFFFF"/>
                 </a:solidFill>
                 <a:latin typeface="Arial"/>
                 <a:ea typeface="Arial"/>
@@ -5324,7 +5480,7 @@
           <p:cNvPr id="3" name="">
             <a:extLst xmlns:a="http://schemas.openxmlformats.org/drawingml/2006/main">
               <a:ext uri="{FF2B5EF4-FFF2-40B4-BE49-F238E27FC236}">
-                <a16:creationId xmlns:a16="http://schemas.microsoft.com/office/drawing/2014/main" id="{C9262008-0362-437D-9160-57AA4D53D313}"/>
+                <a16:creationId xmlns:a16="http://schemas.microsoft.com/office/drawing/2014/main" id="{1178F1B0-4EFD-4491-9CC0-B6632552D46E}"/>
               </a:ext>
             </a:extLst>
           </p:cNvPr>
@@ -5352,7 +5508,7 @@
             <a:defPPr>
               <a:defRPr sz="2700" b="1">
                 <a:solidFill>
-                  <a:srgbClr val="B9362D"/>
+                  <a:srgbClr val="FFFFFF"/>
                 </a:solidFill>
                 <a:latin typeface="Arial"/>
                 <a:ea typeface="Arial"/>
@@ -5362,7 +5518,7 @@
             <a:lvl1pPr>
               <a:defRPr sz="2700" b="1">
                 <a:solidFill>
-                  <a:srgbClr val="B9362D"/>
+                  <a:srgbClr val="FFFFFF"/>
                 </a:solidFill>
                 <a:latin typeface="Arial"/>
                 <a:ea typeface="Arial"/>
@@ -5372,7 +5528,7 @@
             <a:lvl2pPr>
               <a:defRPr sz="2700" b="1">
                 <a:solidFill>
-                  <a:srgbClr val="B9362D"/>
+                  <a:srgbClr val="FFFFFF"/>
                 </a:solidFill>
                 <a:latin typeface="Arial"/>
                 <a:ea typeface="Arial"/>
@@ -5382,7 +5538,7 @@
             <a:lvl3pPr>
               <a:defRPr sz="2700" b="1">
                 <a:solidFill>
-                  <a:srgbClr val="B9362D"/>
+                  <a:srgbClr val="FFFFFF"/>
                 </a:solidFill>
                 <a:latin typeface="Arial"/>
                 <a:ea typeface="Arial"/>
@@ -5392,7 +5548,7 @@
             <a:lvl4pPr>
               <a:defRPr sz="2700" b="1">
                 <a:solidFill>
-                  <a:srgbClr val="B9362D"/>
+                  <a:srgbClr val="FFFFFF"/>
                 </a:solidFill>
                 <a:latin typeface="Arial"/>
                 <a:ea typeface="Arial"/>
@@ -5402,7 +5558,7 @@
             <a:lvl5pPr>
               <a:defRPr sz="2700" b="1">
                 <a:solidFill>
-                  <a:srgbClr val="B9362D"/>
+                  <a:srgbClr val="FFFFFF"/>
                 </a:solidFill>
                 <a:latin typeface="Arial"/>
                 <a:ea typeface="Arial"/>
@@ -5412,7 +5568,7 @@
             <a:lvl6pPr>
               <a:defRPr sz="2700" b="1">
                 <a:solidFill>
-                  <a:srgbClr val="B9362D"/>
+                  <a:srgbClr val="FFFFFF"/>
                 </a:solidFill>
                 <a:latin typeface="Arial"/>
                 <a:ea typeface="Arial"/>
@@ -5422,7 +5578,7 @@
             <a:lvl7pPr>
               <a:defRPr sz="2700" b="1">
                 <a:solidFill>
-                  <a:srgbClr val="B9362D"/>
+                  <a:srgbClr val="FFFFFF"/>
                 </a:solidFill>
                 <a:latin typeface="Arial"/>
                 <a:ea typeface="Arial"/>
@@ -5432,7 +5588,7 @@
             <a:lvl8pPr>
               <a:defRPr sz="2700" b="1">
                 <a:solidFill>
-                  <a:srgbClr val="B9362D"/>
+                  <a:srgbClr val="FFFFFF"/>
                 </a:solidFill>
                 <a:latin typeface="Arial"/>
                 <a:ea typeface="Arial"/>
@@ -5442,7 +5598,7 @@
             <a:lvl9pPr>
               <a:defRPr sz="2700" b="1">
                 <a:solidFill>
-                  <a:srgbClr val="B9362D"/>
+                  <a:srgbClr val="FFFFFF"/>
                 </a:solidFill>
                 <a:latin typeface="Arial"/>
                 <a:ea typeface="Arial"/>
@@ -5454,7 +5610,7 @@
             <a:pPr>
               <a:defRPr sz="2700" b="1">
                 <a:solidFill>
-                  <a:srgbClr val="B9362D"/>
+                  <a:srgbClr val="FFFFFF"/>
                 </a:solidFill>
                 <a:latin typeface="Arial"/>
                 <a:ea typeface="Arial"/>
@@ -5464,7 +5620,7 @@
             <a:r>
               <a:rPr sz="2700" b="1">
                 <a:solidFill>
-                  <a:srgbClr val="B9362D"/>
+                  <a:srgbClr val="FFFFFF"/>
                 </a:solidFill>
                 <a:latin typeface="Arial"/>
                 <a:ea typeface="Arial"/>
@@ -5480,7 +5636,7 @@
           <p:cNvPr id="4" name="">
             <a:extLst xmlns:a="http://schemas.openxmlformats.org/drawingml/2006/main">
               <a:ext uri="{FF2B5EF4-FFF2-40B4-BE49-F238E27FC236}">
-                <a16:creationId xmlns:a16="http://schemas.microsoft.com/office/drawing/2014/main" id="{CB519F79-4AD7-4572-9B0E-DED28BBA5F6D}"/>
+                <a16:creationId xmlns:a16="http://schemas.microsoft.com/office/drawing/2014/main" id="{48F2CBFC-A08C-433C-A753-4EBDE94C5F86}"/>
               </a:ext>
             </a:extLst>
           </p:cNvPr>
@@ -5508,7 +5664,7 @@
             <a:defPPr>
               <a:defRPr sz="2100" b="0">
                 <a:solidFill>
-                  <a:srgbClr val="233D34"/>
+                  <a:srgbClr val="FFFFFF"/>
                 </a:solidFill>
                 <a:latin typeface="Arial"/>
                 <a:ea typeface="Arial"/>
@@ -5518,7 +5674,7 @@
             <a:lvl1pPr>
               <a:defRPr sz="2100" b="0">
                 <a:solidFill>
-                  <a:srgbClr val="233D34"/>
+                  <a:srgbClr val="FFFFFF"/>
                 </a:solidFill>
                 <a:latin typeface="Arial"/>
                 <a:ea typeface="Arial"/>
@@ -5528,7 +5684,7 @@
             <a:lvl2pPr>
               <a:defRPr sz="2100" b="0">
                 <a:solidFill>
-                  <a:srgbClr val="233D34"/>
+                  <a:srgbClr val="FFFFFF"/>
                 </a:solidFill>
                 <a:latin typeface="Arial"/>
                 <a:ea typeface="Arial"/>
@@ -5538,7 +5694,7 @@
             <a:lvl3pPr>
               <a:defRPr sz="2100" b="0">
                 <a:solidFill>
-                  <a:srgbClr val="233D34"/>
+                  <a:srgbClr val="FFFFFF"/>
                 </a:solidFill>
                 <a:latin typeface="Arial"/>
                 <a:ea typeface="Arial"/>
@@ -5548,7 +5704,7 @@
             <a:lvl4pPr>
               <a:defRPr sz="2100" b="0">
                 <a:solidFill>
-                  <a:srgbClr val="233D34"/>
+                  <a:srgbClr val="FFFFFF"/>
                 </a:solidFill>
                 <a:latin typeface="Arial"/>
                 <a:ea typeface="Arial"/>
@@ -5558,7 +5714,7 @@
             <a:lvl5pPr>
               <a:defRPr sz="2100" b="0">
                 <a:solidFill>
-                  <a:srgbClr val="233D34"/>
+                  <a:srgbClr val="FFFFFF"/>
                 </a:solidFill>
                 <a:latin typeface="Arial"/>
                 <a:ea typeface="Arial"/>
@@ -5568,7 +5724,7 @@
             <a:lvl6pPr>
               <a:defRPr sz="2100" b="0">
                 <a:solidFill>
-                  <a:srgbClr val="233D34"/>
+                  <a:srgbClr val="FFFFFF"/>
                 </a:solidFill>
                 <a:latin typeface="Arial"/>
                 <a:ea typeface="Arial"/>
@@ -5578,7 +5734,7 @@
             <a:lvl7pPr>
               <a:defRPr sz="2100" b="0">
                 <a:solidFill>
-                  <a:srgbClr val="233D34"/>
+                  <a:srgbClr val="FFFFFF"/>
                 </a:solidFill>
                 <a:latin typeface="Arial"/>
                 <a:ea typeface="Arial"/>
@@ -5588,7 +5744,7 @@
             <a:lvl8pPr>
               <a:defRPr sz="2100" b="0">
                 <a:solidFill>
-                  <a:srgbClr val="233D34"/>
+                  <a:srgbClr val="FFFFFF"/>
                 </a:solidFill>
                 <a:latin typeface="Arial"/>
                 <a:ea typeface="Arial"/>
@@ -5598,7 +5754,7 @@
             <a:lvl9pPr>
               <a:defRPr sz="2100" b="0">
                 <a:solidFill>
-                  <a:srgbClr val="233D34"/>
+                  <a:srgbClr val="FFFFFF"/>
                 </a:solidFill>
                 <a:latin typeface="Arial"/>
                 <a:ea typeface="Arial"/>
@@ -5610,7 +5766,7 @@
             <a:pPr>
               <a:defRPr sz="2100" b="0">
                 <a:solidFill>
-                  <a:srgbClr val="233D34"/>
+                  <a:srgbClr val="FFFFFF"/>
                 </a:solidFill>
                 <a:latin typeface="Arial"/>
                 <a:ea typeface="Arial"/>
@@ -5620,7 +5776,7 @@
             <a:r>
               <a:rPr sz="2100" b="0">
                 <a:solidFill>
-                  <a:srgbClr val="233D34"/>
+                  <a:srgbClr val="FFFFFF"/>
                 </a:solidFill>
                 <a:latin typeface="Arial"/>
                 <a:ea typeface="Arial"/>
@@ -5633,7 +5789,7 @@
             <a:pPr>
               <a:defRPr sz="2100" b="0">
                 <a:solidFill>
-                  <a:srgbClr val="233D34"/>
+                  <a:srgbClr val="FFFFFF"/>
                 </a:solidFill>
                 <a:latin typeface="Arial"/>
                 <a:ea typeface="Arial"/>
@@ -5643,7 +5799,7 @@
             <a:r>
               <a:rPr sz="2100" b="0">
                 <a:solidFill>
-                  <a:srgbClr val="233D34"/>
+                  <a:srgbClr val="FFFFFF"/>
                 </a:solidFill>
                 <a:latin typeface="Arial"/>
                 <a:ea typeface="Arial"/>
@@ -5656,7 +5812,7 @@
             <a:pPr>
               <a:defRPr sz="2100" b="0">
                 <a:solidFill>
-                  <a:srgbClr val="233D34"/>
+                  <a:srgbClr val="FFFFFF"/>
                 </a:solidFill>
                 <a:latin typeface="Arial"/>
                 <a:ea typeface="Arial"/>
@@ -5666,7 +5822,7 @@
             <a:r>
               <a:rPr sz="2100" b="0">
                 <a:solidFill>
-                  <a:srgbClr val="233D34"/>
+                  <a:srgbClr val="FFFFFF"/>
                 </a:solidFill>
                 <a:latin typeface="Arial"/>
                 <a:ea typeface="Arial"/>
@@ -5679,7 +5835,7 @@
             <a:pPr>
               <a:defRPr sz="2100" b="0">
                 <a:solidFill>
-                  <a:srgbClr val="233D34"/>
+                  <a:srgbClr val="FFFFFF"/>
                 </a:solidFill>
                 <a:latin typeface="Arial"/>
                 <a:ea typeface="Arial"/>
@@ -5689,7 +5845,7 @@
             <a:r>
               <a:rPr sz="2100" b="0">
                 <a:solidFill>
-                  <a:srgbClr val="233D34"/>
+                  <a:srgbClr val="FFFFFF"/>
                 </a:solidFill>
                 <a:latin typeface="Arial"/>
                 <a:ea typeface="Arial"/>
@@ -5705,7 +5861,7 @@
           <p:cNvPr id="5" name="">
             <a:extLst xmlns:a="http://schemas.openxmlformats.org/drawingml/2006/main">
               <a:ext uri="{FF2B5EF4-FFF2-40B4-BE49-F238E27FC236}">
-                <a16:creationId xmlns:a16="http://schemas.microsoft.com/office/drawing/2014/main" id="{B0FF9A48-FBE2-439A-9D45-D397A7DAE705}"/>
+                <a16:creationId xmlns:a16="http://schemas.microsoft.com/office/drawing/2014/main" id="{5FCEAEB4-F97B-4561-95E0-4FBC06AEE524}"/>
               </a:ext>
             </a:extLst>
           </p:cNvPr>
@@ -5733,7 +5889,7 @@
             <a:defPPr>
               <a:defRPr sz="2700" b="1">
                 <a:solidFill>
-                  <a:srgbClr val="B9362D"/>
+                  <a:srgbClr val="FFFFFF"/>
                 </a:solidFill>
                 <a:latin typeface="Arial"/>
                 <a:ea typeface="Arial"/>
@@ -5743,7 +5899,7 @@
             <a:lvl1pPr>
               <a:defRPr sz="2700" b="1">
                 <a:solidFill>
-                  <a:srgbClr val="B9362D"/>
+                  <a:srgbClr val="FFFFFF"/>
                 </a:solidFill>
                 <a:latin typeface="Arial"/>
                 <a:ea typeface="Arial"/>
@@ -5753,7 +5909,7 @@
             <a:lvl2pPr>
               <a:defRPr sz="2700" b="1">
                 <a:solidFill>
-                  <a:srgbClr val="B9362D"/>
+                  <a:srgbClr val="FFFFFF"/>
                 </a:solidFill>
                 <a:latin typeface="Arial"/>
                 <a:ea typeface="Arial"/>
@@ -5763,7 +5919,7 @@
             <a:lvl3pPr>
               <a:defRPr sz="2700" b="1">
                 <a:solidFill>
-                  <a:srgbClr val="B9362D"/>
+                  <a:srgbClr val="FFFFFF"/>
                 </a:solidFill>
                 <a:latin typeface="Arial"/>
                 <a:ea typeface="Arial"/>
@@ -5773,7 +5929,7 @@
             <a:lvl4pPr>
               <a:defRPr sz="2700" b="1">
                 <a:solidFill>
-                  <a:srgbClr val="B9362D"/>
+                  <a:srgbClr val="FFFFFF"/>
                 </a:solidFill>
                 <a:latin typeface="Arial"/>
                 <a:ea typeface="Arial"/>
@@ -5783,7 +5939,7 @@
             <a:lvl5pPr>
               <a:defRPr sz="2700" b="1">
                 <a:solidFill>
-                  <a:srgbClr val="B9362D"/>
+                  <a:srgbClr val="FFFFFF"/>
                 </a:solidFill>
                 <a:latin typeface="Arial"/>
                 <a:ea typeface="Arial"/>
@@ -5793,7 +5949,7 @@
             <a:lvl6pPr>
               <a:defRPr sz="2700" b="1">
                 <a:solidFill>
-                  <a:srgbClr val="B9362D"/>
+                  <a:srgbClr val="FFFFFF"/>
                 </a:solidFill>
                 <a:latin typeface="Arial"/>
                 <a:ea typeface="Arial"/>
@@ -5803,7 +5959,7 @@
             <a:lvl7pPr>
               <a:defRPr sz="2700" b="1">
                 <a:solidFill>
-                  <a:srgbClr val="B9362D"/>
+                  <a:srgbClr val="FFFFFF"/>
                 </a:solidFill>
                 <a:latin typeface="Arial"/>
                 <a:ea typeface="Arial"/>
@@ -5813,7 +5969,7 @@
             <a:lvl8pPr>
               <a:defRPr sz="2700" b="1">
                 <a:solidFill>
-                  <a:srgbClr val="B9362D"/>
+                  <a:srgbClr val="FFFFFF"/>
                 </a:solidFill>
                 <a:latin typeface="Arial"/>
                 <a:ea typeface="Arial"/>
@@ -5823,7 +5979,7 @@
             <a:lvl9pPr>
               <a:defRPr sz="2700" b="1">
                 <a:solidFill>
-                  <a:srgbClr val="B9362D"/>
+                  <a:srgbClr val="FFFFFF"/>
                 </a:solidFill>
                 <a:latin typeface="Arial"/>
                 <a:ea typeface="Arial"/>
@@ -5835,7 +5991,7 @@
             <a:pPr>
               <a:defRPr sz="2700" b="1">
                 <a:solidFill>
-                  <a:srgbClr val="B9362D"/>
+                  <a:srgbClr val="FFFFFF"/>
                 </a:solidFill>
                 <a:latin typeface="Arial"/>
                 <a:ea typeface="Arial"/>
@@ -5845,7 +6001,7 @@
             <a:r>
               <a:rPr sz="2700" b="1">
                 <a:solidFill>
-                  <a:srgbClr val="B9362D"/>
+                  <a:srgbClr val="FFFFFF"/>
                 </a:solidFill>
                 <a:latin typeface="Arial"/>
                 <a:ea typeface="Arial"/>
@@ -5861,7 +6017,7 @@
           <p:cNvPr id="6" name="">
             <a:extLst xmlns:a="http://schemas.openxmlformats.org/drawingml/2006/main">
               <a:ext uri="{FF2B5EF4-FFF2-40B4-BE49-F238E27FC236}">
-                <a16:creationId xmlns:a16="http://schemas.microsoft.com/office/drawing/2014/main" id="{ED455E15-DBC2-4354-886B-7FDC457F0C03}"/>
+                <a16:creationId xmlns:a16="http://schemas.microsoft.com/office/drawing/2014/main" id="{3C27372D-A938-4F35-9D53-DD84AFAFD01B}"/>
               </a:ext>
             </a:extLst>
           </p:cNvPr>
@@ -5889,7 +6045,7 @@
             <a:defPPr>
               <a:defRPr sz="2100" b="0">
                 <a:solidFill>
-                  <a:srgbClr val="233D34"/>
+                  <a:srgbClr val="FFFFFF"/>
                 </a:solidFill>
                 <a:latin typeface="Arial"/>
                 <a:ea typeface="Arial"/>
@@ -5899,7 +6055,7 @@
             <a:lvl1pPr>
               <a:defRPr sz="2100" b="0">
                 <a:solidFill>
-                  <a:srgbClr val="233D34"/>
+                  <a:srgbClr val="FFFFFF"/>
                 </a:solidFill>
                 <a:latin typeface="Arial"/>
                 <a:ea typeface="Arial"/>
@@ -5909,7 +6065,7 @@
             <a:lvl2pPr>
               <a:defRPr sz="2100" b="0">
                 <a:solidFill>
-                  <a:srgbClr val="233D34"/>
+                  <a:srgbClr val="FFFFFF"/>
                 </a:solidFill>
                 <a:latin typeface="Arial"/>
                 <a:ea typeface="Arial"/>
@@ -5919,7 +6075,7 @@
             <a:lvl3pPr>
               <a:defRPr sz="2100" b="0">
                 <a:solidFill>
-                  <a:srgbClr val="233D34"/>
+                  <a:srgbClr val="FFFFFF"/>
                 </a:solidFill>
                 <a:latin typeface="Arial"/>
                 <a:ea typeface="Arial"/>
@@ -5929,7 +6085,7 @@
             <a:lvl4pPr>
               <a:defRPr sz="2100" b="0">
                 <a:solidFill>
-                  <a:srgbClr val="233D34"/>
+                  <a:srgbClr val="FFFFFF"/>
                 </a:solidFill>
                 <a:latin typeface="Arial"/>
                 <a:ea typeface="Arial"/>
@@ -5939,7 +6095,7 @@
             <a:lvl5pPr>
               <a:defRPr sz="2100" b="0">
                 <a:solidFill>
-                  <a:srgbClr val="233D34"/>
+                  <a:srgbClr val="FFFFFF"/>
                 </a:solidFill>
                 <a:latin typeface="Arial"/>
                 <a:ea typeface="Arial"/>
@@ -5949,7 +6105,7 @@
             <a:lvl6pPr>
               <a:defRPr sz="2100" b="0">
                 <a:solidFill>
-                  <a:srgbClr val="233D34"/>
+                  <a:srgbClr val="FFFFFF"/>
                 </a:solidFill>
                 <a:latin typeface="Arial"/>
                 <a:ea typeface="Arial"/>
@@ -5959,7 +6115,7 @@
             <a:lvl7pPr>
               <a:defRPr sz="2100" b="0">
                 <a:solidFill>
-                  <a:srgbClr val="233D34"/>
+                  <a:srgbClr val="FFFFFF"/>
                 </a:solidFill>
                 <a:latin typeface="Arial"/>
                 <a:ea typeface="Arial"/>
@@ -5969,7 +6125,7 @@
             <a:lvl8pPr>
               <a:defRPr sz="2100" b="0">
                 <a:solidFill>
-                  <a:srgbClr val="233D34"/>
+                  <a:srgbClr val="FFFFFF"/>
                 </a:solidFill>
                 <a:latin typeface="Arial"/>
                 <a:ea typeface="Arial"/>
@@ -5979,7 +6135,7 @@
             <a:lvl9pPr>
               <a:defRPr sz="2100" b="0">
                 <a:solidFill>
-                  <a:srgbClr val="233D34"/>
+                  <a:srgbClr val="FFFFFF"/>
                 </a:solidFill>
                 <a:latin typeface="Arial"/>
                 <a:ea typeface="Arial"/>
@@ -5991,7 +6147,7 @@
             <a:pPr>
               <a:defRPr sz="2100" b="0">
                 <a:solidFill>
-                  <a:srgbClr val="233D34"/>
+                  <a:srgbClr val="FFFFFF"/>
                 </a:solidFill>
                 <a:latin typeface="Arial"/>
                 <a:ea typeface="Arial"/>
@@ -6001,7 +6157,7 @@
             <a:r>
               <a:rPr sz="2100" b="0">
                 <a:solidFill>
-                  <a:srgbClr val="233D34"/>
+                  <a:srgbClr val="FFFFFF"/>
                 </a:solidFill>
                 <a:latin typeface="Arial"/>
                 <a:ea typeface="Arial"/>
@@ -6014,7 +6170,7 @@
             <a:pPr>
               <a:defRPr sz="2100" b="0">
                 <a:solidFill>
-                  <a:srgbClr val="233D34"/>
+                  <a:srgbClr val="FFFFFF"/>
                 </a:solidFill>
                 <a:latin typeface="Arial"/>
                 <a:ea typeface="Arial"/>
@@ -6024,7 +6180,7 @@
             <a:r>
               <a:rPr sz="2100" b="0">
                 <a:solidFill>
-                  <a:srgbClr val="233D34"/>
+                  <a:srgbClr val="FFFFFF"/>
                 </a:solidFill>
                 <a:latin typeface="Arial"/>
                 <a:ea typeface="Arial"/>
@@ -6037,7 +6193,7 @@
             <a:pPr>
               <a:defRPr sz="2100" b="0">
                 <a:solidFill>
-                  <a:srgbClr val="233D34"/>
+                  <a:srgbClr val="FFFFFF"/>
                 </a:solidFill>
                 <a:latin typeface="Arial"/>
                 <a:ea typeface="Arial"/>
@@ -6047,7 +6203,7 @@
             <a:r>
               <a:rPr sz="2100" b="0">
                 <a:solidFill>
-                  <a:srgbClr val="233D34"/>
+                  <a:srgbClr val="FFFFFF"/>
                 </a:solidFill>
                 <a:latin typeface="Arial"/>
                 <a:ea typeface="Arial"/>
@@ -6060,7 +6216,7 @@
             <a:pPr>
               <a:defRPr sz="2100" b="0">
                 <a:solidFill>
-                  <a:srgbClr val="233D34"/>
+                  <a:srgbClr val="FFFFFF"/>
                 </a:solidFill>
                 <a:latin typeface="Arial"/>
                 <a:ea typeface="Arial"/>
@@ -6070,7 +6226,7 @@
             <a:r>
               <a:rPr sz="2100" b="0">
                 <a:solidFill>
-                  <a:srgbClr val="233D34"/>
+                  <a:srgbClr val="FFFFFF"/>
                 </a:solidFill>
                 <a:latin typeface="Arial"/>
                 <a:ea typeface="Arial"/>
@@ -6086,7 +6242,7 @@
           <p:cNvPr id="7" name="">
             <a:extLst xmlns:a="http://schemas.openxmlformats.org/drawingml/2006/main">
               <a:ext uri="{FF2B5EF4-FFF2-40B4-BE49-F238E27FC236}">
-                <a16:creationId xmlns:a16="http://schemas.microsoft.com/office/drawing/2014/main" id="{838F36C3-52A9-4362-943A-9578C186528A}"/>
+                <a16:creationId xmlns:a16="http://schemas.microsoft.com/office/drawing/2014/main" id="{3E28833A-54EC-45DB-8BDD-8FA17D631CED}"/>
               </a:ext>
             </a:extLst>
           </p:cNvPr>
@@ -6114,7 +6270,7 @@
             <a:defPPr>
               <a:defRPr sz="2475" b="1">
                 <a:solidFill>
-                  <a:srgbClr val="233D34"/>
+                  <a:srgbClr val="FFFFFF"/>
                 </a:solidFill>
                 <a:latin typeface="Arial"/>
                 <a:ea typeface="Arial"/>
@@ -6124,7 +6280,7 @@
             <a:lvl1pPr>
               <a:defRPr sz="2475" b="1">
                 <a:solidFill>
-                  <a:srgbClr val="233D34"/>
+                  <a:srgbClr val="FFFFFF"/>
                 </a:solidFill>
                 <a:latin typeface="Arial"/>
                 <a:ea typeface="Arial"/>
@@ -6134,7 +6290,7 @@
             <a:lvl2pPr>
               <a:defRPr sz="2475" b="1">
                 <a:solidFill>
-                  <a:srgbClr val="233D34"/>
+                  <a:srgbClr val="FFFFFF"/>
                 </a:solidFill>
                 <a:latin typeface="Arial"/>
                 <a:ea typeface="Arial"/>
@@ -6144,7 +6300,7 @@
             <a:lvl3pPr>
               <a:defRPr sz="2475" b="1">
                 <a:solidFill>
-                  <a:srgbClr val="233D34"/>
+                  <a:srgbClr val="FFFFFF"/>
                 </a:solidFill>
                 <a:latin typeface="Arial"/>
                 <a:ea typeface="Arial"/>
@@ -6154,7 +6310,7 @@
             <a:lvl4pPr>
               <a:defRPr sz="2475" b="1">
                 <a:solidFill>
-                  <a:srgbClr val="233D34"/>
+                  <a:srgbClr val="FFFFFF"/>
                 </a:solidFill>
                 <a:latin typeface="Arial"/>
                 <a:ea typeface="Arial"/>
@@ -6164,7 +6320,7 @@
             <a:lvl5pPr>
               <a:defRPr sz="2475" b="1">
                 <a:solidFill>
-                  <a:srgbClr val="233D34"/>
+                  <a:srgbClr val="FFFFFF"/>
                 </a:solidFill>
                 <a:latin typeface="Arial"/>
                 <a:ea typeface="Arial"/>
@@ -6174,7 +6330,7 @@
             <a:lvl6pPr>
               <a:defRPr sz="2475" b="1">
                 <a:solidFill>
-                  <a:srgbClr val="233D34"/>
+                  <a:srgbClr val="FFFFFF"/>
                 </a:solidFill>
                 <a:latin typeface="Arial"/>
                 <a:ea typeface="Arial"/>
@@ -6184,7 +6340,7 @@
             <a:lvl7pPr>
               <a:defRPr sz="2475" b="1">
                 <a:solidFill>
-                  <a:srgbClr val="233D34"/>
+                  <a:srgbClr val="FFFFFF"/>
                 </a:solidFill>
                 <a:latin typeface="Arial"/>
                 <a:ea typeface="Arial"/>
@@ -6194,7 +6350,7 @@
             <a:lvl8pPr>
               <a:defRPr sz="2475" b="1">
                 <a:solidFill>
-                  <a:srgbClr val="233D34"/>
+                  <a:srgbClr val="FFFFFF"/>
                 </a:solidFill>
                 <a:latin typeface="Arial"/>
                 <a:ea typeface="Arial"/>
@@ -6204,7 +6360,7 @@
             <a:lvl9pPr>
               <a:defRPr sz="2475" b="1">
                 <a:solidFill>
-                  <a:srgbClr val="233D34"/>
+                  <a:srgbClr val="FFFFFF"/>
                 </a:solidFill>
                 <a:latin typeface="Arial"/>
                 <a:ea typeface="Arial"/>
@@ -6216,7 +6372,7 @@
             <a:pPr>
               <a:defRPr sz="2475" b="1">
                 <a:solidFill>
-                  <a:srgbClr val="233D34"/>
+                  <a:srgbClr val="FFFFFF"/>
                 </a:solidFill>
                 <a:latin typeface="Arial"/>
                 <a:ea typeface="Arial"/>
@@ -6226,7 +6382,7 @@
             <a:r>
               <a:rPr sz="2475" b="1">
                 <a:solidFill>
-                  <a:srgbClr val="233D34"/>
+                  <a:srgbClr val="FFFFFF"/>
                 </a:solidFill>
                 <a:latin typeface="Arial"/>
                 <a:ea typeface="Arial"/>
@@ -6240,7 +6396,7 @@
     </p:spTree>
     <p:extLst>
       <p:ext uri="{BB962C8B-B14F-4D97-AF65-F5344CB8AC3E}">
-        <p14:creationId xmlns:p14="http://schemas.microsoft.com/office/powerpoint/2010/main" val="146408330"/>
+        <p14:creationId xmlns:p14="http://schemas.microsoft.com/office/powerpoint/2010/main" val="1381180556"/>
       </p:ext>
     </p:extLst>
   </p:cSld>
@@ -6253,7 +6409,7 @@
     <p:bg>
       <p:bgPr>
         <a:solidFill xmlns:a="http://schemas.openxmlformats.org/drawingml/2006/main">
-          <a:srgbClr val="F6F4EC"/>
+          <a:srgbClr val="FFFFFF"/>
         </a:solidFill>
       </p:bgPr>
     </p:bg>
@@ -6271,7 +6427,7 @@
           <p:cNvPr id="7" name="">
             <a:extLst xmlns:a="http://schemas.openxmlformats.org/drawingml/2006/main">
               <a:ext uri="{FF2B5EF4-FFF2-40B4-BE49-F238E27FC236}">
-                <a16:creationId xmlns:a16="http://schemas.microsoft.com/office/drawing/2014/main" id="{FE96F62B-BB7C-46FA-9F00-75DEA1C89619}"/>
+                <a16:creationId xmlns:a16="http://schemas.microsoft.com/office/drawing/2014/main" id="{33FD321D-AEE1-43EA-A4B1-F7AC45241FEB}"/>
               </a:ext>
             </a:extLst>
           </p:cNvPr>
@@ -6299,7 +6455,7 @@
             <a:defPPr>
               <a:defRPr sz="3600" b="1">
                 <a:solidFill>
-                  <a:srgbClr val="233D34"/>
+                  <a:srgbClr val="CC0000"/>
                 </a:solidFill>
                 <a:latin typeface="Arial"/>
                 <a:ea typeface="Arial"/>
@@ -6309,7 +6465,7 @@
             <a:lvl1pPr>
               <a:defRPr sz="3600" b="1">
                 <a:solidFill>
-                  <a:srgbClr val="233D34"/>
+                  <a:srgbClr val="CC0000"/>
                 </a:solidFill>
                 <a:latin typeface="Arial"/>
                 <a:ea typeface="Arial"/>
@@ -6319,7 +6475,7 @@
             <a:lvl2pPr>
               <a:defRPr sz="3600" b="1">
                 <a:solidFill>
-                  <a:srgbClr val="233D34"/>
+                  <a:srgbClr val="CC0000"/>
                 </a:solidFill>
                 <a:latin typeface="Arial"/>
                 <a:ea typeface="Arial"/>
@@ -6329,7 +6485,7 @@
             <a:lvl3pPr>
               <a:defRPr sz="3600" b="1">
                 <a:solidFill>
-                  <a:srgbClr val="233D34"/>
+                  <a:srgbClr val="CC0000"/>
                 </a:solidFill>
                 <a:latin typeface="Arial"/>
                 <a:ea typeface="Arial"/>
@@ -6339,7 +6495,7 @@
             <a:lvl4pPr>
               <a:defRPr sz="3600" b="1">
                 <a:solidFill>
-                  <a:srgbClr val="233D34"/>
+                  <a:srgbClr val="CC0000"/>
                 </a:solidFill>
                 <a:latin typeface="Arial"/>
                 <a:ea typeface="Arial"/>
@@ -6349,7 +6505,7 @@
             <a:lvl5pPr>
               <a:defRPr sz="3600" b="1">
                 <a:solidFill>
-                  <a:srgbClr val="233D34"/>
+                  <a:srgbClr val="CC0000"/>
                 </a:solidFill>
                 <a:latin typeface="Arial"/>
                 <a:ea typeface="Arial"/>
@@ -6359,7 +6515,7 @@
             <a:lvl6pPr>
               <a:defRPr sz="3600" b="1">
                 <a:solidFill>
-                  <a:srgbClr val="233D34"/>
+                  <a:srgbClr val="CC0000"/>
                 </a:solidFill>
                 <a:latin typeface="Arial"/>
                 <a:ea typeface="Arial"/>
@@ -6369,7 +6525,7 @@
             <a:lvl7pPr>
               <a:defRPr sz="3600" b="1">
                 <a:solidFill>
-                  <a:srgbClr val="233D34"/>
+                  <a:srgbClr val="CC0000"/>
                 </a:solidFill>
                 <a:latin typeface="Arial"/>
                 <a:ea typeface="Arial"/>
@@ -6379,7 +6535,7 @@
             <a:lvl8pPr>
               <a:defRPr sz="3600" b="1">
                 <a:solidFill>
-                  <a:srgbClr val="233D34"/>
+                  <a:srgbClr val="CC0000"/>
                 </a:solidFill>
                 <a:latin typeface="Arial"/>
                 <a:ea typeface="Arial"/>
@@ -6389,7 +6545,7 @@
             <a:lvl9pPr>
               <a:defRPr sz="3600" b="1">
                 <a:solidFill>
-                  <a:srgbClr val="233D34"/>
+                  <a:srgbClr val="CC0000"/>
                 </a:solidFill>
                 <a:latin typeface="Arial"/>
                 <a:ea typeface="Arial"/>
@@ -6401,7 +6557,7 @@
             <a:pPr>
               <a:defRPr sz="3600" b="1">
                 <a:solidFill>
-                  <a:srgbClr val="233D34"/>
+                  <a:srgbClr val="CC0000"/>
                 </a:solidFill>
                 <a:latin typeface="Arial"/>
                 <a:ea typeface="Arial"/>
@@ -6411,7 +6567,7 @@
             <a:r>
               <a:rPr sz="3600" b="1">
                 <a:solidFill>
-                  <a:srgbClr val="233D34"/>
+                  <a:srgbClr val="CC0000"/>
                 </a:solidFill>
                 <a:latin typeface="Arial"/>
                 <a:ea typeface="Arial"/>
@@ -6427,7 +6583,7 @@
           <p:cNvPr id="2" name="">
             <a:extLst xmlns:a="http://schemas.openxmlformats.org/drawingml/2006/main">
               <a:ext uri="{FF2B5EF4-FFF2-40B4-BE49-F238E27FC236}">
-                <a16:creationId xmlns:a16="http://schemas.microsoft.com/office/drawing/2014/main" id="{B9A8C35B-47FB-409B-B54B-411F697C2064}"/>
+                <a16:creationId xmlns:a16="http://schemas.microsoft.com/office/drawing/2014/main" id="{F4A070BA-33A9-4C65-8D46-BABC6246A325}"/>
               </a:ext>
             </a:extLst>
           </p:cNvPr>
@@ -6455,7 +6611,7 @@
             <a:defPPr>
               <a:defRPr sz="1425" b="0">
                 <a:solidFill>
-                  <a:srgbClr val="647168"/>
+                  <a:srgbClr val="595959"/>
                 </a:solidFill>
                 <a:latin typeface="Arial"/>
                 <a:ea typeface="Arial"/>
@@ -6465,7 +6621,7 @@
             <a:lvl1pPr>
               <a:defRPr sz="1425" b="0">
                 <a:solidFill>
-                  <a:srgbClr val="647168"/>
+                  <a:srgbClr val="595959"/>
                 </a:solidFill>
                 <a:latin typeface="Arial"/>
                 <a:ea typeface="Arial"/>
@@ -6475,7 +6631,7 @@
             <a:lvl2pPr>
               <a:defRPr sz="1425" b="0">
                 <a:solidFill>
-                  <a:srgbClr val="647168"/>
+                  <a:srgbClr val="595959"/>
                 </a:solidFill>
                 <a:latin typeface="Arial"/>
                 <a:ea typeface="Arial"/>
@@ -6485,7 +6641,7 @@
             <a:lvl3pPr>
               <a:defRPr sz="1425" b="0">
                 <a:solidFill>
-                  <a:srgbClr val="647168"/>
+                  <a:srgbClr val="595959"/>
                 </a:solidFill>
                 <a:latin typeface="Arial"/>
                 <a:ea typeface="Arial"/>
@@ -6495,7 +6651,7 @@
             <a:lvl4pPr>
               <a:defRPr sz="1425" b="0">
                 <a:solidFill>
-                  <a:srgbClr val="647168"/>
+                  <a:srgbClr val="595959"/>
                 </a:solidFill>
                 <a:latin typeface="Arial"/>
                 <a:ea typeface="Arial"/>
@@ -6505,7 +6661,7 @@
             <a:lvl5pPr>
               <a:defRPr sz="1425" b="0">
                 <a:solidFill>
-                  <a:srgbClr val="647168"/>
+                  <a:srgbClr val="595959"/>
                 </a:solidFill>
                 <a:latin typeface="Arial"/>
                 <a:ea typeface="Arial"/>
@@ -6515,7 +6671,7 @@
             <a:lvl6pPr>
               <a:defRPr sz="1425" b="0">
                 <a:solidFill>
-                  <a:srgbClr val="647168"/>
+                  <a:srgbClr val="595959"/>
                 </a:solidFill>
                 <a:latin typeface="Arial"/>
                 <a:ea typeface="Arial"/>
@@ -6525,7 +6681,7 @@
             <a:lvl7pPr>
               <a:defRPr sz="1425" b="0">
                 <a:solidFill>
-                  <a:srgbClr val="647168"/>
+                  <a:srgbClr val="595959"/>
                 </a:solidFill>
                 <a:latin typeface="Arial"/>
                 <a:ea typeface="Arial"/>
@@ -6535,7 +6691,7 @@
             <a:lvl8pPr>
               <a:defRPr sz="1425" b="0">
                 <a:solidFill>
-                  <a:srgbClr val="647168"/>
+                  <a:srgbClr val="595959"/>
                 </a:solidFill>
                 <a:latin typeface="Arial"/>
                 <a:ea typeface="Arial"/>
@@ -6545,7 +6701,7 @@
             <a:lvl9pPr>
               <a:defRPr sz="1425" b="0">
                 <a:solidFill>
-                  <a:srgbClr val="647168"/>
+                  <a:srgbClr val="595959"/>
                 </a:solidFill>
                 <a:latin typeface="Arial"/>
                 <a:ea typeface="Arial"/>
@@ -6557,7 +6713,7 @@
             <a:pPr>
               <a:defRPr sz="1425" b="0">
                 <a:solidFill>
-                  <a:srgbClr val="647168"/>
+                  <a:srgbClr val="595959"/>
                 </a:solidFill>
                 <a:latin typeface="Arial"/>
                 <a:ea typeface="Arial"/>
@@ -6567,7 +6723,7 @@
             <a:r>
               <a:rPr sz="1425" b="0">
                 <a:solidFill>
-                  <a:srgbClr val="647168"/>
+                  <a:srgbClr val="595959"/>
                 </a:solidFill>
                 <a:latin typeface="Arial"/>
                 <a:ea typeface="Arial"/>
@@ -6583,7 +6739,7 @@
           <p:cNvPr id="3" name="">
             <a:extLst xmlns:a="http://schemas.openxmlformats.org/drawingml/2006/main">
               <a:ext uri="{FF2B5EF4-FFF2-40B4-BE49-F238E27FC236}">
-                <a16:creationId xmlns:a16="http://schemas.microsoft.com/office/drawing/2014/main" id="{889EB035-23C5-40C1-B29E-E36E48E7707D}"/>
+                <a16:creationId xmlns:a16="http://schemas.microsoft.com/office/drawing/2014/main" id="{DBFC4B7E-523C-4DD1-847F-91F66E881E18}"/>
               </a:ext>
             </a:extLst>
           </p:cNvPr>
@@ -6611,7 +6767,7 @@
             <a:defPPr>
               <a:defRPr sz="4350" b="1">
                 <a:solidFill>
-                  <a:srgbClr val="B9362D"/>
+                  <a:srgbClr val="CC0000"/>
                 </a:solidFill>
                 <a:latin typeface="Arial"/>
                 <a:ea typeface="Arial"/>
@@ -6621,7 +6777,7 @@
             <a:lvl1pPr>
               <a:defRPr sz="4350" b="1">
                 <a:solidFill>
-                  <a:srgbClr val="B9362D"/>
+                  <a:srgbClr val="CC0000"/>
                 </a:solidFill>
                 <a:latin typeface="Arial"/>
                 <a:ea typeface="Arial"/>
@@ -6631,7 +6787,7 @@
             <a:lvl2pPr>
               <a:defRPr sz="4350" b="1">
                 <a:solidFill>
-                  <a:srgbClr val="B9362D"/>
+                  <a:srgbClr val="CC0000"/>
                 </a:solidFill>
                 <a:latin typeface="Arial"/>
                 <a:ea typeface="Arial"/>
@@ -6641,7 +6797,7 @@
             <a:lvl3pPr>
               <a:defRPr sz="4350" b="1">
                 <a:solidFill>
-                  <a:srgbClr val="B9362D"/>
+                  <a:srgbClr val="CC0000"/>
                 </a:solidFill>
                 <a:latin typeface="Arial"/>
                 <a:ea typeface="Arial"/>
@@ -6651,7 +6807,7 @@
             <a:lvl4pPr>
               <a:defRPr sz="4350" b="1">
                 <a:solidFill>
-                  <a:srgbClr val="B9362D"/>
+                  <a:srgbClr val="CC0000"/>
                 </a:solidFill>
                 <a:latin typeface="Arial"/>
                 <a:ea typeface="Arial"/>
@@ -6661,7 +6817,7 @@
             <a:lvl5pPr>
               <a:defRPr sz="4350" b="1">
                 <a:solidFill>
-                  <a:srgbClr val="B9362D"/>
+                  <a:srgbClr val="CC0000"/>
                 </a:solidFill>
                 <a:latin typeface="Arial"/>
                 <a:ea typeface="Arial"/>
@@ -6671,7 +6827,7 @@
             <a:lvl6pPr>
               <a:defRPr sz="4350" b="1">
                 <a:solidFill>
-                  <a:srgbClr val="B9362D"/>
+                  <a:srgbClr val="CC0000"/>
                 </a:solidFill>
                 <a:latin typeface="Arial"/>
                 <a:ea typeface="Arial"/>
@@ -6681,7 +6837,7 @@
             <a:lvl7pPr>
               <a:defRPr sz="4350" b="1">
                 <a:solidFill>
-                  <a:srgbClr val="B9362D"/>
+                  <a:srgbClr val="CC0000"/>
                 </a:solidFill>
                 <a:latin typeface="Arial"/>
                 <a:ea typeface="Arial"/>
@@ -6691,7 +6847,7 @@
             <a:lvl8pPr>
               <a:defRPr sz="4350" b="1">
                 <a:solidFill>
-                  <a:srgbClr val="B9362D"/>
+                  <a:srgbClr val="CC0000"/>
                 </a:solidFill>
                 <a:latin typeface="Arial"/>
                 <a:ea typeface="Arial"/>
@@ -6701,7 +6857,7 @@
             <a:lvl9pPr>
               <a:defRPr sz="4350" b="1">
                 <a:solidFill>
-                  <a:srgbClr val="B9362D"/>
+                  <a:srgbClr val="CC0000"/>
                 </a:solidFill>
                 <a:latin typeface="Arial"/>
                 <a:ea typeface="Arial"/>
@@ -6713,7 +6869,7 @@
             <a:pPr>
               <a:defRPr sz="4350" b="1">
                 <a:solidFill>
-                  <a:srgbClr val="B9362D"/>
+                  <a:srgbClr val="CC0000"/>
                 </a:solidFill>
                 <a:latin typeface="Arial"/>
                 <a:ea typeface="Arial"/>
@@ -6723,7 +6879,7 @@
             <a:r>
               <a:rPr sz="4350" b="1">
                 <a:solidFill>
-                  <a:srgbClr val="B9362D"/>
+                  <a:srgbClr val="CC0000"/>
                 </a:solidFill>
                 <a:latin typeface="Arial"/>
                 <a:ea typeface="Arial"/>
@@ -6736,7 +6892,7 @@
             <a:pPr>
               <a:defRPr sz="4350" b="1">
                 <a:solidFill>
-                  <a:srgbClr val="B9362D"/>
+                  <a:srgbClr val="CC0000"/>
                 </a:solidFill>
                 <a:latin typeface="Arial"/>
                 <a:ea typeface="Arial"/>
@@ -6746,7 +6902,7 @@
             <a:r>
               <a:rPr sz="4350" b="1">
                 <a:solidFill>
-                  <a:srgbClr val="B9362D"/>
+                  <a:srgbClr val="CC0000"/>
                 </a:solidFill>
                 <a:latin typeface="Arial"/>
                 <a:ea typeface="Arial"/>
@@ -6759,7 +6915,7 @@
             <a:pPr>
               <a:defRPr sz="4350" b="1">
                 <a:solidFill>
-                  <a:srgbClr val="B9362D"/>
+                  <a:srgbClr val="CC0000"/>
                 </a:solidFill>
                 <a:latin typeface="Arial"/>
                 <a:ea typeface="Arial"/>
@@ -6769,7 +6925,7 @@
             <a:r>
               <a:rPr sz="4350" b="1">
                 <a:solidFill>
-                  <a:srgbClr val="B9362D"/>
+                  <a:srgbClr val="CC0000"/>
                 </a:solidFill>
                 <a:latin typeface="Arial"/>
                 <a:ea typeface="Arial"/>
@@ -6785,7 +6941,7 @@
           <p:cNvPr id="4" name="">
             <a:extLst xmlns:a="http://schemas.openxmlformats.org/drawingml/2006/main">
               <a:ext uri="{FF2B5EF4-FFF2-40B4-BE49-F238E27FC236}">
-                <a16:creationId xmlns:a16="http://schemas.microsoft.com/office/drawing/2014/main" id="{2A4C5756-FE2F-4C95-A301-18AE19C8017A}"/>
+                <a16:creationId xmlns:a16="http://schemas.microsoft.com/office/drawing/2014/main" id="{FB9807B7-4591-4527-B8B3-30B81AAAB316}"/>
               </a:ext>
             </a:extLst>
           </p:cNvPr>
@@ -6813,7 +6969,7 @@
             <a:defPPr>
               <a:defRPr sz="2175" b="0">
                 <a:solidFill>
-                  <a:srgbClr val="233D34"/>
+                  <a:srgbClr val="000000"/>
                 </a:solidFill>
                 <a:latin typeface="Arial"/>
                 <a:ea typeface="Arial"/>
@@ -6823,7 +6979,7 @@
             <a:lvl1pPr>
               <a:defRPr sz="2175" b="0">
                 <a:solidFill>
-                  <a:srgbClr val="233D34"/>
+                  <a:srgbClr val="000000"/>
                 </a:solidFill>
                 <a:latin typeface="Arial"/>
                 <a:ea typeface="Arial"/>
@@ -6833,7 +6989,7 @@
             <a:lvl2pPr>
               <a:defRPr sz="2175" b="0">
                 <a:solidFill>
-                  <a:srgbClr val="233D34"/>
+                  <a:srgbClr val="000000"/>
                 </a:solidFill>
                 <a:latin typeface="Arial"/>
                 <a:ea typeface="Arial"/>
@@ -6843,7 +6999,7 @@
             <a:lvl3pPr>
               <a:defRPr sz="2175" b="0">
                 <a:solidFill>
-                  <a:srgbClr val="233D34"/>
+                  <a:srgbClr val="000000"/>
                 </a:solidFill>
                 <a:latin typeface="Arial"/>
                 <a:ea typeface="Arial"/>
@@ -6853,7 +7009,7 @@
             <a:lvl4pPr>
               <a:defRPr sz="2175" b="0">
                 <a:solidFill>
-                  <a:srgbClr val="233D34"/>
+                  <a:srgbClr val="000000"/>
                 </a:solidFill>
                 <a:latin typeface="Arial"/>
                 <a:ea typeface="Arial"/>
@@ -6863,7 +7019,7 @@
             <a:lvl5pPr>
               <a:defRPr sz="2175" b="0">
                 <a:solidFill>
-                  <a:srgbClr val="233D34"/>
+                  <a:srgbClr val="000000"/>
                 </a:solidFill>
                 <a:latin typeface="Arial"/>
                 <a:ea typeface="Arial"/>
@@ -6873,7 +7029,7 @@
             <a:lvl6pPr>
               <a:defRPr sz="2175" b="0">
                 <a:solidFill>
-                  <a:srgbClr val="233D34"/>
+                  <a:srgbClr val="000000"/>
                 </a:solidFill>
                 <a:latin typeface="Arial"/>
                 <a:ea typeface="Arial"/>
@@ -6883,7 +7039,7 @@
             <a:lvl7pPr>
               <a:defRPr sz="2175" b="0">
                 <a:solidFill>
-                  <a:srgbClr val="233D34"/>
+                  <a:srgbClr val="000000"/>
                 </a:solidFill>
                 <a:latin typeface="Arial"/>
                 <a:ea typeface="Arial"/>
@@ -6893,7 +7049,7 @@
             <a:lvl8pPr>
               <a:defRPr sz="2175" b="0">
                 <a:solidFill>
-                  <a:srgbClr val="233D34"/>
+                  <a:srgbClr val="000000"/>
                 </a:solidFill>
                 <a:latin typeface="Arial"/>
                 <a:ea typeface="Arial"/>
@@ -6903,7 +7059,7 @@
             <a:lvl9pPr>
               <a:defRPr sz="2175" b="0">
                 <a:solidFill>
-                  <a:srgbClr val="233D34"/>
+                  <a:srgbClr val="000000"/>
                 </a:solidFill>
                 <a:latin typeface="Arial"/>
                 <a:ea typeface="Arial"/>
@@ -6915,7 +7071,7 @@
             <a:pPr>
               <a:defRPr sz="2175" b="0">
                 <a:solidFill>
-                  <a:srgbClr val="233D34"/>
+                  <a:srgbClr val="000000"/>
                 </a:solidFill>
                 <a:latin typeface="Arial"/>
                 <a:ea typeface="Arial"/>
@@ -6925,7 +7081,7 @@
             <a:r>
               <a:rPr sz="2175" b="0">
                 <a:solidFill>
-                  <a:srgbClr val="233D34"/>
+                  <a:srgbClr val="000000"/>
                 </a:solidFill>
                 <a:latin typeface="Arial"/>
                 <a:ea typeface="Arial"/>
@@ -6941,7 +7097,7 @@
           <p:cNvPr id="5" name="">
             <a:extLst xmlns:a="http://schemas.openxmlformats.org/drawingml/2006/main">
               <a:ext uri="{FF2B5EF4-FFF2-40B4-BE49-F238E27FC236}">
-                <a16:creationId xmlns:a16="http://schemas.microsoft.com/office/drawing/2014/main" id="{E63A572E-A83B-4679-83B1-FDC4DF0B680E}"/>
+                <a16:creationId xmlns:a16="http://schemas.microsoft.com/office/drawing/2014/main" id="{58C3A7E9-3233-479F-94E9-A92F229F8B12}"/>
               </a:ext>
             </a:extLst>
           </p:cNvPr>
@@ -6969,7 +7125,7 @@
             <a:defPPr>
               <a:defRPr sz="2175" b="0">
                 <a:solidFill>
-                  <a:srgbClr val="233D34"/>
+                  <a:srgbClr val="000000"/>
                 </a:solidFill>
                 <a:latin typeface="Arial"/>
                 <a:ea typeface="Arial"/>
@@ -6979,7 +7135,7 @@
             <a:lvl1pPr>
               <a:defRPr sz="2175" b="0">
                 <a:solidFill>
-                  <a:srgbClr val="233D34"/>
+                  <a:srgbClr val="000000"/>
                 </a:solidFill>
                 <a:latin typeface="Arial"/>
                 <a:ea typeface="Arial"/>
@@ -6989,7 +7145,7 @@
             <a:lvl2pPr>
               <a:defRPr sz="2175" b="0">
                 <a:solidFill>
-                  <a:srgbClr val="233D34"/>
+                  <a:srgbClr val="000000"/>
                 </a:solidFill>
                 <a:latin typeface="Arial"/>
                 <a:ea typeface="Arial"/>
@@ -6999,7 +7155,7 @@
             <a:lvl3pPr>
               <a:defRPr sz="2175" b="0">
                 <a:solidFill>
-                  <a:srgbClr val="233D34"/>
+                  <a:srgbClr val="000000"/>
                 </a:solidFill>
                 <a:latin typeface="Arial"/>
                 <a:ea typeface="Arial"/>
@@ -7009,7 +7165,7 @@
             <a:lvl4pPr>
               <a:defRPr sz="2175" b="0">
                 <a:solidFill>
-                  <a:srgbClr val="233D34"/>
+                  <a:srgbClr val="000000"/>
                 </a:solidFill>
                 <a:latin typeface="Arial"/>
                 <a:ea typeface="Arial"/>
@@ -7019,7 +7175,7 @@
             <a:lvl5pPr>
               <a:defRPr sz="2175" b="0">
                 <a:solidFill>
-                  <a:srgbClr val="233D34"/>
+                  <a:srgbClr val="000000"/>
                 </a:solidFill>
                 <a:latin typeface="Arial"/>
                 <a:ea typeface="Arial"/>
@@ -7029,7 +7185,7 @@
             <a:lvl6pPr>
               <a:defRPr sz="2175" b="0">
                 <a:solidFill>
-                  <a:srgbClr val="233D34"/>
+                  <a:srgbClr val="000000"/>
                 </a:solidFill>
                 <a:latin typeface="Arial"/>
                 <a:ea typeface="Arial"/>
@@ -7039,7 +7195,7 @@
             <a:lvl7pPr>
               <a:defRPr sz="2175" b="0">
                 <a:solidFill>
-                  <a:srgbClr val="233D34"/>
+                  <a:srgbClr val="000000"/>
                 </a:solidFill>
                 <a:latin typeface="Arial"/>
                 <a:ea typeface="Arial"/>
@@ -7049,7 +7205,7 @@
             <a:lvl8pPr>
               <a:defRPr sz="2175" b="0">
                 <a:solidFill>
-                  <a:srgbClr val="233D34"/>
+                  <a:srgbClr val="000000"/>
                 </a:solidFill>
                 <a:latin typeface="Arial"/>
                 <a:ea typeface="Arial"/>
@@ -7059,7 +7215,7 @@
             <a:lvl9pPr>
               <a:defRPr sz="2175" b="0">
                 <a:solidFill>
-                  <a:srgbClr val="233D34"/>
+                  <a:srgbClr val="000000"/>
                 </a:solidFill>
                 <a:latin typeface="Arial"/>
                 <a:ea typeface="Arial"/>
@@ -7071,7 +7227,7 @@
             <a:pPr>
               <a:defRPr sz="2175" b="0">
                 <a:solidFill>
-                  <a:srgbClr val="233D34"/>
+                  <a:srgbClr val="000000"/>
                 </a:solidFill>
                 <a:latin typeface="Arial"/>
                 <a:ea typeface="Arial"/>
@@ -7081,7 +7237,7 @@
             <a:r>
               <a:rPr sz="2175" b="0">
                 <a:solidFill>
-                  <a:srgbClr val="233D34"/>
+                  <a:srgbClr val="000000"/>
                 </a:solidFill>
                 <a:latin typeface="Arial"/>
                 <a:ea typeface="Arial"/>
@@ -7097,7 +7253,7 @@
           <p:cNvPr id="6" name="">
             <a:extLst xmlns:a="http://schemas.openxmlformats.org/drawingml/2006/main">
               <a:ext uri="{FF2B5EF4-FFF2-40B4-BE49-F238E27FC236}">
-                <a16:creationId xmlns:a16="http://schemas.microsoft.com/office/drawing/2014/main" id="{D56CB24F-4A81-4CA0-A097-32FE01998B46}"/>
+                <a16:creationId xmlns:a16="http://schemas.microsoft.com/office/drawing/2014/main" id="{4E35522F-7BC6-4AFD-A423-6F9750DE97A5}"/>
               </a:ext>
             </a:extLst>
           </p:cNvPr>
@@ -7125,7 +7281,7 @@
             <a:defPPr>
               <a:defRPr sz="2250" b="0">
                 <a:solidFill>
-                  <a:srgbClr val="233D34"/>
+                  <a:srgbClr val="000000"/>
                 </a:solidFill>
                 <a:latin typeface="Arial"/>
                 <a:ea typeface="Arial"/>
@@ -7135,7 +7291,7 @@
             <a:lvl1pPr>
               <a:defRPr sz="2250" b="0">
                 <a:solidFill>
-                  <a:srgbClr val="233D34"/>
+                  <a:srgbClr val="000000"/>
                 </a:solidFill>
                 <a:latin typeface="Arial"/>
                 <a:ea typeface="Arial"/>
@@ -7145,7 +7301,7 @@
             <a:lvl2pPr>
               <a:defRPr sz="2250" b="0">
                 <a:solidFill>
-                  <a:srgbClr val="233D34"/>
+                  <a:srgbClr val="000000"/>
                 </a:solidFill>
                 <a:latin typeface="Arial"/>
                 <a:ea typeface="Arial"/>
@@ -7155,7 +7311,7 @@
             <a:lvl3pPr>
               <a:defRPr sz="2250" b="0">
                 <a:solidFill>
-                  <a:srgbClr val="233D34"/>
+                  <a:srgbClr val="000000"/>
                 </a:solidFill>
                 <a:latin typeface="Arial"/>
                 <a:ea typeface="Arial"/>
@@ -7165,7 +7321,7 @@
             <a:lvl4pPr>
               <a:defRPr sz="2250" b="0">
                 <a:solidFill>
-                  <a:srgbClr val="233D34"/>
+                  <a:srgbClr val="000000"/>
                 </a:solidFill>
                 <a:latin typeface="Arial"/>
                 <a:ea typeface="Arial"/>
@@ -7175,7 +7331,7 @@
             <a:lvl5pPr>
               <a:defRPr sz="2250" b="0">
                 <a:solidFill>
-                  <a:srgbClr val="233D34"/>
+                  <a:srgbClr val="000000"/>
                 </a:solidFill>
                 <a:latin typeface="Arial"/>
                 <a:ea typeface="Arial"/>
@@ -7185,7 +7341,7 @@
             <a:lvl6pPr>
               <a:defRPr sz="2250" b="0">
                 <a:solidFill>
-                  <a:srgbClr val="233D34"/>
+                  <a:srgbClr val="000000"/>
                 </a:solidFill>
                 <a:latin typeface="Arial"/>
                 <a:ea typeface="Arial"/>
@@ -7195,7 +7351,7 @@
             <a:lvl7pPr>
               <a:defRPr sz="2250" b="0">
                 <a:solidFill>
-                  <a:srgbClr val="233D34"/>
+                  <a:srgbClr val="000000"/>
                 </a:solidFill>
                 <a:latin typeface="Arial"/>
                 <a:ea typeface="Arial"/>
@@ -7205,7 +7361,7 @@
             <a:lvl8pPr>
               <a:defRPr sz="2250" b="0">
                 <a:solidFill>
-                  <a:srgbClr val="233D34"/>
+                  <a:srgbClr val="000000"/>
                 </a:solidFill>
                 <a:latin typeface="Arial"/>
                 <a:ea typeface="Arial"/>
@@ -7215,7 +7371,7 @@
             <a:lvl9pPr>
               <a:defRPr sz="2250" b="0">
                 <a:solidFill>
-                  <a:srgbClr val="233D34"/>
+                  <a:srgbClr val="000000"/>
                 </a:solidFill>
                 <a:latin typeface="Arial"/>
                 <a:ea typeface="Arial"/>
@@ -7227,7 +7383,7 @@
             <a:pPr>
               <a:defRPr sz="2250" b="0">
                 <a:solidFill>
-                  <a:srgbClr val="233D34"/>
+                  <a:srgbClr val="000000"/>
                 </a:solidFill>
                 <a:latin typeface="Arial"/>
                 <a:ea typeface="Arial"/>
@@ -7237,7 +7393,7 @@
             <a:r>
               <a:rPr sz="2250" b="0">
                 <a:solidFill>
-                  <a:srgbClr val="233D34"/>
+                  <a:srgbClr val="000000"/>
                 </a:solidFill>
                 <a:latin typeface="Arial"/>
                 <a:ea typeface="Arial"/>
@@ -7251,7 +7407,7 @@
     </p:spTree>
     <p:extLst>
       <p:ext uri="{BB962C8B-B14F-4D97-AF65-F5344CB8AC3E}">
-        <p14:creationId xmlns:p14="http://schemas.microsoft.com/office/powerpoint/2010/main" val="1882675090"/>
+        <p14:creationId xmlns:p14="http://schemas.microsoft.com/office/powerpoint/2010/main" val="1517868067"/>
       </p:ext>
     </p:extLst>
   </p:cSld>
@@ -7264,7 +7420,7 @@
     <p:bg>
       <p:bgPr>
         <a:solidFill xmlns:a="http://schemas.openxmlformats.org/drawingml/2006/main">
-          <a:srgbClr val="F6F4EC"/>
+          <a:srgbClr val="FFFFFF"/>
         </a:solidFill>
       </p:bgPr>
     </p:bg>
@@ -7282,7 +7438,7 @@
           <p:cNvPr id="9" name="">
             <a:extLst xmlns:a="http://schemas.openxmlformats.org/drawingml/2006/main">
               <a:ext uri="{FF2B5EF4-FFF2-40B4-BE49-F238E27FC236}">
-                <a16:creationId xmlns:a16="http://schemas.microsoft.com/office/drawing/2014/main" id="{C7255D21-8435-4D68-9AE3-1C3F07D0CFEE}"/>
+                <a16:creationId xmlns:a16="http://schemas.microsoft.com/office/drawing/2014/main" id="{86555D32-1FAA-40AB-96F3-CB53CDBE3C52}"/>
               </a:ext>
             </a:extLst>
           </p:cNvPr>
@@ -7310,7 +7466,7 @@
             <a:defPPr>
               <a:defRPr sz="3600" b="1">
                 <a:solidFill>
-                  <a:srgbClr val="233D34"/>
+                  <a:srgbClr val="CC0000"/>
                 </a:solidFill>
                 <a:latin typeface="Arial"/>
                 <a:ea typeface="Arial"/>
@@ -7320,7 +7476,7 @@
             <a:lvl1pPr>
               <a:defRPr sz="3600" b="1">
                 <a:solidFill>
-                  <a:srgbClr val="233D34"/>
+                  <a:srgbClr val="CC0000"/>
                 </a:solidFill>
                 <a:latin typeface="Arial"/>
                 <a:ea typeface="Arial"/>
@@ -7330,7 +7486,7 @@
             <a:lvl2pPr>
               <a:defRPr sz="3600" b="1">
                 <a:solidFill>
-                  <a:srgbClr val="233D34"/>
+                  <a:srgbClr val="CC0000"/>
                 </a:solidFill>
                 <a:latin typeface="Arial"/>
                 <a:ea typeface="Arial"/>
@@ -7340,7 +7496,7 @@
             <a:lvl3pPr>
               <a:defRPr sz="3600" b="1">
                 <a:solidFill>
-                  <a:srgbClr val="233D34"/>
+                  <a:srgbClr val="CC0000"/>
                 </a:solidFill>
                 <a:latin typeface="Arial"/>
                 <a:ea typeface="Arial"/>
@@ -7350,7 +7506,7 @@
             <a:lvl4pPr>
               <a:defRPr sz="3600" b="1">
                 <a:solidFill>
-                  <a:srgbClr val="233D34"/>
+                  <a:srgbClr val="CC0000"/>
                 </a:solidFill>
                 <a:latin typeface="Arial"/>
                 <a:ea typeface="Arial"/>
@@ -7360,7 +7516,7 @@
             <a:lvl5pPr>
               <a:defRPr sz="3600" b="1">
                 <a:solidFill>
-                  <a:srgbClr val="233D34"/>
+                  <a:srgbClr val="CC0000"/>
                 </a:solidFill>
                 <a:latin typeface="Arial"/>
                 <a:ea typeface="Arial"/>
@@ -7370,7 +7526,7 @@
             <a:lvl6pPr>
               <a:defRPr sz="3600" b="1">
                 <a:solidFill>
-                  <a:srgbClr val="233D34"/>
+                  <a:srgbClr val="CC0000"/>
                 </a:solidFill>
                 <a:latin typeface="Arial"/>
                 <a:ea typeface="Arial"/>
@@ -7380,7 +7536,7 @@
             <a:lvl7pPr>
               <a:defRPr sz="3600" b="1">
                 <a:solidFill>
-                  <a:srgbClr val="233D34"/>
+                  <a:srgbClr val="CC0000"/>
                 </a:solidFill>
                 <a:latin typeface="Arial"/>
                 <a:ea typeface="Arial"/>
@@ -7390,7 +7546,7 @@
             <a:lvl8pPr>
               <a:defRPr sz="3600" b="1">
                 <a:solidFill>
-                  <a:srgbClr val="233D34"/>
+                  <a:srgbClr val="CC0000"/>
                 </a:solidFill>
                 <a:latin typeface="Arial"/>
                 <a:ea typeface="Arial"/>
@@ -7400,7 +7556,7 @@
             <a:lvl9pPr>
               <a:defRPr sz="3600" b="1">
                 <a:solidFill>
-                  <a:srgbClr val="233D34"/>
+                  <a:srgbClr val="CC0000"/>
                 </a:solidFill>
                 <a:latin typeface="Arial"/>
                 <a:ea typeface="Arial"/>
@@ -7412,7 +7568,7 @@
             <a:pPr>
               <a:defRPr sz="3600" b="1">
                 <a:solidFill>
-                  <a:srgbClr val="233D34"/>
+                  <a:srgbClr val="CC0000"/>
                 </a:solidFill>
                 <a:latin typeface="Arial"/>
                 <a:ea typeface="Arial"/>
@@ -7422,7 +7578,7 @@
             <a:r>
               <a:rPr sz="3600" b="1">
                 <a:solidFill>
-                  <a:srgbClr val="233D34"/>
+                  <a:srgbClr val="CC0000"/>
                 </a:solidFill>
                 <a:latin typeface="Arial"/>
                 <a:ea typeface="Arial"/>
@@ -7438,7 +7594,7 @@
           <p:cNvPr id="2" name="">
             <a:extLst xmlns:a="http://schemas.openxmlformats.org/drawingml/2006/main">
               <a:ext uri="{FF2B5EF4-FFF2-40B4-BE49-F238E27FC236}">
-                <a16:creationId xmlns:a16="http://schemas.microsoft.com/office/drawing/2014/main" id="{947FF782-6CBC-4268-B75F-B180194C341D}"/>
+                <a16:creationId xmlns:a16="http://schemas.microsoft.com/office/drawing/2014/main" id="{EFFDB0F6-7153-45FB-90E7-8CB8356B0321}"/>
               </a:ext>
             </a:extLst>
           </p:cNvPr>
@@ -7466,7 +7622,7 @@
             <a:defPPr>
               <a:defRPr sz="1425" b="0">
                 <a:solidFill>
-                  <a:srgbClr val="647168"/>
+                  <a:srgbClr val="595959"/>
                 </a:solidFill>
                 <a:latin typeface="Arial"/>
                 <a:ea typeface="Arial"/>
@@ -7476,7 +7632,7 @@
             <a:lvl1pPr>
               <a:defRPr sz="1425" b="0">
                 <a:solidFill>
-                  <a:srgbClr val="647168"/>
+                  <a:srgbClr val="595959"/>
                 </a:solidFill>
                 <a:latin typeface="Arial"/>
                 <a:ea typeface="Arial"/>
@@ -7486,7 +7642,7 @@
             <a:lvl2pPr>
               <a:defRPr sz="1425" b="0">
                 <a:solidFill>
-                  <a:srgbClr val="647168"/>
+                  <a:srgbClr val="595959"/>
                 </a:solidFill>
                 <a:latin typeface="Arial"/>
                 <a:ea typeface="Arial"/>
@@ -7496,7 +7652,7 @@
             <a:lvl3pPr>
               <a:defRPr sz="1425" b="0">
                 <a:solidFill>
-                  <a:srgbClr val="647168"/>
+                  <a:srgbClr val="595959"/>
                 </a:solidFill>
                 <a:latin typeface="Arial"/>
                 <a:ea typeface="Arial"/>
@@ -7506,7 +7662,7 @@
             <a:lvl4pPr>
               <a:defRPr sz="1425" b="0">
                 <a:solidFill>
-                  <a:srgbClr val="647168"/>
+                  <a:srgbClr val="595959"/>
                 </a:solidFill>
                 <a:latin typeface="Arial"/>
                 <a:ea typeface="Arial"/>
@@ -7516,7 +7672,7 @@
             <a:lvl5pPr>
               <a:defRPr sz="1425" b="0">
                 <a:solidFill>
-                  <a:srgbClr val="647168"/>
+                  <a:srgbClr val="595959"/>
                 </a:solidFill>
                 <a:latin typeface="Arial"/>
                 <a:ea typeface="Arial"/>
@@ -7526,7 +7682,7 @@
             <a:lvl6pPr>
               <a:defRPr sz="1425" b="0">
                 <a:solidFill>
-                  <a:srgbClr val="647168"/>
+                  <a:srgbClr val="595959"/>
                 </a:solidFill>
                 <a:latin typeface="Arial"/>
                 <a:ea typeface="Arial"/>
@@ -7536,7 +7692,7 @@
             <a:lvl7pPr>
               <a:defRPr sz="1425" b="0">
                 <a:solidFill>
-                  <a:srgbClr val="647168"/>
+                  <a:srgbClr val="595959"/>
                 </a:solidFill>
                 <a:latin typeface="Arial"/>
                 <a:ea typeface="Arial"/>
@@ -7546,7 +7702,7 @@
             <a:lvl8pPr>
               <a:defRPr sz="1425" b="0">
                 <a:solidFill>
-                  <a:srgbClr val="647168"/>
+                  <a:srgbClr val="595959"/>
                 </a:solidFill>
                 <a:latin typeface="Arial"/>
                 <a:ea typeface="Arial"/>
@@ -7556,7 +7712,7 @@
             <a:lvl9pPr>
               <a:defRPr sz="1425" b="0">
                 <a:solidFill>
-                  <a:srgbClr val="647168"/>
+                  <a:srgbClr val="595959"/>
                 </a:solidFill>
                 <a:latin typeface="Arial"/>
                 <a:ea typeface="Arial"/>
@@ -7568,7 +7724,7 @@
             <a:pPr>
               <a:defRPr sz="1425" b="0">
                 <a:solidFill>
-                  <a:srgbClr val="647168"/>
+                  <a:srgbClr val="595959"/>
                 </a:solidFill>
                 <a:latin typeface="Arial"/>
                 <a:ea typeface="Arial"/>
@@ -7578,7 +7734,7 @@
             <a:r>
               <a:rPr sz="1425" b="0">
                 <a:solidFill>
-                  <a:srgbClr val="647168"/>
+                  <a:srgbClr val="595959"/>
                 </a:solidFill>
                 <a:latin typeface="Arial"/>
                 <a:ea typeface="Arial"/>
@@ -7594,7 +7750,7 @@
           <p:cNvPr id="3" name="">
             <a:extLst xmlns:a="http://schemas.openxmlformats.org/drawingml/2006/main">
               <a:ext uri="{FF2B5EF4-FFF2-40B4-BE49-F238E27FC236}">
-                <a16:creationId xmlns:a16="http://schemas.microsoft.com/office/drawing/2014/main" id="{07755094-92F1-44BB-B12B-B2E4DAFE7035}"/>
+                <a16:creationId xmlns:a16="http://schemas.microsoft.com/office/drawing/2014/main" id="{1BC7320E-E994-40ED-9D62-43944225F8F3}"/>
               </a:ext>
             </a:extLst>
           </p:cNvPr>
@@ -7622,7 +7778,7 @@
             <a:defPPr>
               <a:defRPr sz="2700" b="1">
                 <a:solidFill>
-                  <a:srgbClr val="B9362D"/>
+                  <a:srgbClr val="CC0000"/>
                 </a:solidFill>
                 <a:latin typeface="Arial"/>
                 <a:ea typeface="Arial"/>
@@ -7632,7 +7788,7 @@
             <a:lvl1pPr>
               <a:defRPr sz="2700" b="1">
                 <a:solidFill>
-                  <a:srgbClr val="B9362D"/>
+                  <a:srgbClr val="CC0000"/>
                 </a:solidFill>
                 <a:latin typeface="Arial"/>
                 <a:ea typeface="Arial"/>
@@ -7642,7 +7798,7 @@
             <a:lvl2pPr>
               <a:defRPr sz="2700" b="1">
                 <a:solidFill>
-                  <a:srgbClr val="B9362D"/>
+                  <a:srgbClr val="CC0000"/>
                 </a:solidFill>
                 <a:latin typeface="Arial"/>
                 <a:ea typeface="Arial"/>
@@ -7652,7 +7808,7 @@
             <a:lvl3pPr>
               <a:defRPr sz="2700" b="1">
                 <a:solidFill>
-                  <a:srgbClr val="B9362D"/>
+                  <a:srgbClr val="CC0000"/>
                 </a:solidFill>
                 <a:latin typeface="Arial"/>
                 <a:ea typeface="Arial"/>
@@ -7662,7 +7818,7 @@
             <a:lvl4pPr>
               <a:defRPr sz="2700" b="1">
                 <a:solidFill>
-                  <a:srgbClr val="B9362D"/>
+                  <a:srgbClr val="CC0000"/>
                 </a:solidFill>
                 <a:latin typeface="Arial"/>
                 <a:ea typeface="Arial"/>
@@ -7672,7 +7828,7 @@
             <a:lvl5pPr>
               <a:defRPr sz="2700" b="1">
                 <a:solidFill>
-                  <a:srgbClr val="B9362D"/>
+                  <a:srgbClr val="CC0000"/>
                 </a:solidFill>
                 <a:latin typeface="Arial"/>
                 <a:ea typeface="Arial"/>
@@ -7682,7 +7838,7 @@
             <a:lvl6pPr>
               <a:defRPr sz="2700" b="1">
                 <a:solidFill>
-                  <a:srgbClr val="B9362D"/>
+                  <a:srgbClr val="CC0000"/>
                 </a:solidFill>
                 <a:latin typeface="Arial"/>
                 <a:ea typeface="Arial"/>
@@ -7692,7 +7848,7 @@
             <a:lvl7pPr>
               <a:defRPr sz="2700" b="1">
                 <a:solidFill>
-                  <a:srgbClr val="B9362D"/>
+                  <a:srgbClr val="CC0000"/>
                 </a:solidFill>
                 <a:latin typeface="Arial"/>
                 <a:ea typeface="Arial"/>
@@ -7702,7 +7858,7 @@
             <a:lvl8pPr>
               <a:defRPr sz="2700" b="1">
                 <a:solidFill>
-                  <a:srgbClr val="B9362D"/>
+                  <a:srgbClr val="CC0000"/>
                 </a:solidFill>
                 <a:latin typeface="Arial"/>
                 <a:ea typeface="Arial"/>
@@ -7712,7 +7868,7 @@
             <a:lvl9pPr>
               <a:defRPr sz="2700" b="1">
                 <a:solidFill>
-                  <a:srgbClr val="B9362D"/>
+                  <a:srgbClr val="CC0000"/>
                 </a:solidFill>
                 <a:latin typeface="Arial"/>
                 <a:ea typeface="Arial"/>
@@ -7724,7 +7880,7 @@
             <a:pPr>
               <a:defRPr sz="2700" b="1">
                 <a:solidFill>
-                  <a:srgbClr val="B9362D"/>
+                  <a:srgbClr val="CC0000"/>
                 </a:solidFill>
                 <a:latin typeface="Arial"/>
                 <a:ea typeface="Arial"/>
@@ -7734,7 +7890,7 @@
             <a:r>
               <a:rPr sz="2700" b="1">
                 <a:solidFill>
-                  <a:srgbClr val="B9362D"/>
+                  <a:srgbClr val="CC0000"/>
                 </a:solidFill>
                 <a:latin typeface="Arial"/>
                 <a:ea typeface="Arial"/>
@@ -7750,7 +7906,7 @@
           <p:cNvPr id="4" name="">
             <a:extLst xmlns:a="http://schemas.openxmlformats.org/drawingml/2006/main">
               <a:ext uri="{FF2B5EF4-FFF2-40B4-BE49-F238E27FC236}">
-                <a16:creationId xmlns:a16="http://schemas.microsoft.com/office/drawing/2014/main" id="{9F2E645C-4BF9-43AB-BD14-456CACA1E122}"/>
+                <a16:creationId xmlns:a16="http://schemas.microsoft.com/office/drawing/2014/main" id="{8A1A0156-0690-4196-BB69-ECE8ABF3B5B4}"/>
               </a:ext>
             </a:extLst>
           </p:cNvPr>
@@ -7778,7 +7934,7 @@
             <a:defPPr>
               <a:defRPr sz="2175" b="0">
                 <a:solidFill>
-                  <a:srgbClr val="233D34"/>
+                  <a:srgbClr val="000000"/>
                 </a:solidFill>
                 <a:latin typeface="Arial"/>
                 <a:ea typeface="Arial"/>
@@ -7788,7 +7944,7 @@
             <a:lvl1pPr>
               <a:defRPr sz="2175" b="0">
                 <a:solidFill>
-                  <a:srgbClr val="233D34"/>
+                  <a:srgbClr val="000000"/>
                 </a:solidFill>
                 <a:latin typeface="Arial"/>
                 <a:ea typeface="Arial"/>
@@ -7798,7 +7954,7 @@
             <a:lvl2pPr>
               <a:defRPr sz="2175" b="0">
                 <a:solidFill>
-                  <a:srgbClr val="233D34"/>
+                  <a:srgbClr val="000000"/>
                 </a:solidFill>
                 <a:latin typeface="Arial"/>
                 <a:ea typeface="Arial"/>
@@ -7808,7 +7964,7 @@
             <a:lvl3pPr>
               <a:defRPr sz="2175" b="0">
                 <a:solidFill>
-                  <a:srgbClr val="233D34"/>
+                  <a:srgbClr val="000000"/>
                 </a:solidFill>
                 <a:latin typeface="Arial"/>
                 <a:ea typeface="Arial"/>
@@ -7818,7 +7974,7 @@
             <a:lvl4pPr>
               <a:defRPr sz="2175" b="0">
                 <a:solidFill>
-                  <a:srgbClr val="233D34"/>
+                  <a:srgbClr val="000000"/>
                 </a:solidFill>
                 <a:latin typeface="Arial"/>
                 <a:ea typeface="Arial"/>
@@ -7828,7 +7984,7 @@
             <a:lvl5pPr>
               <a:defRPr sz="2175" b="0">
                 <a:solidFill>
-                  <a:srgbClr val="233D34"/>
+                  <a:srgbClr val="000000"/>
                 </a:solidFill>
                 <a:latin typeface="Arial"/>
                 <a:ea typeface="Arial"/>
@@ -7838,7 +7994,7 @@
             <a:lvl6pPr>
               <a:defRPr sz="2175" b="0">
                 <a:solidFill>
-                  <a:srgbClr val="233D34"/>
+                  <a:srgbClr val="000000"/>
                 </a:solidFill>
                 <a:latin typeface="Arial"/>
                 <a:ea typeface="Arial"/>
@@ -7848,7 +8004,7 @@
             <a:lvl7pPr>
               <a:defRPr sz="2175" b="0">
                 <a:solidFill>
-                  <a:srgbClr val="233D34"/>
+                  <a:srgbClr val="000000"/>
                 </a:solidFill>
                 <a:latin typeface="Arial"/>
                 <a:ea typeface="Arial"/>
@@ -7858,7 +8014,7 @@
             <a:lvl8pPr>
               <a:defRPr sz="2175" b="0">
                 <a:solidFill>
-                  <a:srgbClr val="233D34"/>
+                  <a:srgbClr val="000000"/>
                 </a:solidFill>
                 <a:latin typeface="Arial"/>
                 <a:ea typeface="Arial"/>
@@ -7868,7 +8024,7 @@
             <a:lvl9pPr>
               <a:defRPr sz="2175" b="0">
                 <a:solidFill>
-                  <a:srgbClr val="233D34"/>
+                  <a:srgbClr val="000000"/>
                 </a:solidFill>
                 <a:latin typeface="Arial"/>
                 <a:ea typeface="Arial"/>
@@ -7880,7 +8036,7 @@
             <a:pPr>
               <a:defRPr sz="2175" b="0">
                 <a:solidFill>
-                  <a:srgbClr val="233D34"/>
+                  <a:srgbClr val="000000"/>
                 </a:solidFill>
                 <a:latin typeface="Arial"/>
                 <a:ea typeface="Arial"/>
@@ -7890,7 +8046,7 @@
             <a:r>
               <a:rPr sz="2175" b="0">
                 <a:solidFill>
-                  <a:srgbClr val="233D34"/>
+                  <a:srgbClr val="000000"/>
                 </a:solidFill>
                 <a:latin typeface="Arial"/>
                 <a:ea typeface="Arial"/>
@@ -7903,7 +8059,7 @@
             <a:pPr>
               <a:defRPr sz="2175" b="0">
                 <a:solidFill>
-                  <a:srgbClr val="233D34"/>
+                  <a:srgbClr val="000000"/>
                 </a:solidFill>
                 <a:latin typeface="Arial"/>
                 <a:ea typeface="Arial"/>
@@ -7913,7 +8069,7 @@
             <a:r>
               <a:rPr sz="2175" b="0">
                 <a:solidFill>
-                  <a:srgbClr val="233D34"/>
+                  <a:srgbClr val="000000"/>
                 </a:solidFill>
                 <a:latin typeface="Arial"/>
                 <a:ea typeface="Arial"/>
@@ -7926,7 +8082,7 @@
             <a:pPr>
               <a:defRPr sz="2175" b="0">
                 <a:solidFill>
-                  <a:srgbClr val="233D34"/>
+                  <a:srgbClr val="000000"/>
                 </a:solidFill>
                 <a:latin typeface="Arial"/>
                 <a:ea typeface="Arial"/>
@@ -7936,7 +8092,7 @@
             <a:r>
               <a:rPr sz="2175" b="0">
                 <a:solidFill>
-                  <a:srgbClr val="233D34"/>
+                  <a:srgbClr val="000000"/>
                 </a:solidFill>
                 <a:latin typeface="Arial"/>
                 <a:ea typeface="Arial"/>
@@ -7952,7 +8108,7 @@
           <p:cNvPr id="5" name="">
             <a:extLst xmlns:a="http://schemas.openxmlformats.org/drawingml/2006/main">
               <a:ext uri="{FF2B5EF4-FFF2-40B4-BE49-F238E27FC236}">
-                <a16:creationId xmlns:a16="http://schemas.microsoft.com/office/drawing/2014/main" id="{30EAFCCA-49F2-4914-A36B-6C94EB986144}"/>
+                <a16:creationId xmlns:a16="http://schemas.microsoft.com/office/drawing/2014/main" id="{F733F1DC-A9E2-4852-BD48-0B9464BF6842}"/>
               </a:ext>
             </a:extLst>
           </p:cNvPr>
@@ -7980,7 +8136,7 @@
             <a:defPPr>
               <a:defRPr sz="2400" b="1">
                 <a:solidFill>
-                  <a:srgbClr val="233D34"/>
+                  <a:srgbClr val="000000"/>
                 </a:solidFill>
                 <a:latin typeface="Arial"/>
                 <a:ea typeface="Arial"/>
@@ -7990,7 +8146,7 @@
             <a:lvl1pPr>
               <a:defRPr sz="2400" b="1">
                 <a:solidFill>
-                  <a:srgbClr val="233D34"/>
+                  <a:srgbClr val="000000"/>
                 </a:solidFill>
                 <a:latin typeface="Arial"/>
                 <a:ea typeface="Arial"/>
@@ -8000,7 +8156,7 @@
             <a:lvl2pPr>
               <a:defRPr sz="2400" b="1">
                 <a:solidFill>
-                  <a:srgbClr val="233D34"/>
+                  <a:srgbClr val="000000"/>
                 </a:solidFill>
                 <a:latin typeface="Arial"/>
                 <a:ea typeface="Arial"/>
@@ -8010,7 +8166,7 @@
             <a:lvl3pPr>
               <a:defRPr sz="2400" b="1">
                 <a:solidFill>
-                  <a:srgbClr val="233D34"/>
+                  <a:srgbClr val="000000"/>
                 </a:solidFill>
                 <a:latin typeface="Arial"/>
                 <a:ea typeface="Arial"/>
@@ -8020,7 +8176,7 @@
             <a:lvl4pPr>
               <a:defRPr sz="2400" b="1">
                 <a:solidFill>
-                  <a:srgbClr val="233D34"/>
+                  <a:srgbClr val="000000"/>
                 </a:solidFill>
                 <a:latin typeface="Arial"/>
                 <a:ea typeface="Arial"/>
@@ -8030,7 +8186,7 @@
             <a:lvl5pPr>
               <a:defRPr sz="2400" b="1">
                 <a:solidFill>
-                  <a:srgbClr val="233D34"/>
+                  <a:srgbClr val="000000"/>
                 </a:solidFill>
                 <a:latin typeface="Arial"/>
                 <a:ea typeface="Arial"/>
@@ -8040,7 +8196,7 @@
             <a:lvl6pPr>
               <a:defRPr sz="2400" b="1">
                 <a:solidFill>
-                  <a:srgbClr val="233D34"/>
+                  <a:srgbClr val="000000"/>
                 </a:solidFill>
                 <a:latin typeface="Arial"/>
                 <a:ea typeface="Arial"/>
@@ -8050,7 +8206,7 @@
             <a:lvl7pPr>
               <a:defRPr sz="2400" b="1">
                 <a:solidFill>
-                  <a:srgbClr val="233D34"/>
+                  <a:srgbClr val="000000"/>
                 </a:solidFill>
                 <a:latin typeface="Arial"/>
                 <a:ea typeface="Arial"/>
@@ -8060,7 +8216,7 @@
             <a:lvl8pPr>
               <a:defRPr sz="2400" b="1">
                 <a:solidFill>
-                  <a:srgbClr val="233D34"/>
+                  <a:srgbClr val="000000"/>
                 </a:solidFill>
                 <a:latin typeface="Arial"/>
                 <a:ea typeface="Arial"/>
@@ -8070,7 +8226,7 @@
             <a:lvl9pPr>
               <a:defRPr sz="2400" b="1">
                 <a:solidFill>
-                  <a:srgbClr val="233D34"/>
+                  <a:srgbClr val="000000"/>
                 </a:solidFill>
                 <a:latin typeface="Arial"/>
                 <a:ea typeface="Arial"/>
@@ -8082,7 +8238,7 @@
             <a:pPr>
               <a:defRPr sz="2400" b="1">
                 <a:solidFill>
-                  <a:srgbClr val="233D34"/>
+                  <a:srgbClr val="000000"/>
                 </a:solidFill>
                 <a:latin typeface="Arial"/>
                 <a:ea typeface="Arial"/>
@@ -8092,7 +8248,7 @@
             <a:r>
               <a:rPr sz="2400" b="1">
                 <a:solidFill>
-                  <a:srgbClr val="233D34"/>
+                  <a:srgbClr val="000000"/>
                 </a:solidFill>
                 <a:latin typeface="Arial"/>
                 <a:ea typeface="Arial"/>
@@ -8108,7 +8264,7 @@
           <p:cNvPr id="6" name="">
             <a:extLst xmlns:a="http://schemas.openxmlformats.org/drawingml/2006/main">
               <a:ext uri="{FF2B5EF4-FFF2-40B4-BE49-F238E27FC236}">
-                <a16:creationId xmlns:a16="http://schemas.microsoft.com/office/drawing/2014/main" id="{CA16DB92-5AB8-4151-A7A3-2996A5D3DA48}"/>
+                <a16:creationId xmlns:a16="http://schemas.microsoft.com/office/drawing/2014/main" id="{2F23C5FF-6F5E-4FE3-ADF4-0CDA4ACFA04D}"/>
               </a:ext>
             </a:extLst>
           </p:cNvPr>
@@ -8136,7 +8292,7 @@
             <a:defPPr>
               <a:defRPr sz="1800" b="0">
                 <a:solidFill>
-                  <a:srgbClr val="647168"/>
+                  <a:srgbClr val="595959"/>
                 </a:solidFill>
                 <a:latin typeface="Arial"/>
                 <a:ea typeface="Arial"/>
@@ -8146,7 +8302,7 @@
             <a:lvl1pPr>
               <a:defRPr sz="1800" b="0">
                 <a:solidFill>
-                  <a:srgbClr val="647168"/>
+                  <a:srgbClr val="595959"/>
                 </a:solidFill>
                 <a:latin typeface="Arial"/>
                 <a:ea typeface="Arial"/>
@@ -8156,7 +8312,7 @@
             <a:lvl2pPr>
               <a:defRPr sz="1800" b="0">
                 <a:solidFill>
-                  <a:srgbClr val="647168"/>
+                  <a:srgbClr val="595959"/>
                 </a:solidFill>
                 <a:latin typeface="Arial"/>
                 <a:ea typeface="Arial"/>
@@ -8166,7 +8322,7 @@
             <a:lvl3pPr>
               <a:defRPr sz="1800" b="0">
                 <a:solidFill>
-                  <a:srgbClr val="647168"/>
+                  <a:srgbClr val="595959"/>
                 </a:solidFill>
                 <a:latin typeface="Arial"/>
                 <a:ea typeface="Arial"/>
@@ -8176,7 +8332,7 @@
             <a:lvl4pPr>
               <a:defRPr sz="1800" b="0">
                 <a:solidFill>
-                  <a:srgbClr val="647168"/>
+                  <a:srgbClr val="595959"/>
                 </a:solidFill>
                 <a:latin typeface="Arial"/>
                 <a:ea typeface="Arial"/>
@@ -8186,7 +8342,7 @@
             <a:lvl5pPr>
               <a:defRPr sz="1800" b="0">
                 <a:solidFill>
-                  <a:srgbClr val="647168"/>
+                  <a:srgbClr val="595959"/>
                 </a:solidFill>
                 <a:latin typeface="Arial"/>
                 <a:ea typeface="Arial"/>
@@ -8196,7 +8352,7 @@
             <a:lvl6pPr>
               <a:defRPr sz="1800" b="0">
                 <a:solidFill>
-                  <a:srgbClr val="647168"/>
+                  <a:srgbClr val="595959"/>
                 </a:solidFill>
                 <a:latin typeface="Arial"/>
                 <a:ea typeface="Arial"/>
@@ -8206,7 +8362,7 @@
             <a:lvl7pPr>
               <a:defRPr sz="1800" b="0">
                 <a:solidFill>
-                  <a:srgbClr val="647168"/>
+                  <a:srgbClr val="595959"/>
                 </a:solidFill>
                 <a:latin typeface="Arial"/>
                 <a:ea typeface="Arial"/>
@@ -8216,7 +8372,7 @@
             <a:lvl8pPr>
               <a:defRPr sz="1800" b="0">
                 <a:solidFill>
-                  <a:srgbClr val="647168"/>
+                  <a:srgbClr val="595959"/>
                 </a:solidFill>
                 <a:latin typeface="Arial"/>
                 <a:ea typeface="Arial"/>
@@ -8226,7 +8382,7 @@
             <a:lvl9pPr>
               <a:defRPr sz="1800" b="0">
                 <a:solidFill>
-                  <a:srgbClr val="647168"/>
+                  <a:srgbClr val="595959"/>
                 </a:solidFill>
                 <a:latin typeface="Arial"/>
                 <a:ea typeface="Arial"/>
@@ -8238,7 +8394,7 @@
             <a:pPr>
               <a:defRPr sz="1800" b="0">
                 <a:solidFill>
-                  <a:srgbClr val="647168"/>
+                  <a:srgbClr val="595959"/>
                 </a:solidFill>
                 <a:latin typeface="Arial"/>
                 <a:ea typeface="Arial"/>
@@ -8248,7 +8404,7 @@
             <a:r>
               <a:rPr sz="1800" b="0">
                 <a:solidFill>
-                  <a:srgbClr val="647168"/>
+                  <a:srgbClr val="595959"/>
                 </a:solidFill>
                 <a:latin typeface="Arial"/>
                 <a:ea typeface="Arial"/>
@@ -8264,7 +8420,7 @@
           <p:cNvPr id="7" name="">
             <a:extLst xmlns:a="http://schemas.openxmlformats.org/drawingml/2006/main">
               <a:ext uri="{FF2B5EF4-FFF2-40B4-BE49-F238E27FC236}">
-                <a16:creationId xmlns:a16="http://schemas.microsoft.com/office/drawing/2014/main" id="{5772ACA1-EB10-441B-86FF-C92D09191DAD}"/>
+                <a16:creationId xmlns:a16="http://schemas.microsoft.com/office/drawing/2014/main" id="{624B641F-8AD5-4FA8-839C-EDA2E2309D60}"/>
               </a:ext>
             </a:extLst>
           </p:cNvPr>
@@ -8274,7 +8430,7 @@
           <p:nvPr/>
         </p:nvPicPr>
         <p:blipFill>
-          <a:blip xmlns:r="http://schemas.openxmlformats.org/officeDocument/2006/relationships" xmlns:a="http://schemas.openxmlformats.org/drawingml/2006/main" r:embed="R61e7066a587a4c06"/>
+          <a:blip xmlns:r="http://schemas.openxmlformats.org/officeDocument/2006/relationships" xmlns:a="http://schemas.openxmlformats.org/drawingml/2006/main" r:embed="Rd5f20889be61433b"/>
           <a:stretch xmlns:a="http://schemas.openxmlformats.org/drawingml/2006/main"/>
         </p:blipFill>
         <p:spPr>
@@ -8292,7 +8448,7 @@
           <p:cNvPr id="8" name="">
             <a:extLst xmlns:a="http://schemas.openxmlformats.org/drawingml/2006/main">
               <a:ext uri="{FF2B5EF4-FFF2-40B4-BE49-F238E27FC236}">
-                <a16:creationId xmlns:a16="http://schemas.microsoft.com/office/drawing/2014/main" id="{88E87409-1F6B-4849-91A4-6FAB71D7C126}"/>
+                <a16:creationId xmlns:a16="http://schemas.microsoft.com/office/drawing/2014/main" id="{FEFFEB6E-78FA-491D-AF67-F27453B1AB6D}"/>
               </a:ext>
             </a:extLst>
           </p:cNvPr>
@@ -8320,7 +8476,7 @@
             <a:defPPr>
               <a:defRPr sz="1350" b="0">
                 <a:solidFill>
-                  <a:srgbClr val="647168"/>
+                  <a:srgbClr val="595959"/>
                 </a:solidFill>
                 <a:latin typeface="Arial"/>
                 <a:ea typeface="Arial"/>
@@ -8330,7 +8486,7 @@
             <a:lvl1pPr>
               <a:defRPr sz="1350" b="0">
                 <a:solidFill>
-                  <a:srgbClr val="647168"/>
+                  <a:srgbClr val="595959"/>
                 </a:solidFill>
                 <a:latin typeface="Arial"/>
                 <a:ea typeface="Arial"/>
@@ -8340,7 +8496,7 @@
             <a:lvl2pPr>
               <a:defRPr sz="1350" b="0">
                 <a:solidFill>
-                  <a:srgbClr val="647168"/>
+                  <a:srgbClr val="595959"/>
                 </a:solidFill>
                 <a:latin typeface="Arial"/>
                 <a:ea typeface="Arial"/>
@@ -8350,7 +8506,7 @@
             <a:lvl3pPr>
               <a:defRPr sz="1350" b="0">
                 <a:solidFill>
-                  <a:srgbClr val="647168"/>
+                  <a:srgbClr val="595959"/>
                 </a:solidFill>
                 <a:latin typeface="Arial"/>
                 <a:ea typeface="Arial"/>
@@ -8360,7 +8516,7 @@
             <a:lvl4pPr>
               <a:defRPr sz="1350" b="0">
                 <a:solidFill>
-                  <a:srgbClr val="647168"/>
+                  <a:srgbClr val="595959"/>
                 </a:solidFill>
                 <a:latin typeface="Arial"/>
                 <a:ea typeface="Arial"/>
@@ -8370,7 +8526,7 @@
             <a:lvl5pPr>
               <a:defRPr sz="1350" b="0">
                 <a:solidFill>
-                  <a:srgbClr val="647168"/>
+                  <a:srgbClr val="595959"/>
                 </a:solidFill>
                 <a:latin typeface="Arial"/>
                 <a:ea typeface="Arial"/>
@@ -8380,7 +8536,7 @@
             <a:lvl6pPr>
               <a:defRPr sz="1350" b="0">
                 <a:solidFill>
-                  <a:srgbClr val="647168"/>
+                  <a:srgbClr val="595959"/>
                 </a:solidFill>
                 <a:latin typeface="Arial"/>
                 <a:ea typeface="Arial"/>
@@ -8390,7 +8546,7 @@
             <a:lvl7pPr>
               <a:defRPr sz="1350" b="0">
                 <a:solidFill>
-                  <a:srgbClr val="647168"/>
+                  <a:srgbClr val="595959"/>
                 </a:solidFill>
                 <a:latin typeface="Arial"/>
                 <a:ea typeface="Arial"/>
@@ -8400,7 +8556,7 @@
             <a:lvl8pPr>
               <a:defRPr sz="1350" b="0">
                 <a:solidFill>
-                  <a:srgbClr val="647168"/>
+                  <a:srgbClr val="595959"/>
                 </a:solidFill>
                 <a:latin typeface="Arial"/>
                 <a:ea typeface="Arial"/>
@@ -8410,7 +8566,7 @@
             <a:lvl9pPr>
               <a:defRPr sz="1350" b="0">
                 <a:solidFill>
-                  <a:srgbClr val="647168"/>
+                  <a:srgbClr val="595959"/>
                 </a:solidFill>
                 <a:latin typeface="Arial"/>
                 <a:ea typeface="Arial"/>
@@ -8422,7 +8578,7 @@
             <a:pPr>
               <a:defRPr sz="1350" b="0">
                 <a:solidFill>
-                  <a:srgbClr val="647168"/>
+                  <a:srgbClr val="595959"/>
                 </a:solidFill>
                 <a:latin typeface="Arial"/>
                 <a:ea typeface="Arial"/>
@@ -8432,7 +8588,7 @@
             <a:r>
               <a:rPr sz="1350" b="0">
                 <a:solidFill>
-                  <a:srgbClr val="647168"/>
+                  <a:srgbClr val="595959"/>
                 </a:solidFill>
                 <a:latin typeface="Arial"/>
                 <a:ea typeface="Arial"/>
@@ -8446,7 +8602,7 @@
     </p:spTree>
     <p:extLst>
       <p:ext uri="{BB962C8B-B14F-4D97-AF65-F5344CB8AC3E}">
-        <p14:creationId xmlns:p14="http://schemas.microsoft.com/office/powerpoint/2010/main" val="2091737539"/>
+        <p14:creationId xmlns:p14="http://schemas.microsoft.com/office/powerpoint/2010/main" val="1804534886"/>
       </p:ext>
     </p:extLst>
   </p:cSld>
@@ -8459,7 +8615,7 @@
     <p:bg>
       <p:bgPr>
         <a:solidFill xmlns:a="http://schemas.openxmlformats.org/drawingml/2006/main">
-          <a:srgbClr val="F6F4EC"/>
+          <a:srgbClr val="FFFFFF"/>
         </a:solidFill>
       </p:bgPr>
     </p:bg>
@@ -8477,7 +8633,7 @@
           <p:cNvPr id="6" name="">
             <a:extLst xmlns:a="http://schemas.openxmlformats.org/drawingml/2006/main">
               <a:ext uri="{FF2B5EF4-FFF2-40B4-BE49-F238E27FC236}">
-                <a16:creationId xmlns:a16="http://schemas.microsoft.com/office/drawing/2014/main" id="{E60A6306-89E3-48F9-9054-B4B74F053A93}"/>
+                <a16:creationId xmlns:a16="http://schemas.microsoft.com/office/drawing/2014/main" id="{BF04C662-9E0E-4E25-A4D2-52B17CE33DC7}"/>
               </a:ext>
             </a:extLst>
           </p:cNvPr>
@@ -8505,7 +8661,7 @@
             <a:defPPr>
               <a:defRPr sz="3600" b="1">
                 <a:solidFill>
-                  <a:srgbClr val="233D34"/>
+                  <a:srgbClr val="CC0000"/>
                 </a:solidFill>
                 <a:latin typeface="Arial"/>
                 <a:ea typeface="Arial"/>
@@ -8515,7 +8671,7 @@
             <a:lvl1pPr>
               <a:defRPr sz="3600" b="1">
                 <a:solidFill>
-                  <a:srgbClr val="233D34"/>
+                  <a:srgbClr val="CC0000"/>
                 </a:solidFill>
                 <a:latin typeface="Arial"/>
                 <a:ea typeface="Arial"/>
@@ -8525,7 +8681,7 @@
             <a:lvl2pPr>
               <a:defRPr sz="3600" b="1">
                 <a:solidFill>
-                  <a:srgbClr val="233D34"/>
+                  <a:srgbClr val="CC0000"/>
                 </a:solidFill>
                 <a:latin typeface="Arial"/>
                 <a:ea typeface="Arial"/>
@@ -8535,7 +8691,7 @@
             <a:lvl3pPr>
               <a:defRPr sz="3600" b="1">
                 <a:solidFill>
-                  <a:srgbClr val="233D34"/>
+                  <a:srgbClr val="CC0000"/>
                 </a:solidFill>
                 <a:latin typeface="Arial"/>
                 <a:ea typeface="Arial"/>
@@ -8545,7 +8701,7 @@
             <a:lvl4pPr>
               <a:defRPr sz="3600" b="1">
                 <a:solidFill>
-                  <a:srgbClr val="233D34"/>
+                  <a:srgbClr val="CC0000"/>
                 </a:solidFill>
                 <a:latin typeface="Arial"/>
                 <a:ea typeface="Arial"/>
@@ -8555,7 +8711,7 @@
             <a:lvl5pPr>
               <a:defRPr sz="3600" b="1">
                 <a:solidFill>
-                  <a:srgbClr val="233D34"/>
+                  <a:srgbClr val="CC0000"/>
                 </a:solidFill>
                 <a:latin typeface="Arial"/>
                 <a:ea typeface="Arial"/>
@@ -8565,7 +8721,7 @@
             <a:lvl6pPr>
               <a:defRPr sz="3600" b="1">
                 <a:solidFill>
-                  <a:srgbClr val="233D34"/>
+                  <a:srgbClr val="CC0000"/>
                 </a:solidFill>
                 <a:latin typeface="Arial"/>
                 <a:ea typeface="Arial"/>
@@ -8575,7 +8731,7 @@
             <a:lvl7pPr>
               <a:defRPr sz="3600" b="1">
                 <a:solidFill>
-                  <a:srgbClr val="233D34"/>
+                  <a:srgbClr val="CC0000"/>
                 </a:solidFill>
                 <a:latin typeface="Arial"/>
                 <a:ea typeface="Arial"/>
@@ -8585,7 +8741,7 @@
             <a:lvl8pPr>
               <a:defRPr sz="3600" b="1">
                 <a:solidFill>
-                  <a:srgbClr val="233D34"/>
+                  <a:srgbClr val="CC0000"/>
                 </a:solidFill>
                 <a:latin typeface="Arial"/>
                 <a:ea typeface="Arial"/>
@@ -8595,7 +8751,7 @@
             <a:lvl9pPr>
               <a:defRPr sz="3600" b="1">
                 <a:solidFill>
-                  <a:srgbClr val="233D34"/>
+                  <a:srgbClr val="CC0000"/>
                 </a:solidFill>
                 <a:latin typeface="Arial"/>
                 <a:ea typeface="Arial"/>
@@ -8607,7 +8763,7 @@
             <a:pPr>
               <a:defRPr sz="3600" b="1">
                 <a:solidFill>
-                  <a:srgbClr val="233D34"/>
+                  <a:srgbClr val="CC0000"/>
                 </a:solidFill>
                 <a:latin typeface="Arial"/>
                 <a:ea typeface="Arial"/>
@@ -8617,7 +8773,7 @@
             <a:r>
               <a:rPr sz="3600" b="1">
                 <a:solidFill>
-                  <a:srgbClr val="233D34"/>
+                  <a:srgbClr val="CC0000"/>
                 </a:solidFill>
                 <a:latin typeface="Arial"/>
                 <a:ea typeface="Arial"/>
@@ -8633,7 +8789,7 @@
           <p:cNvPr id="2" name="">
             <a:extLst xmlns:a="http://schemas.openxmlformats.org/drawingml/2006/main">
               <a:ext uri="{FF2B5EF4-FFF2-40B4-BE49-F238E27FC236}">
-                <a16:creationId xmlns:a16="http://schemas.microsoft.com/office/drawing/2014/main" id="{A2B540AA-0C12-4052-96DC-C3C00492CDFF}"/>
+                <a16:creationId xmlns:a16="http://schemas.microsoft.com/office/drawing/2014/main" id="{8E865E29-14F7-4D68-B7E3-28B5F996F4AB}"/>
               </a:ext>
             </a:extLst>
           </p:cNvPr>
@@ -8661,7 +8817,7 @@
             <a:defPPr>
               <a:defRPr sz="1425" b="0">
                 <a:solidFill>
-                  <a:srgbClr val="647168"/>
+                  <a:srgbClr val="595959"/>
                 </a:solidFill>
                 <a:latin typeface="Arial"/>
                 <a:ea typeface="Arial"/>
@@ -8671,7 +8827,7 @@
             <a:lvl1pPr>
               <a:defRPr sz="1425" b="0">
                 <a:solidFill>
-                  <a:srgbClr val="647168"/>
+                  <a:srgbClr val="595959"/>
                 </a:solidFill>
                 <a:latin typeface="Arial"/>
                 <a:ea typeface="Arial"/>
@@ -8681,7 +8837,7 @@
             <a:lvl2pPr>
               <a:defRPr sz="1425" b="0">
                 <a:solidFill>
-                  <a:srgbClr val="647168"/>
+                  <a:srgbClr val="595959"/>
                 </a:solidFill>
                 <a:latin typeface="Arial"/>
                 <a:ea typeface="Arial"/>
@@ -8691,7 +8847,7 @@
             <a:lvl3pPr>
               <a:defRPr sz="1425" b="0">
                 <a:solidFill>
-                  <a:srgbClr val="647168"/>
+                  <a:srgbClr val="595959"/>
                 </a:solidFill>
                 <a:latin typeface="Arial"/>
                 <a:ea typeface="Arial"/>
@@ -8701,7 +8857,7 @@
             <a:lvl4pPr>
               <a:defRPr sz="1425" b="0">
                 <a:solidFill>
-                  <a:srgbClr val="647168"/>
+                  <a:srgbClr val="595959"/>
                 </a:solidFill>
                 <a:latin typeface="Arial"/>
                 <a:ea typeface="Arial"/>
@@ -8711,7 +8867,7 @@
             <a:lvl5pPr>
               <a:defRPr sz="1425" b="0">
                 <a:solidFill>
-                  <a:srgbClr val="647168"/>
+                  <a:srgbClr val="595959"/>
                 </a:solidFill>
                 <a:latin typeface="Arial"/>
                 <a:ea typeface="Arial"/>
@@ -8721,7 +8877,7 @@
             <a:lvl6pPr>
               <a:defRPr sz="1425" b="0">
                 <a:solidFill>
-                  <a:srgbClr val="647168"/>
+                  <a:srgbClr val="595959"/>
                 </a:solidFill>
                 <a:latin typeface="Arial"/>
                 <a:ea typeface="Arial"/>
@@ -8731,7 +8887,7 @@
             <a:lvl7pPr>
               <a:defRPr sz="1425" b="0">
                 <a:solidFill>
-                  <a:srgbClr val="647168"/>
+                  <a:srgbClr val="595959"/>
                 </a:solidFill>
                 <a:latin typeface="Arial"/>
                 <a:ea typeface="Arial"/>
@@ -8741,7 +8897,7 @@
             <a:lvl8pPr>
               <a:defRPr sz="1425" b="0">
                 <a:solidFill>
-                  <a:srgbClr val="647168"/>
+                  <a:srgbClr val="595959"/>
                 </a:solidFill>
                 <a:latin typeface="Arial"/>
                 <a:ea typeface="Arial"/>
@@ -8751,7 +8907,7 @@
             <a:lvl9pPr>
               <a:defRPr sz="1425" b="0">
                 <a:solidFill>
-                  <a:srgbClr val="647168"/>
+                  <a:srgbClr val="595959"/>
                 </a:solidFill>
                 <a:latin typeface="Arial"/>
                 <a:ea typeface="Arial"/>
@@ -8763,7 +8919,7 @@
             <a:pPr>
               <a:defRPr sz="1425" b="0">
                 <a:solidFill>
-                  <a:srgbClr val="647168"/>
+                  <a:srgbClr val="595959"/>
                 </a:solidFill>
                 <a:latin typeface="Arial"/>
                 <a:ea typeface="Arial"/>
@@ -8773,7 +8929,7 @@
             <a:r>
               <a:rPr sz="1425" b="0">
                 <a:solidFill>
-                  <a:srgbClr val="647168"/>
+                  <a:srgbClr val="595959"/>
                 </a:solidFill>
                 <a:latin typeface="Arial"/>
                 <a:ea typeface="Arial"/>
@@ -8789,7 +8945,7 @@
           <p:cNvPr id="3" name="">
             <a:extLst xmlns:a="http://schemas.openxmlformats.org/drawingml/2006/main">
               <a:ext uri="{FF2B5EF4-FFF2-40B4-BE49-F238E27FC236}">
-                <a16:creationId xmlns:a16="http://schemas.microsoft.com/office/drawing/2014/main" id="{0AFD707A-5D47-4EE3-BEF0-3E15228F7440}"/>
+                <a16:creationId xmlns:a16="http://schemas.microsoft.com/office/drawing/2014/main" id="{7A4D3666-BB26-47B4-A7F1-3D230C8CCEF3}"/>
               </a:ext>
             </a:extLst>
           </p:cNvPr>
@@ -8817,7 +8973,7 @@
             <a:defPPr>
               <a:defRPr sz="2325" b="1">
                 <a:solidFill>
-                  <a:srgbClr val="B9362D"/>
+                  <a:srgbClr val="CC0000"/>
                 </a:solidFill>
                 <a:latin typeface="Arial"/>
                 <a:ea typeface="Arial"/>
@@ -8827,7 +8983,7 @@
             <a:lvl1pPr>
               <a:defRPr sz="2325" b="1">
                 <a:solidFill>
-                  <a:srgbClr val="B9362D"/>
+                  <a:srgbClr val="CC0000"/>
                 </a:solidFill>
                 <a:latin typeface="Arial"/>
                 <a:ea typeface="Arial"/>
@@ -8837,7 +8993,7 @@
             <a:lvl2pPr>
               <a:defRPr sz="2325" b="1">
                 <a:solidFill>
-                  <a:srgbClr val="B9362D"/>
+                  <a:srgbClr val="CC0000"/>
                 </a:solidFill>
                 <a:latin typeface="Arial"/>
                 <a:ea typeface="Arial"/>
@@ -8847,7 +9003,7 @@
             <a:lvl3pPr>
               <a:defRPr sz="2325" b="1">
                 <a:solidFill>
-                  <a:srgbClr val="B9362D"/>
+                  <a:srgbClr val="CC0000"/>
                 </a:solidFill>
                 <a:latin typeface="Arial"/>
                 <a:ea typeface="Arial"/>
@@ -8857,7 +9013,7 @@
             <a:lvl4pPr>
               <a:defRPr sz="2325" b="1">
                 <a:solidFill>
-                  <a:srgbClr val="B9362D"/>
+                  <a:srgbClr val="CC0000"/>
                 </a:solidFill>
                 <a:latin typeface="Arial"/>
                 <a:ea typeface="Arial"/>
@@ -8867,7 +9023,7 @@
             <a:lvl5pPr>
               <a:defRPr sz="2325" b="1">
                 <a:solidFill>
-                  <a:srgbClr val="B9362D"/>
+                  <a:srgbClr val="CC0000"/>
                 </a:solidFill>
                 <a:latin typeface="Arial"/>
                 <a:ea typeface="Arial"/>
@@ -8877,7 +9033,7 @@
             <a:lvl6pPr>
               <a:defRPr sz="2325" b="1">
                 <a:solidFill>
-                  <a:srgbClr val="B9362D"/>
+                  <a:srgbClr val="CC0000"/>
                 </a:solidFill>
                 <a:latin typeface="Arial"/>
                 <a:ea typeface="Arial"/>
@@ -8887,7 +9043,7 @@
             <a:lvl7pPr>
               <a:defRPr sz="2325" b="1">
                 <a:solidFill>
-                  <a:srgbClr val="B9362D"/>
+                  <a:srgbClr val="CC0000"/>
                 </a:solidFill>
                 <a:latin typeface="Arial"/>
                 <a:ea typeface="Arial"/>
@@ -8897,7 +9053,7 @@
             <a:lvl8pPr>
               <a:defRPr sz="2325" b="1">
                 <a:solidFill>
-                  <a:srgbClr val="B9362D"/>
+                  <a:srgbClr val="CC0000"/>
                 </a:solidFill>
                 <a:latin typeface="Arial"/>
                 <a:ea typeface="Arial"/>
@@ -8907,7 +9063,7 @@
             <a:lvl9pPr>
               <a:defRPr sz="2325" b="1">
                 <a:solidFill>
-                  <a:srgbClr val="B9362D"/>
+                  <a:srgbClr val="CC0000"/>
                 </a:solidFill>
                 <a:latin typeface="Arial"/>
                 <a:ea typeface="Arial"/>
@@ -8919,7 +9075,7 @@
             <a:pPr>
               <a:defRPr sz="2325" b="1">
                 <a:solidFill>
-                  <a:srgbClr val="B9362D"/>
+                  <a:srgbClr val="CC0000"/>
                 </a:solidFill>
                 <a:latin typeface="Arial"/>
                 <a:ea typeface="Arial"/>
@@ -8929,7 +9085,7 @@
             <a:r>
               <a:rPr sz="2325" b="1">
                 <a:solidFill>
-                  <a:srgbClr val="B9362D"/>
+                  <a:srgbClr val="CC0000"/>
                 </a:solidFill>
                 <a:latin typeface="Arial"/>
                 <a:ea typeface="Arial"/>
@@ -8945,7 +9101,7 @@
           <p:cNvPr id="4" name="">
             <a:extLst xmlns:a="http://schemas.openxmlformats.org/drawingml/2006/main">
               <a:ext uri="{FF2B5EF4-FFF2-40B4-BE49-F238E27FC236}">
-                <a16:creationId xmlns:a16="http://schemas.microsoft.com/office/drawing/2014/main" id="{9ADDA57E-68DD-4104-92C4-566AE8078DC6}"/>
+                <a16:creationId xmlns:a16="http://schemas.microsoft.com/office/drawing/2014/main" id="{4A5A2439-DBBF-4778-A174-CC913520C8D0}"/>
               </a:ext>
             </a:extLst>
           </p:cNvPr>
@@ -8955,7 +9111,7 @@
           <p:nvPr/>
         </p:nvPicPr>
         <p:blipFill>
-          <a:blip xmlns:r="http://schemas.openxmlformats.org/officeDocument/2006/relationships" xmlns:a="http://schemas.openxmlformats.org/drawingml/2006/main" r:embed="R74ab33f042f64a76"/>
+          <a:blip xmlns:r="http://schemas.openxmlformats.org/officeDocument/2006/relationships" xmlns:a="http://schemas.openxmlformats.org/drawingml/2006/main" r:embed="R952fe16742844923"/>
           <a:stretch xmlns:a="http://schemas.openxmlformats.org/drawingml/2006/main"/>
         </p:blipFill>
         <p:spPr>
@@ -8973,7 +9129,7 @@
           <p:cNvPr id="5" name="">
             <a:extLst xmlns:a="http://schemas.openxmlformats.org/drawingml/2006/main">
               <a:ext uri="{FF2B5EF4-FFF2-40B4-BE49-F238E27FC236}">
-                <a16:creationId xmlns:a16="http://schemas.microsoft.com/office/drawing/2014/main" id="{D346B881-9A18-429F-A169-A5AE09D2A304}"/>
+                <a16:creationId xmlns:a16="http://schemas.microsoft.com/office/drawing/2014/main" id="{FCC063BF-28C9-48C9-A8EB-2CAF65DDE47F}"/>
               </a:ext>
             </a:extLst>
           </p:cNvPr>
@@ -9001,7 +9157,7 @@
             <a:defPPr>
               <a:defRPr sz="1350" b="0">
                 <a:solidFill>
-                  <a:srgbClr val="647168"/>
+                  <a:srgbClr val="595959"/>
                 </a:solidFill>
                 <a:latin typeface="Arial"/>
                 <a:ea typeface="Arial"/>
@@ -9011,7 +9167,7 @@
             <a:lvl1pPr>
               <a:defRPr sz="1350" b="0">
                 <a:solidFill>
-                  <a:srgbClr val="647168"/>
+                  <a:srgbClr val="595959"/>
                 </a:solidFill>
                 <a:latin typeface="Arial"/>
                 <a:ea typeface="Arial"/>
@@ -9021,7 +9177,7 @@
             <a:lvl2pPr>
               <a:defRPr sz="1350" b="0">
                 <a:solidFill>
-                  <a:srgbClr val="647168"/>
+                  <a:srgbClr val="595959"/>
                 </a:solidFill>
                 <a:latin typeface="Arial"/>
                 <a:ea typeface="Arial"/>
@@ -9031,7 +9187,7 @@
             <a:lvl3pPr>
               <a:defRPr sz="1350" b="0">
                 <a:solidFill>
-                  <a:srgbClr val="647168"/>
+                  <a:srgbClr val="595959"/>
                 </a:solidFill>
                 <a:latin typeface="Arial"/>
                 <a:ea typeface="Arial"/>
@@ -9041,7 +9197,7 @@
             <a:lvl4pPr>
               <a:defRPr sz="1350" b="0">
                 <a:solidFill>
-                  <a:srgbClr val="647168"/>
+                  <a:srgbClr val="595959"/>
                 </a:solidFill>
                 <a:latin typeface="Arial"/>
                 <a:ea typeface="Arial"/>
@@ -9051,7 +9207,7 @@
             <a:lvl5pPr>
               <a:defRPr sz="1350" b="0">
                 <a:solidFill>
-                  <a:srgbClr val="647168"/>
+                  <a:srgbClr val="595959"/>
                 </a:solidFill>
                 <a:latin typeface="Arial"/>
                 <a:ea typeface="Arial"/>
@@ -9061,7 +9217,7 @@
             <a:lvl6pPr>
               <a:defRPr sz="1350" b="0">
                 <a:solidFill>
-                  <a:srgbClr val="647168"/>
+                  <a:srgbClr val="595959"/>
                 </a:solidFill>
                 <a:latin typeface="Arial"/>
                 <a:ea typeface="Arial"/>
@@ -9071,7 +9227,7 @@
             <a:lvl7pPr>
               <a:defRPr sz="1350" b="0">
                 <a:solidFill>
-                  <a:srgbClr val="647168"/>
+                  <a:srgbClr val="595959"/>
                 </a:solidFill>
                 <a:latin typeface="Arial"/>
                 <a:ea typeface="Arial"/>
@@ -9081,7 +9237,7 @@
             <a:lvl8pPr>
               <a:defRPr sz="1350" b="0">
                 <a:solidFill>
-                  <a:srgbClr val="647168"/>
+                  <a:srgbClr val="595959"/>
                 </a:solidFill>
                 <a:latin typeface="Arial"/>
                 <a:ea typeface="Arial"/>
@@ -9091,7 +9247,7 @@
             <a:lvl9pPr>
               <a:defRPr sz="1350" b="0">
                 <a:solidFill>
-                  <a:srgbClr val="647168"/>
+                  <a:srgbClr val="595959"/>
                 </a:solidFill>
                 <a:latin typeface="Arial"/>
                 <a:ea typeface="Arial"/>
@@ -9103,7 +9259,7 @@
             <a:pPr>
               <a:defRPr sz="1350" b="0">
                 <a:solidFill>
-                  <a:srgbClr val="647168"/>
+                  <a:srgbClr val="595959"/>
                 </a:solidFill>
                 <a:latin typeface="Arial"/>
                 <a:ea typeface="Arial"/>
@@ -9113,7 +9269,7 @@
             <a:r>
               <a:rPr sz="1350" b="0">
                 <a:solidFill>
-                  <a:srgbClr val="647168"/>
+                  <a:srgbClr val="595959"/>
                 </a:solidFill>
                 <a:latin typeface="Arial"/>
                 <a:ea typeface="Arial"/>
@@ -9127,7 +9283,7 @@
     </p:spTree>
     <p:extLst>
       <p:ext uri="{BB962C8B-B14F-4D97-AF65-F5344CB8AC3E}">
-        <p14:creationId xmlns:p14="http://schemas.microsoft.com/office/powerpoint/2010/main" val="1381898172"/>
+        <p14:creationId xmlns:p14="http://schemas.microsoft.com/office/powerpoint/2010/main" val="446385494"/>
       </p:ext>
     </p:extLst>
   </p:cSld>
@@ -9140,7 +9296,7 @@
     <p:bg>
       <p:bgPr>
         <a:solidFill xmlns:a="http://schemas.openxmlformats.org/drawingml/2006/main">
-          <a:srgbClr val="F6F4EC"/>
+          <a:srgbClr val="FFFFFF"/>
         </a:solidFill>
       </p:bgPr>
     </p:bg>
@@ -9158,7 +9314,7 @@
           <p:cNvPr id="8" name="">
             <a:extLst xmlns:a="http://schemas.openxmlformats.org/drawingml/2006/main">
               <a:ext uri="{FF2B5EF4-FFF2-40B4-BE49-F238E27FC236}">
-                <a16:creationId xmlns:a16="http://schemas.microsoft.com/office/drawing/2014/main" id="{210D0137-6859-4AD7-B90A-7B0C17D1C0B4}"/>
+                <a16:creationId xmlns:a16="http://schemas.microsoft.com/office/drawing/2014/main" id="{909581AF-D800-4F2D-9339-369D85F75DC6}"/>
               </a:ext>
             </a:extLst>
           </p:cNvPr>
@@ -9186,7 +9342,7 @@
             <a:defPPr>
               <a:defRPr sz="3600" b="1">
                 <a:solidFill>
-                  <a:srgbClr val="233D34"/>
+                  <a:srgbClr val="CC0000"/>
                 </a:solidFill>
                 <a:latin typeface="Arial"/>
                 <a:ea typeface="Arial"/>
@@ -9196,7 +9352,7 @@
             <a:lvl1pPr>
               <a:defRPr sz="3600" b="1">
                 <a:solidFill>
-                  <a:srgbClr val="233D34"/>
+                  <a:srgbClr val="CC0000"/>
                 </a:solidFill>
                 <a:latin typeface="Arial"/>
                 <a:ea typeface="Arial"/>
@@ -9206,7 +9362,7 @@
             <a:lvl2pPr>
               <a:defRPr sz="3600" b="1">
                 <a:solidFill>
-                  <a:srgbClr val="233D34"/>
+                  <a:srgbClr val="CC0000"/>
                 </a:solidFill>
                 <a:latin typeface="Arial"/>
                 <a:ea typeface="Arial"/>
@@ -9216,7 +9372,7 @@
             <a:lvl3pPr>
               <a:defRPr sz="3600" b="1">
                 <a:solidFill>
-                  <a:srgbClr val="233D34"/>
+                  <a:srgbClr val="CC0000"/>
                 </a:solidFill>
                 <a:latin typeface="Arial"/>
                 <a:ea typeface="Arial"/>
@@ -9226,7 +9382,7 @@
             <a:lvl4pPr>
               <a:defRPr sz="3600" b="1">
                 <a:solidFill>
-                  <a:srgbClr val="233D34"/>
+                  <a:srgbClr val="CC0000"/>
                 </a:solidFill>
                 <a:latin typeface="Arial"/>
                 <a:ea typeface="Arial"/>
@@ -9236,7 +9392,7 @@
             <a:lvl5pPr>
               <a:defRPr sz="3600" b="1">
                 <a:solidFill>
-                  <a:srgbClr val="233D34"/>
+                  <a:srgbClr val="CC0000"/>
                 </a:solidFill>
                 <a:latin typeface="Arial"/>
                 <a:ea typeface="Arial"/>
@@ -9246,7 +9402,7 @@
             <a:lvl6pPr>
               <a:defRPr sz="3600" b="1">
                 <a:solidFill>
-                  <a:srgbClr val="233D34"/>
+                  <a:srgbClr val="CC0000"/>
                 </a:solidFill>
                 <a:latin typeface="Arial"/>
                 <a:ea typeface="Arial"/>
@@ -9256,7 +9412,7 @@
             <a:lvl7pPr>
               <a:defRPr sz="3600" b="1">
                 <a:solidFill>
-                  <a:srgbClr val="233D34"/>
+                  <a:srgbClr val="CC0000"/>
                 </a:solidFill>
                 <a:latin typeface="Arial"/>
                 <a:ea typeface="Arial"/>
@@ -9266,7 +9422,7 @@
             <a:lvl8pPr>
               <a:defRPr sz="3600" b="1">
                 <a:solidFill>
-                  <a:srgbClr val="233D34"/>
+                  <a:srgbClr val="CC0000"/>
                 </a:solidFill>
                 <a:latin typeface="Arial"/>
                 <a:ea typeface="Arial"/>
@@ -9276,7 +9432,7 @@
             <a:lvl9pPr>
               <a:defRPr sz="3600" b="1">
                 <a:solidFill>
-                  <a:srgbClr val="233D34"/>
+                  <a:srgbClr val="CC0000"/>
                 </a:solidFill>
                 <a:latin typeface="Arial"/>
                 <a:ea typeface="Arial"/>
@@ -9288,7 +9444,7 @@
             <a:pPr>
               <a:defRPr sz="3600" b="1">
                 <a:solidFill>
-                  <a:srgbClr val="233D34"/>
+                  <a:srgbClr val="CC0000"/>
                 </a:solidFill>
                 <a:latin typeface="Arial"/>
                 <a:ea typeface="Arial"/>
@@ -9298,7 +9454,7 @@
             <a:r>
               <a:rPr sz="3600" b="1">
                 <a:solidFill>
-                  <a:srgbClr val="233D34"/>
+                  <a:srgbClr val="CC0000"/>
                 </a:solidFill>
                 <a:latin typeface="Arial"/>
                 <a:ea typeface="Arial"/>
@@ -9314,7 +9470,7 @@
           <p:cNvPr id="2" name="">
             <a:extLst xmlns:a="http://schemas.openxmlformats.org/drawingml/2006/main">
               <a:ext uri="{FF2B5EF4-FFF2-40B4-BE49-F238E27FC236}">
-                <a16:creationId xmlns:a16="http://schemas.microsoft.com/office/drawing/2014/main" id="{87426E55-7B07-41D3-B8E0-E8B11F8727BE}"/>
+                <a16:creationId xmlns:a16="http://schemas.microsoft.com/office/drawing/2014/main" id="{D9C66867-C920-4046-96D7-FFB4D5D2C28B}"/>
               </a:ext>
             </a:extLst>
           </p:cNvPr>
@@ -9342,7 +9498,7 @@
             <a:defPPr>
               <a:defRPr sz="1425" b="0">
                 <a:solidFill>
-                  <a:srgbClr val="647168"/>
+                  <a:srgbClr val="595959"/>
                 </a:solidFill>
                 <a:latin typeface="Arial"/>
                 <a:ea typeface="Arial"/>
@@ -9352,7 +9508,7 @@
             <a:lvl1pPr>
               <a:defRPr sz="1425" b="0">
                 <a:solidFill>
-                  <a:srgbClr val="647168"/>
+                  <a:srgbClr val="595959"/>
                 </a:solidFill>
                 <a:latin typeface="Arial"/>
                 <a:ea typeface="Arial"/>
@@ -9362,7 +9518,7 @@
             <a:lvl2pPr>
               <a:defRPr sz="1425" b="0">
                 <a:solidFill>
-                  <a:srgbClr val="647168"/>
+                  <a:srgbClr val="595959"/>
                 </a:solidFill>
                 <a:latin typeface="Arial"/>
                 <a:ea typeface="Arial"/>
@@ -9372,7 +9528,7 @@
             <a:lvl3pPr>
               <a:defRPr sz="1425" b="0">
                 <a:solidFill>
-                  <a:srgbClr val="647168"/>
+                  <a:srgbClr val="595959"/>
                 </a:solidFill>
                 <a:latin typeface="Arial"/>
                 <a:ea typeface="Arial"/>
@@ -9382,7 +9538,7 @@
             <a:lvl4pPr>
               <a:defRPr sz="1425" b="0">
                 <a:solidFill>
-                  <a:srgbClr val="647168"/>
+                  <a:srgbClr val="595959"/>
                 </a:solidFill>
                 <a:latin typeface="Arial"/>
                 <a:ea typeface="Arial"/>
@@ -9392,7 +9548,7 @@
             <a:lvl5pPr>
               <a:defRPr sz="1425" b="0">
                 <a:solidFill>
-                  <a:srgbClr val="647168"/>
+                  <a:srgbClr val="595959"/>
                 </a:solidFill>
                 <a:latin typeface="Arial"/>
                 <a:ea typeface="Arial"/>
@@ -9402,7 +9558,7 @@
             <a:lvl6pPr>
               <a:defRPr sz="1425" b="0">
                 <a:solidFill>
-                  <a:srgbClr val="647168"/>
+                  <a:srgbClr val="595959"/>
                 </a:solidFill>
                 <a:latin typeface="Arial"/>
                 <a:ea typeface="Arial"/>
@@ -9412,7 +9568,7 @@
             <a:lvl7pPr>
               <a:defRPr sz="1425" b="0">
                 <a:solidFill>
-                  <a:srgbClr val="647168"/>
+                  <a:srgbClr val="595959"/>
                 </a:solidFill>
                 <a:latin typeface="Arial"/>
                 <a:ea typeface="Arial"/>
@@ -9422,7 +9578,7 @@
             <a:lvl8pPr>
               <a:defRPr sz="1425" b="0">
                 <a:solidFill>
-                  <a:srgbClr val="647168"/>
+                  <a:srgbClr val="595959"/>
                 </a:solidFill>
                 <a:latin typeface="Arial"/>
                 <a:ea typeface="Arial"/>
@@ -9432,7 +9588,7 @@
             <a:lvl9pPr>
               <a:defRPr sz="1425" b="0">
                 <a:solidFill>
-                  <a:srgbClr val="647168"/>
+                  <a:srgbClr val="595959"/>
                 </a:solidFill>
                 <a:latin typeface="Arial"/>
                 <a:ea typeface="Arial"/>
@@ -9444,7 +9600,7 @@
             <a:pPr>
               <a:defRPr sz="1425" b="0">
                 <a:solidFill>
-                  <a:srgbClr val="647168"/>
+                  <a:srgbClr val="595959"/>
                 </a:solidFill>
                 <a:latin typeface="Arial"/>
                 <a:ea typeface="Arial"/>
@@ -9454,7 +9610,7 @@
             <a:r>
               <a:rPr sz="1425" b="0">
                 <a:solidFill>
-                  <a:srgbClr val="647168"/>
+                  <a:srgbClr val="595959"/>
                 </a:solidFill>
                 <a:latin typeface="Arial"/>
                 <a:ea typeface="Arial"/>
@@ -9470,7 +9626,7 @@
           <p:cNvPr id="3" name="">
             <a:extLst xmlns:a="http://schemas.openxmlformats.org/drawingml/2006/main">
               <a:ext uri="{FF2B5EF4-FFF2-40B4-BE49-F238E27FC236}">
-                <a16:creationId xmlns:a16="http://schemas.microsoft.com/office/drawing/2014/main" id="{B60FDB12-2B31-4478-AED0-873EFE619CF1}"/>
+                <a16:creationId xmlns:a16="http://schemas.microsoft.com/office/drawing/2014/main" id="{41C304C2-774C-41C6-AA0C-275119B45F15}"/>
               </a:ext>
             </a:extLst>
           </p:cNvPr>
@@ -9480,7 +9636,7 @@
           <p:nvPr/>
         </p:nvPicPr>
         <p:blipFill>
-          <a:blip xmlns:r="http://schemas.openxmlformats.org/officeDocument/2006/relationships" xmlns:a="http://schemas.openxmlformats.org/drawingml/2006/main" r:embed="R6a3a2e2ecac64b7c"/>
+          <a:blip xmlns:r="http://schemas.openxmlformats.org/officeDocument/2006/relationships" xmlns:a="http://schemas.openxmlformats.org/drawingml/2006/main" r:embed="R1ebb45d51fc24388"/>
           <a:stretch xmlns:a="http://schemas.openxmlformats.org/drawingml/2006/main"/>
         </p:blipFill>
         <p:spPr>
@@ -9498,7 +9654,7 @@
           <p:cNvPr id="4" name="">
             <a:extLst xmlns:a="http://schemas.openxmlformats.org/drawingml/2006/main">
               <a:ext uri="{FF2B5EF4-FFF2-40B4-BE49-F238E27FC236}">
-                <a16:creationId xmlns:a16="http://schemas.microsoft.com/office/drawing/2014/main" id="{D7D2F7F4-3563-4348-AD10-8EDABA0CA349}"/>
+                <a16:creationId xmlns:a16="http://schemas.microsoft.com/office/drawing/2014/main" id="{2A252AD7-6BCE-4190-AB67-B003BC713811}"/>
               </a:ext>
             </a:extLst>
           </p:cNvPr>
@@ -9526,7 +9682,7 @@
             <a:defPPr>
               <a:defRPr sz="2325" b="1">
                 <a:solidFill>
-                  <a:srgbClr val="B9362D"/>
+                  <a:srgbClr val="CC0000"/>
                 </a:solidFill>
                 <a:latin typeface="Arial"/>
                 <a:ea typeface="Arial"/>
@@ -9536,7 +9692,7 @@
             <a:lvl1pPr>
               <a:defRPr sz="2325" b="1">
                 <a:solidFill>
-                  <a:srgbClr val="B9362D"/>
+                  <a:srgbClr val="CC0000"/>
                 </a:solidFill>
                 <a:latin typeface="Arial"/>
                 <a:ea typeface="Arial"/>
@@ -9546,7 +9702,7 @@
             <a:lvl2pPr>
               <a:defRPr sz="2325" b="1">
                 <a:solidFill>
-                  <a:srgbClr val="B9362D"/>
+                  <a:srgbClr val="CC0000"/>
                 </a:solidFill>
                 <a:latin typeface="Arial"/>
                 <a:ea typeface="Arial"/>
@@ -9556,7 +9712,7 @@
             <a:lvl3pPr>
               <a:defRPr sz="2325" b="1">
                 <a:solidFill>
-                  <a:srgbClr val="B9362D"/>
+                  <a:srgbClr val="CC0000"/>
                 </a:solidFill>
                 <a:latin typeface="Arial"/>
                 <a:ea typeface="Arial"/>
@@ -9566,7 +9722,7 @@
             <a:lvl4pPr>
               <a:defRPr sz="2325" b="1">
                 <a:solidFill>
-                  <a:srgbClr val="B9362D"/>
+                  <a:srgbClr val="CC0000"/>
                 </a:solidFill>
                 <a:latin typeface="Arial"/>
                 <a:ea typeface="Arial"/>
@@ -9576,7 +9732,7 @@
             <a:lvl5pPr>
               <a:defRPr sz="2325" b="1">
                 <a:solidFill>
-                  <a:srgbClr val="B9362D"/>
+                  <a:srgbClr val="CC0000"/>
                 </a:solidFill>
                 <a:latin typeface="Arial"/>
                 <a:ea typeface="Arial"/>
@@ -9586,7 +9742,7 @@
             <a:lvl6pPr>
               <a:defRPr sz="2325" b="1">
                 <a:solidFill>
-                  <a:srgbClr val="B9362D"/>
+                  <a:srgbClr val="CC0000"/>
                 </a:solidFill>
                 <a:latin typeface="Arial"/>
                 <a:ea typeface="Arial"/>
@@ -9596,7 +9752,7 @@
             <a:lvl7pPr>
               <a:defRPr sz="2325" b="1">
                 <a:solidFill>
-                  <a:srgbClr val="B9362D"/>
+                  <a:srgbClr val="CC0000"/>
                 </a:solidFill>
                 <a:latin typeface="Arial"/>
                 <a:ea typeface="Arial"/>
@@ -9606,7 +9762,7 @@
             <a:lvl8pPr>
               <a:defRPr sz="2325" b="1">
                 <a:solidFill>
-                  <a:srgbClr val="B9362D"/>
+                  <a:srgbClr val="CC0000"/>
                 </a:solidFill>
                 <a:latin typeface="Arial"/>
                 <a:ea typeface="Arial"/>
@@ -9616,7 +9772,7 @@
             <a:lvl9pPr>
               <a:defRPr sz="2325" b="1">
                 <a:solidFill>
-                  <a:srgbClr val="B9362D"/>
+                  <a:srgbClr val="CC0000"/>
                 </a:solidFill>
                 <a:latin typeface="Arial"/>
                 <a:ea typeface="Arial"/>
@@ -9628,7 +9784,7 @@
             <a:pPr>
               <a:defRPr sz="2325" b="1">
                 <a:solidFill>
-                  <a:srgbClr val="B9362D"/>
+                  <a:srgbClr val="CC0000"/>
                 </a:solidFill>
                 <a:latin typeface="Arial"/>
                 <a:ea typeface="Arial"/>
@@ -9638,7 +9794,7 @@
             <a:r>
               <a:rPr sz="2325" b="1">
                 <a:solidFill>
-                  <a:srgbClr val="B9362D"/>
+                  <a:srgbClr val="CC0000"/>
                 </a:solidFill>
                 <a:latin typeface="Arial"/>
                 <a:ea typeface="Arial"/>
@@ -9651,7 +9807,7 @@
             <a:pPr>
               <a:defRPr sz="2325" b="1">
                 <a:solidFill>
-                  <a:srgbClr val="B9362D"/>
+                  <a:srgbClr val="CC0000"/>
                 </a:solidFill>
                 <a:latin typeface="Arial"/>
                 <a:ea typeface="Arial"/>
@@ -9661,7 +9817,7 @@
             <a:r>
               <a:rPr sz="2325" b="1">
                 <a:solidFill>
-                  <a:srgbClr val="B9362D"/>
+                  <a:srgbClr val="CC0000"/>
                 </a:solidFill>
                 <a:latin typeface="Arial"/>
                 <a:ea typeface="Arial"/>
@@ -9677,7 +9833,7 @@
           <p:cNvPr id="5" name="">
             <a:extLst xmlns:a="http://schemas.openxmlformats.org/drawingml/2006/main">
               <a:ext uri="{FF2B5EF4-FFF2-40B4-BE49-F238E27FC236}">
-                <a16:creationId xmlns:a16="http://schemas.microsoft.com/office/drawing/2014/main" id="{31E48B5E-69C3-42D8-B872-31507E6A0685}"/>
+                <a16:creationId xmlns:a16="http://schemas.microsoft.com/office/drawing/2014/main" id="{B247039C-FF6C-4086-88B5-574BFAE56F12}"/>
               </a:ext>
             </a:extLst>
           </p:cNvPr>
@@ -9705,7 +9861,7 @@
             <a:defPPr>
               <a:defRPr sz="2025" b="0">
                 <a:solidFill>
-                  <a:srgbClr val="233D34"/>
+                  <a:srgbClr val="000000"/>
                 </a:solidFill>
                 <a:latin typeface="Arial"/>
                 <a:ea typeface="Arial"/>
@@ -9715,7 +9871,7 @@
             <a:lvl1pPr>
               <a:defRPr sz="2025" b="0">
                 <a:solidFill>
-                  <a:srgbClr val="233D34"/>
+                  <a:srgbClr val="000000"/>
                 </a:solidFill>
                 <a:latin typeface="Arial"/>
                 <a:ea typeface="Arial"/>
@@ -9725,7 +9881,7 @@
             <a:lvl2pPr>
               <a:defRPr sz="2025" b="0">
                 <a:solidFill>
-                  <a:srgbClr val="233D34"/>
+                  <a:srgbClr val="000000"/>
                 </a:solidFill>
                 <a:latin typeface="Arial"/>
                 <a:ea typeface="Arial"/>
@@ -9735,7 +9891,7 @@
             <a:lvl3pPr>
               <a:defRPr sz="2025" b="0">
                 <a:solidFill>
-                  <a:srgbClr val="233D34"/>
+                  <a:srgbClr val="000000"/>
                 </a:solidFill>
                 <a:latin typeface="Arial"/>
                 <a:ea typeface="Arial"/>
@@ -9745,7 +9901,7 @@
             <a:lvl4pPr>
               <a:defRPr sz="2025" b="0">
                 <a:solidFill>
-                  <a:srgbClr val="233D34"/>
+                  <a:srgbClr val="000000"/>
                 </a:solidFill>
                 <a:latin typeface="Arial"/>
                 <a:ea typeface="Arial"/>
@@ -9755,7 +9911,7 @@
             <a:lvl5pPr>
               <a:defRPr sz="2025" b="0">
                 <a:solidFill>
-                  <a:srgbClr val="233D34"/>
+                  <a:srgbClr val="000000"/>
                 </a:solidFill>
                 <a:latin typeface="Arial"/>
                 <a:ea typeface="Arial"/>
@@ -9765,7 +9921,7 @@
             <a:lvl6pPr>
               <a:defRPr sz="2025" b="0">
                 <a:solidFill>
-                  <a:srgbClr val="233D34"/>
+                  <a:srgbClr val="000000"/>
                 </a:solidFill>
                 <a:latin typeface="Arial"/>
                 <a:ea typeface="Arial"/>
@@ -9775,7 +9931,7 @@
             <a:lvl7pPr>
               <a:defRPr sz="2025" b="0">
                 <a:solidFill>
-                  <a:srgbClr val="233D34"/>
+                  <a:srgbClr val="000000"/>
                 </a:solidFill>
                 <a:latin typeface="Arial"/>
                 <a:ea typeface="Arial"/>
@@ -9785,7 +9941,7 @@
             <a:lvl8pPr>
               <a:defRPr sz="2025" b="0">
                 <a:solidFill>
-                  <a:srgbClr val="233D34"/>
+                  <a:srgbClr val="000000"/>
                 </a:solidFill>
                 <a:latin typeface="Arial"/>
                 <a:ea typeface="Arial"/>
@@ -9795,7 +9951,7 @@
             <a:lvl9pPr>
               <a:defRPr sz="2025" b="0">
                 <a:solidFill>
-                  <a:srgbClr val="233D34"/>
+                  <a:srgbClr val="000000"/>
                 </a:solidFill>
                 <a:latin typeface="Arial"/>
                 <a:ea typeface="Arial"/>
@@ -9807,7 +9963,7 @@
             <a:pPr>
               <a:defRPr sz="2025" b="0">
                 <a:solidFill>
-                  <a:srgbClr val="233D34"/>
+                  <a:srgbClr val="000000"/>
                 </a:solidFill>
                 <a:latin typeface="Arial"/>
                 <a:ea typeface="Arial"/>
@@ -9817,7 +9973,7 @@
             <a:r>
               <a:rPr sz="2025" b="0">
                 <a:solidFill>
-                  <a:srgbClr val="233D34"/>
+                  <a:srgbClr val="000000"/>
                 </a:solidFill>
                 <a:latin typeface="Arial"/>
                 <a:ea typeface="Arial"/>
@@ -9830,7 +9986,7 @@
             <a:pPr>
               <a:defRPr sz="2025" b="0">
                 <a:solidFill>
-                  <a:srgbClr val="233D34"/>
+                  <a:srgbClr val="000000"/>
                 </a:solidFill>
                 <a:latin typeface="Arial"/>
                 <a:ea typeface="Arial"/>
@@ -9840,7 +9996,7 @@
             <a:r>
               <a:rPr sz="2025" b="0">
                 <a:solidFill>
-                  <a:srgbClr val="233D34"/>
+                  <a:srgbClr val="000000"/>
                 </a:solidFill>
                 <a:latin typeface="Arial"/>
                 <a:ea typeface="Arial"/>
@@ -9856,7 +10012,7 @@
           <p:cNvPr id="6" name="">
             <a:extLst xmlns:a="http://schemas.openxmlformats.org/drawingml/2006/main">
               <a:ext uri="{FF2B5EF4-FFF2-40B4-BE49-F238E27FC236}">
-                <a16:creationId xmlns:a16="http://schemas.microsoft.com/office/drawing/2014/main" id="{155EDB2D-6FDC-4AEF-A68A-AB180A71F5E5}"/>
+                <a16:creationId xmlns:a16="http://schemas.microsoft.com/office/drawing/2014/main" id="{BC81CDDC-598B-43A4-AD3A-5D099351D05E}"/>
               </a:ext>
             </a:extLst>
           </p:cNvPr>
@@ -9884,7 +10040,7 @@
             <a:defPPr>
               <a:defRPr sz="2025" b="0">
                 <a:solidFill>
-                  <a:srgbClr val="233D34"/>
+                  <a:srgbClr val="000000"/>
                 </a:solidFill>
                 <a:latin typeface="Arial"/>
                 <a:ea typeface="Arial"/>
@@ -9894,7 +10050,7 @@
             <a:lvl1pPr>
               <a:defRPr sz="2025" b="0">
                 <a:solidFill>
-                  <a:srgbClr val="233D34"/>
+                  <a:srgbClr val="000000"/>
                 </a:solidFill>
                 <a:latin typeface="Arial"/>
                 <a:ea typeface="Arial"/>
@@ -9904,7 +10060,7 @@
             <a:lvl2pPr>
               <a:defRPr sz="2025" b="0">
                 <a:solidFill>
-                  <a:srgbClr val="233D34"/>
+                  <a:srgbClr val="000000"/>
                 </a:solidFill>
                 <a:latin typeface="Arial"/>
                 <a:ea typeface="Arial"/>
@@ -9914,7 +10070,7 @@
             <a:lvl3pPr>
               <a:defRPr sz="2025" b="0">
                 <a:solidFill>
-                  <a:srgbClr val="233D34"/>
+                  <a:srgbClr val="000000"/>
                 </a:solidFill>
                 <a:latin typeface="Arial"/>
                 <a:ea typeface="Arial"/>
@@ -9924,7 +10080,7 @@
             <a:lvl4pPr>
               <a:defRPr sz="2025" b="0">
                 <a:solidFill>
-                  <a:srgbClr val="233D34"/>
+                  <a:srgbClr val="000000"/>
                 </a:solidFill>
                 <a:latin typeface="Arial"/>
                 <a:ea typeface="Arial"/>
@@ -9934,7 +10090,7 @@
             <a:lvl5pPr>
               <a:defRPr sz="2025" b="0">
                 <a:solidFill>
-                  <a:srgbClr val="233D34"/>
+                  <a:srgbClr val="000000"/>
                 </a:solidFill>
                 <a:latin typeface="Arial"/>
                 <a:ea typeface="Arial"/>
@@ -9944,7 +10100,7 @@
             <a:lvl6pPr>
               <a:defRPr sz="2025" b="0">
                 <a:solidFill>
-                  <a:srgbClr val="233D34"/>
+                  <a:srgbClr val="000000"/>
                 </a:solidFill>
                 <a:latin typeface="Arial"/>
                 <a:ea typeface="Arial"/>
@@ -9954,7 +10110,7 @@
             <a:lvl7pPr>
               <a:defRPr sz="2025" b="0">
                 <a:solidFill>
-                  <a:srgbClr val="233D34"/>
+                  <a:srgbClr val="000000"/>
                 </a:solidFill>
                 <a:latin typeface="Arial"/>
                 <a:ea typeface="Arial"/>
@@ -9964,7 +10120,7 @@
             <a:lvl8pPr>
               <a:defRPr sz="2025" b="0">
                 <a:solidFill>
-                  <a:srgbClr val="233D34"/>
+                  <a:srgbClr val="000000"/>
                 </a:solidFill>
                 <a:latin typeface="Arial"/>
                 <a:ea typeface="Arial"/>
@@ -9974,7 +10130,7 @@
             <a:lvl9pPr>
               <a:defRPr sz="2025" b="0">
                 <a:solidFill>
-                  <a:srgbClr val="233D34"/>
+                  <a:srgbClr val="000000"/>
                 </a:solidFill>
                 <a:latin typeface="Arial"/>
                 <a:ea typeface="Arial"/>
@@ -9986,7 +10142,7 @@
             <a:pPr>
               <a:defRPr sz="2025" b="0">
                 <a:solidFill>
-                  <a:srgbClr val="233D34"/>
+                  <a:srgbClr val="000000"/>
                 </a:solidFill>
                 <a:latin typeface="Arial"/>
                 <a:ea typeface="Arial"/>
@@ -9996,7 +10152,7 @@
             <a:r>
               <a:rPr sz="2025" b="0">
                 <a:solidFill>
-                  <a:srgbClr val="233D34"/>
+                  <a:srgbClr val="000000"/>
                 </a:solidFill>
                 <a:latin typeface="Arial"/>
                 <a:ea typeface="Arial"/>
@@ -10012,7 +10168,7 @@
           <p:cNvPr id="7" name="">
             <a:extLst xmlns:a="http://schemas.openxmlformats.org/drawingml/2006/main">
               <a:ext uri="{FF2B5EF4-FFF2-40B4-BE49-F238E27FC236}">
-                <a16:creationId xmlns:a16="http://schemas.microsoft.com/office/drawing/2014/main" id="{C1E0576C-1E3F-41B0-9C4C-B2874FCE3FB3}"/>
+                <a16:creationId xmlns:a16="http://schemas.microsoft.com/office/drawing/2014/main" id="{C57B69CF-11B5-4C85-B7EE-31E30EB357C7}"/>
               </a:ext>
             </a:extLst>
           </p:cNvPr>
@@ -10040,7 +10196,7 @@
             <a:defPPr>
               <a:defRPr sz="1350" b="0">
                 <a:solidFill>
-                  <a:srgbClr val="647168"/>
+                  <a:srgbClr val="595959"/>
                 </a:solidFill>
                 <a:latin typeface="Arial"/>
                 <a:ea typeface="Arial"/>
@@ -10050,7 +10206,7 @@
             <a:lvl1pPr>
               <a:defRPr sz="1350" b="0">
                 <a:solidFill>
-                  <a:srgbClr val="647168"/>
+                  <a:srgbClr val="595959"/>
                 </a:solidFill>
                 <a:latin typeface="Arial"/>
                 <a:ea typeface="Arial"/>
@@ -10060,7 +10216,7 @@
             <a:lvl2pPr>
               <a:defRPr sz="1350" b="0">
                 <a:solidFill>
-                  <a:srgbClr val="647168"/>
+                  <a:srgbClr val="595959"/>
                 </a:solidFill>
                 <a:latin typeface="Arial"/>
                 <a:ea typeface="Arial"/>
@@ -10070,7 +10226,7 @@
             <a:lvl3pPr>
               <a:defRPr sz="1350" b="0">
                 <a:solidFill>
-                  <a:srgbClr val="647168"/>
+                  <a:srgbClr val="595959"/>
                 </a:solidFill>
                 <a:latin typeface="Arial"/>
                 <a:ea typeface="Arial"/>
@@ -10080,7 +10236,7 @@
             <a:lvl4pPr>
               <a:defRPr sz="1350" b="0">
                 <a:solidFill>
-                  <a:srgbClr val="647168"/>
+                  <a:srgbClr val="595959"/>
                 </a:solidFill>
                 <a:latin typeface="Arial"/>
                 <a:ea typeface="Arial"/>
@@ -10090,7 +10246,7 @@
             <a:lvl5pPr>
               <a:defRPr sz="1350" b="0">
                 <a:solidFill>
-                  <a:srgbClr val="647168"/>
+                  <a:srgbClr val="595959"/>
                 </a:solidFill>
                 <a:latin typeface="Arial"/>
                 <a:ea typeface="Arial"/>
@@ -10100,7 +10256,7 @@
             <a:lvl6pPr>
               <a:defRPr sz="1350" b="0">
                 <a:solidFill>
-                  <a:srgbClr val="647168"/>
+                  <a:srgbClr val="595959"/>
                 </a:solidFill>
                 <a:latin typeface="Arial"/>
                 <a:ea typeface="Arial"/>
@@ -10110,7 +10266,7 @@
             <a:lvl7pPr>
               <a:defRPr sz="1350" b="0">
                 <a:solidFill>
-                  <a:srgbClr val="647168"/>
+                  <a:srgbClr val="595959"/>
                 </a:solidFill>
                 <a:latin typeface="Arial"/>
                 <a:ea typeface="Arial"/>
@@ -10120,7 +10276,7 @@
             <a:lvl8pPr>
               <a:defRPr sz="1350" b="0">
                 <a:solidFill>
-                  <a:srgbClr val="647168"/>
+                  <a:srgbClr val="595959"/>
                 </a:solidFill>
                 <a:latin typeface="Arial"/>
                 <a:ea typeface="Arial"/>
@@ -10130,7 +10286,7 @@
             <a:lvl9pPr>
               <a:defRPr sz="1350" b="0">
                 <a:solidFill>
-                  <a:srgbClr val="647168"/>
+                  <a:srgbClr val="595959"/>
                 </a:solidFill>
                 <a:latin typeface="Arial"/>
                 <a:ea typeface="Arial"/>
@@ -10142,7 +10298,7 @@
             <a:pPr>
               <a:defRPr sz="1350" b="0">
                 <a:solidFill>
-                  <a:srgbClr val="647168"/>
+                  <a:srgbClr val="595959"/>
                 </a:solidFill>
                 <a:latin typeface="Arial"/>
                 <a:ea typeface="Arial"/>
@@ -10152,7 +10308,7 @@
             <a:r>
               <a:rPr sz="1350" b="0">
                 <a:solidFill>
-                  <a:srgbClr val="647168"/>
+                  <a:srgbClr val="595959"/>
                 </a:solidFill>
                 <a:latin typeface="Arial"/>
                 <a:ea typeface="Arial"/>
@@ -10166,7 +10322,7 @@
     </p:spTree>
     <p:extLst>
       <p:ext uri="{BB962C8B-B14F-4D97-AF65-F5344CB8AC3E}">
-        <p14:creationId xmlns:p14="http://schemas.microsoft.com/office/powerpoint/2010/main" val="1463233266"/>
+        <p14:creationId xmlns:p14="http://schemas.microsoft.com/office/powerpoint/2010/main" val="1430948424"/>
       </p:ext>
     </p:extLst>
   </p:cSld>
@@ -10179,7 +10335,7 @@
     <p:bg>
       <p:bgPr>
         <a:solidFill xmlns:a="http://schemas.openxmlformats.org/drawingml/2006/main">
-          <a:srgbClr val="F6F4EC"/>
+          <a:srgbClr val="FFFFFF"/>
         </a:solidFill>
       </p:bgPr>
     </p:bg>
@@ -10197,7 +10353,7 @@
           <p:cNvPr id="7" name="">
             <a:extLst xmlns:a="http://schemas.openxmlformats.org/drawingml/2006/main">
               <a:ext uri="{FF2B5EF4-FFF2-40B4-BE49-F238E27FC236}">
-                <a16:creationId xmlns:a16="http://schemas.microsoft.com/office/drawing/2014/main" id="{7988ABBA-2679-4700-8F19-A867B1590F60}"/>
+                <a16:creationId xmlns:a16="http://schemas.microsoft.com/office/drawing/2014/main" id="{2F8F10E3-AFB7-4399-99A5-9FE8D9B1DAB4}"/>
               </a:ext>
             </a:extLst>
           </p:cNvPr>
@@ -10225,7 +10381,7 @@
             <a:defPPr>
               <a:defRPr sz="3600" b="1">
                 <a:solidFill>
-                  <a:srgbClr val="233D34"/>
+                  <a:srgbClr val="CC0000"/>
                 </a:solidFill>
                 <a:latin typeface="Arial"/>
                 <a:ea typeface="Arial"/>
@@ -10235,7 +10391,7 @@
             <a:lvl1pPr>
               <a:defRPr sz="3600" b="1">
                 <a:solidFill>
-                  <a:srgbClr val="233D34"/>
+                  <a:srgbClr val="CC0000"/>
                 </a:solidFill>
                 <a:latin typeface="Arial"/>
                 <a:ea typeface="Arial"/>
@@ -10245,7 +10401,7 @@
             <a:lvl2pPr>
               <a:defRPr sz="3600" b="1">
                 <a:solidFill>
-                  <a:srgbClr val="233D34"/>
+                  <a:srgbClr val="CC0000"/>
                 </a:solidFill>
                 <a:latin typeface="Arial"/>
                 <a:ea typeface="Arial"/>
@@ -10255,7 +10411,7 @@
             <a:lvl3pPr>
               <a:defRPr sz="3600" b="1">
                 <a:solidFill>
-                  <a:srgbClr val="233D34"/>
+                  <a:srgbClr val="CC0000"/>
                 </a:solidFill>
                 <a:latin typeface="Arial"/>
                 <a:ea typeface="Arial"/>
@@ -10265,7 +10421,7 @@
             <a:lvl4pPr>
               <a:defRPr sz="3600" b="1">
                 <a:solidFill>
-                  <a:srgbClr val="233D34"/>
+                  <a:srgbClr val="CC0000"/>
                 </a:solidFill>
                 <a:latin typeface="Arial"/>
                 <a:ea typeface="Arial"/>
@@ -10275,7 +10431,7 @@
             <a:lvl5pPr>
               <a:defRPr sz="3600" b="1">
                 <a:solidFill>
-                  <a:srgbClr val="233D34"/>
+                  <a:srgbClr val="CC0000"/>
                 </a:solidFill>
                 <a:latin typeface="Arial"/>
                 <a:ea typeface="Arial"/>
@@ -10285,7 +10441,7 @@
             <a:lvl6pPr>
               <a:defRPr sz="3600" b="1">
                 <a:solidFill>
-                  <a:srgbClr val="233D34"/>
+                  <a:srgbClr val="CC0000"/>
                 </a:solidFill>
                 <a:latin typeface="Arial"/>
                 <a:ea typeface="Arial"/>
@@ -10295,7 +10451,7 @@
             <a:lvl7pPr>
               <a:defRPr sz="3600" b="1">
                 <a:solidFill>
-                  <a:srgbClr val="233D34"/>
+                  <a:srgbClr val="CC0000"/>
                 </a:solidFill>
                 <a:latin typeface="Arial"/>
                 <a:ea typeface="Arial"/>
@@ -10305,7 +10461,7 @@
             <a:lvl8pPr>
               <a:defRPr sz="3600" b="1">
                 <a:solidFill>
-                  <a:srgbClr val="233D34"/>
+                  <a:srgbClr val="CC0000"/>
                 </a:solidFill>
                 <a:latin typeface="Arial"/>
                 <a:ea typeface="Arial"/>
@@ -10315,7 +10471,7 @@
             <a:lvl9pPr>
               <a:defRPr sz="3600" b="1">
                 <a:solidFill>
-                  <a:srgbClr val="233D34"/>
+                  <a:srgbClr val="CC0000"/>
                 </a:solidFill>
                 <a:latin typeface="Arial"/>
                 <a:ea typeface="Arial"/>
@@ -10327,7 +10483,7 @@
             <a:pPr>
               <a:defRPr sz="3600" b="1">
                 <a:solidFill>
-                  <a:srgbClr val="233D34"/>
+                  <a:srgbClr val="CC0000"/>
                 </a:solidFill>
                 <a:latin typeface="Arial"/>
                 <a:ea typeface="Arial"/>
@@ -10337,7 +10493,7 @@
             <a:r>
               <a:rPr sz="3600" b="1">
                 <a:solidFill>
-                  <a:srgbClr val="233D34"/>
+                  <a:srgbClr val="CC0000"/>
                 </a:solidFill>
                 <a:latin typeface="Arial"/>
                 <a:ea typeface="Arial"/>
@@ -10353,7 +10509,7 @@
           <p:cNvPr id="2" name="">
             <a:extLst xmlns:a="http://schemas.openxmlformats.org/drawingml/2006/main">
               <a:ext uri="{FF2B5EF4-FFF2-40B4-BE49-F238E27FC236}">
-                <a16:creationId xmlns:a16="http://schemas.microsoft.com/office/drawing/2014/main" id="{CE1722DC-AB3C-4354-B333-ECE2659716B3}"/>
+                <a16:creationId xmlns:a16="http://schemas.microsoft.com/office/drawing/2014/main" id="{C25BADD9-889D-4823-BB38-617B7D33890F}"/>
               </a:ext>
             </a:extLst>
           </p:cNvPr>
@@ -10381,7 +10537,7 @@
             <a:defPPr>
               <a:defRPr sz="1425" b="0">
                 <a:solidFill>
-                  <a:srgbClr val="647168"/>
+                  <a:srgbClr val="595959"/>
                 </a:solidFill>
                 <a:latin typeface="Arial"/>
                 <a:ea typeface="Arial"/>
@@ -10391,7 +10547,7 @@
             <a:lvl1pPr>
               <a:defRPr sz="1425" b="0">
                 <a:solidFill>
-                  <a:srgbClr val="647168"/>
+                  <a:srgbClr val="595959"/>
                 </a:solidFill>
                 <a:latin typeface="Arial"/>
                 <a:ea typeface="Arial"/>
@@ -10401,7 +10557,7 @@
             <a:lvl2pPr>
               <a:defRPr sz="1425" b="0">
                 <a:solidFill>
-                  <a:srgbClr val="647168"/>
+                  <a:srgbClr val="595959"/>
                 </a:solidFill>
                 <a:latin typeface="Arial"/>
                 <a:ea typeface="Arial"/>
@@ -10411,7 +10567,7 @@
             <a:lvl3pPr>
               <a:defRPr sz="1425" b="0">
                 <a:solidFill>
-                  <a:srgbClr val="647168"/>
+                  <a:srgbClr val="595959"/>
                 </a:solidFill>
                 <a:latin typeface="Arial"/>
                 <a:ea typeface="Arial"/>
@@ -10421,7 +10577,7 @@
             <a:lvl4pPr>
               <a:defRPr sz="1425" b="0">
                 <a:solidFill>
-                  <a:srgbClr val="647168"/>
+                  <a:srgbClr val="595959"/>
                 </a:solidFill>
                 <a:latin typeface="Arial"/>
                 <a:ea typeface="Arial"/>
@@ -10431,7 +10587,7 @@
             <a:lvl5pPr>
               <a:defRPr sz="1425" b="0">
                 <a:solidFill>
-                  <a:srgbClr val="647168"/>
+                  <a:srgbClr val="595959"/>
                 </a:solidFill>
                 <a:latin typeface="Arial"/>
                 <a:ea typeface="Arial"/>
@@ -10441,7 +10597,7 @@
             <a:lvl6pPr>
               <a:defRPr sz="1425" b="0">
                 <a:solidFill>
-                  <a:srgbClr val="647168"/>
+                  <a:srgbClr val="595959"/>
                 </a:solidFill>
                 <a:latin typeface="Arial"/>
                 <a:ea typeface="Arial"/>
@@ -10451,7 +10607,7 @@
             <a:lvl7pPr>
               <a:defRPr sz="1425" b="0">
                 <a:solidFill>
-                  <a:srgbClr val="647168"/>
+                  <a:srgbClr val="595959"/>
                 </a:solidFill>
                 <a:latin typeface="Arial"/>
                 <a:ea typeface="Arial"/>
@@ -10461,7 +10617,7 @@
             <a:lvl8pPr>
               <a:defRPr sz="1425" b="0">
                 <a:solidFill>
-                  <a:srgbClr val="647168"/>
+                  <a:srgbClr val="595959"/>
                 </a:solidFill>
                 <a:latin typeface="Arial"/>
                 <a:ea typeface="Arial"/>
@@ -10471,7 +10627,7 @@
             <a:lvl9pPr>
               <a:defRPr sz="1425" b="0">
                 <a:solidFill>
-                  <a:srgbClr val="647168"/>
+                  <a:srgbClr val="595959"/>
                 </a:solidFill>
                 <a:latin typeface="Arial"/>
                 <a:ea typeface="Arial"/>
@@ -10483,7 +10639,7 @@
             <a:pPr>
               <a:defRPr sz="1425" b="0">
                 <a:solidFill>
-                  <a:srgbClr val="647168"/>
+                  <a:srgbClr val="595959"/>
                 </a:solidFill>
                 <a:latin typeface="Arial"/>
                 <a:ea typeface="Arial"/>
@@ -10493,7 +10649,7 @@
             <a:r>
               <a:rPr sz="1425" b="0">
                 <a:solidFill>
-                  <a:srgbClr val="647168"/>
+                  <a:srgbClr val="595959"/>
                 </a:solidFill>
                 <a:latin typeface="Arial"/>
                 <a:ea typeface="Arial"/>
@@ -10509,7 +10665,7 @@
           <p:cNvPr id="3" name="">
             <a:extLst xmlns:a="http://schemas.openxmlformats.org/drawingml/2006/main">
               <a:ext uri="{FF2B5EF4-FFF2-40B4-BE49-F238E27FC236}">
-                <a16:creationId xmlns:a16="http://schemas.microsoft.com/office/drawing/2014/main" id="{BB38BC78-54E6-46F9-8054-1B5AFAD3652C}"/>
+                <a16:creationId xmlns:a16="http://schemas.microsoft.com/office/drawing/2014/main" id="{45C9D9B2-DE7F-4158-8FAA-6C7FBD0F74DF}"/>
               </a:ext>
             </a:extLst>
           </p:cNvPr>
@@ -10537,7 +10693,7 @@
             <a:defPPr>
               <a:defRPr sz="2775" b="1">
                 <a:solidFill>
-                  <a:srgbClr val="B9362D"/>
+                  <a:srgbClr val="CC0000"/>
                 </a:solidFill>
                 <a:latin typeface="Arial"/>
                 <a:ea typeface="Arial"/>
@@ -10547,7 +10703,7 @@
             <a:lvl1pPr>
               <a:defRPr sz="2775" b="1">
                 <a:solidFill>
-                  <a:srgbClr val="B9362D"/>
+                  <a:srgbClr val="CC0000"/>
                 </a:solidFill>
                 <a:latin typeface="Arial"/>
                 <a:ea typeface="Arial"/>
@@ -10557,7 +10713,7 @@
             <a:lvl2pPr>
               <a:defRPr sz="2775" b="1">
                 <a:solidFill>
-                  <a:srgbClr val="B9362D"/>
+                  <a:srgbClr val="CC0000"/>
                 </a:solidFill>
                 <a:latin typeface="Arial"/>
                 <a:ea typeface="Arial"/>
@@ -10567,7 +10723,7 @@
             <a:lvl3pPr>
               <a:defRPr sz="2775" b="1">
                 <a:solidFill>
-                  <a:srgbClr val="B9362D"/>
+                  <a:srgbClr val="CC0000"/>
                 </a:solidFill>
                 <a:latin typeface="Arial"/>
                 <a:ea typeface="Arial"/>
@@ -10577,7 +10733,7 @@
             <a:lvl4pPr>
               <a:defRPr sz="2775" b="1">
                 <a:solidFill>
-                  <a:srgbClr val="B9362D"/>
+                  <a:srgbClr val="CC0000"/>
                 </a:solidFill>
                 <a:latin typeface="Arial"/>
                 <a:ea typeface="Arial"/>
@@ -10587,7 +10743,7 @@
             <a:lvl5pPr>
               <a:defRPr sz="2775" b="1">
                 <a:solidFill>
-                  <a:srgbClr val="B9362D"/>
+                  <a:srgbClr val="CC0000"/>
                 </a:solidFill>
                 <a:latin typeface="Arial"/>
                 <a:ea typeface="Arial"/>
@@ -10597,7 +10753,7 @@
             <a:lvl6pPr>
               <a:defRPr sz="2775" b="1">
                 <a:solidFill>
-                  <a:srgbClr val="B9362D"/>
+                  <a:srgbClr val="CC0000"/>
                 </a:solidFill>
                 <a:latin typeface="Arial"/>
                 <a:ea typeface="Arial"/>
@@ -10607,7 +10763,7 @@
             <a:lvl7pPr>
               <a:defRPr sz="2775" b="1">
                 <a:solidFill>
-                  <a:srgbClr val="B9362D"/>
+                  <a:srgbClr val="CC0000"/>
                 </a:solidFill>
                 <a:latin typeface="Arial"/>
                 <a:ea typeface="Arial"/>
@@ -10617,7 +10773,7 @@
             <a:lvl8pPr>
               <a:defRPr sz="2775" b="1">
                 <a:solidFill>
-                  <a:srgbClr val="B9362D"/>
+                  <a:srgbClr val="CC0000"/>
                 </a:solidFill>
                 <a:latin typeface="Arial"/>
                 <a:ea typeface="Arial"/>
@@ -10627,7 +10783,7 @@
             <a:lvl9pPr>
               <a:defRPr sz="2775" b="1">
                 <a:solidFill>
-                  <a:srgbClr val="B9362D"/>
+                  <a:srgbClr val="CC0000"/>
                 </a:solidFill>
                 <a:latin typeface="Arial"/>
                 <a:ea typeface="Arial"/>
@@ -10639,7 +10795,7 @@
             <a:pPr>
               <a:defRPr sz="2775" b="1">
                 <a:solidFill>
-                  <a:srgbClr val="B9362D"/>
+                  <a:srgbClr val="CC0000"/>
                 </a:solidFill>
                 <a:latin typeface="Arial"/>
                 <a:ea typeface="Arial"/>
@@ -10649,7 +10805,7 @@
             <a:r>
               <a:rPr sz="2775" b="1">
                 <a:solidFill>
-                  <a:srgbClr val="B9362D"/>
+                  <a:srgbClr val="CC0000"/>
                 </a:solidFill>
                 <a:latin typeface="Arial"/>
                 <a:ea typeface="Arial"/>
@@ -10662,7 +10818,7 @@
             <a:pPr>
               <a:defRPr sz="2775" b="1">
                 <a:solidFill>
-                  <a:srgbClr val="B9362D"/>
+                  <a:srgbClr val="CC0000"/>
                 </a:solidFill>
                 <a:latin typeface="Arial"/>
                 <a:ea typeface="Arial"/>
@@ -10672,7 +10828,7 @@
             <a:r>
               <a:rPr sz="2775" b="1">
                 <a:solidFill>
-                  <a:srgbClr val="B9362D"/>
+                  <a:srgbClr val="CC0000"/>
                 </a:solidFill>
                 <a:latin typeface="Arial"/>
                 <a:ea typeface="Arial"/>
@@ -10685,7 +10841,7 @@
             <a:pPr>
               <a:defRPr sz="2775" b="1">
                 <a:solidFill>
-                  <a:srgbClr val="B9362D"/>
+                  <a:srgbClr val="CC0000"/>
                 </a:solidFill>
                 <a:latin typeface="Arial"/>
                 <a:ea typeface="Arial"/>
@@ -10695,7 +10851,7 @@
             <a:r>
               <a:rPr sz="2775" b="1">
                 <a:solidFill>
-                  <a:srgbClr val="B9362D"/>
+                  <a:srgbClr val="CC0000"/>
                 </a:solidFill>
                 <a:latin typeface="Arial"/>
                 <a:ea typeface="Arial"/>
@@ -10711,7 +10867,7 @@
           <p:cNvPr id="4" name="">
             <a:extLst xmlns:a="http://schemas.openxmlformats.org/drawingml/2006/main">
               <a:ext uri="{FF2B5EF4-FFF2-40B4-BE49-F238E27FC236}">
-                <a16:creationId xmlns:a16="http://schemas.microsoft.com/office/drawing/2014/main" id="{94B4CBFD-D971-4EF0-83CA-632B9F95EA98}"/>
+                <a16:creationId xmlns:a16="http://schemas.microsoft.com/office/drawing/2014/main" id="{AB56E25D-38BC-485C-A34A-3C679B5B9626}"/>
               </a:ext>
             </a:extLst>
           </p:cNvPr>
@@ -10739,7 +10895,7 @@
             <a:defPPr>
               <a:defRPr sz="2025" b="0">
                 <a:solidFill>
-                  <a:srgbClr val="233D34"/>
+                  <a:srgbClr val="000000"/>
                 </a:solidFill>
                 <a:latin typeface="Arial"/>
                 <a:ea typeface="Arial"/>
@@ -10749,7 +10905,7 @@
             <a:lvl1pPr>
               <a:defRPr sz="2025" b="0">
                 <a:solidFill>
-                  <a:srgbClr val="233D34"/>
+                  <a:srgbClr val="000000"/>
                 </a:solidFill>
                 <a:latin typeface="Arial"/>
                 <a:ea typeface="Arial"/>
@@ -10759,7 +10915,7 @@
             <a:lvl2pPr>
               <a:defRPr sz="2025" b="0">
                 <a:solidFill>
-                  <a:srgbClr val="233D34"/>
+                  <a:srgbClr val="000000"/>
                 </a:solidFill>
                 <a:latin typeface="Arial"/>
                 <a:ea typeface="Arial"/>
@@ -10769,7 +10925,7 @@
             <a:lvl3pPr>
               <a:defRPr sz="2025" b="0">
                 <a:solidFill>
-                  <a:srgbClr val="233D34"/>
+                  <a:srgbClr val="000000"/>
                 </a:solidFill>
                 <a:latin typeface="Arial"/>
                 <a:ea typeface="Arial"/>
@@ -10779,7 +10935,7 @@
             <a:lvl4pPr>
               <a:defRPr sz="2025" b="0">
                 <a:solidFill>
-                  <a:srgbClr val="233D34"/>
+                  <a:srgbClr val="000000"/>
                 </a:solidFill>
                 <a:latin typeface="Arial"/>
                 <a:ea typeface="Arial"/>
@@ -10789,7 +10945,7 @@
             <a:lvl5pPr>
               <a:defRPr sz="2025" b="0">
                 <a:solidFill>
-                  <a:srgbClr val="233D34"/>
+                  <a:srgbClr val="000000"/>
                 </a:solidFill>
                 <a:latin typeface="Arial"/>
                 <a:ea typeface="Arial"/>
@@ -10799,7 +10955,7 @@
             <a:lvl6pPr>
               <a:defRPr sz="2025" b="0">
                 <a:solidFill>
-                  <a:srgbClr val="233D34"/>
+                  <a:srgbClr val="000000"/>
                 </a:solidFill>
                 <a:latin typeface="Arial"/>
                 <a:ea typeface="Arial"/>
@@ -10809,7 +10965,7 @@
             <a:lvl7pPr>
               <a:defRPr sz="2025" b="0">
                 <a:solidFill>
-                  <a:srgbClr val="233D34"/>
+                  <a:srgbClr val="000000"/>
                 </a:solidFill>
                 <a:latin typeface="Arial"/>
                 <a:ea typeface="Arial"/>
@@ -10819,7 +10975,7 @@
             <a:lvl8pPr>
               <a:defRPr sz="2025" b="0">
                 <a:solidFill>
-                  <a:srgbClr val="233D34"/>
+                  <a:srgbClr val="000000"/>
                 </a:solidFill>
                 <a:latin typeface="Arial"/>
                 <a:ea typeface="Arial"/>
@@ -10829,7 +10985,7 @@
             <a:lvl9pPr>
               <a:defRPr sz="2025" b="0">
                 <a:solidFill>
-                  <a:srgbClr val="233D34"/>
+                  <a:srgbClr val="000000"/>
                 </a:solidFill>
                 <a:latin typeface="Arial"/>
                 <a:ea typeface="Arial"/>
@@ -10841,7 +10997,7 @@
             <a:pPr>
               <a:defRPr sz="2025" b="0">
                 <a:solidFill>
-                  <a:srgbClr val="233D34"/>
+                  <a:srgbClr val="000000"/>
                 </a:solidFill>
                 <a:latin typeface="Arial"/>
                 <a:ea typeface="Arial"/>
@@ -10851,7 +11007,7 @@
             <a:r>
               <a:rPr sz="2025" b="0">
                 <a:solidFill>
-                  <a:srgbClr val="233D34"/>
+                  <a:srgbClr val="000000"/>
                 </a:solidFill>
                 <a:latin typeface="Arial"/>
                 <a:ea typeface="Arial"/>
@@ -10864,7 +11020,7 @@
             <a:pPr>
               <a:defRPr sz="2025" b="0">
                 <a:solidFill>
-                  <a:srgbClr val="233D34"/>
+                  <a:srgbClr val="000000"/>
                 </a:solidFill>
                 <a:latin typeface="Arial"/>
                 <a:ea typeface="Arial"/>
@@ -10874,7 +11030,7 @@
             <a:r>
               <a:rPr sz="2025" b="0">
                 <a:solidFill>
-                  <a:srgbClr val="233D34"/>
+                  <a:srgbClr val="000000"/>
                 </a:solidFill>
                 <a:latin typeface="Arial"/>
                 <a:ea typeface="Arial"/>
@@ -10887,7 +11043,7 @@
             <a:pPr>
               <a:defRPr sz="2025" b="0">
                 <a:solidFill>
-                  <a:srgbClr val="233D34"/>
+                  <a:srgbClr val="000000"/>
                 </a:solidFill>
                 <a:latin typeface="Arial"/>
                 <a:ea typeface="Arial"/>
@@ -10897,7 +11053,7 @@
             <a:r>
               <a:rPr sz="2025" b="0">
                 <a:solidFill>
-                  <a:srgbClr val="233D34"/>
+                  <a:srgbClr val="000000"/>
                 </a:solidFill>
                 <a:latin typeface="Arial"/>
                 <a:ea typeface="Arial"/>
@@ -10913,7 +11069,7 @@
           <p:cNvPr id="5" name="">
             <a:extLst xmlns:a="http://schemas.openxmlformats.org/drawingml/2006/main">
               <a:ext uri="{FF2B5EF4-FFF2-40B4-BE49-F238E27FC236}">
-                <a16:creationId xmlns:a16="http://schemas.microsoft.com/office/drawing/2014/main" id="{BFE1F28D-C25D-4C45-89CB-BD5DCCF1A511}"/>
+                <a16:creationId xmlns:a16="http://schemas.microsoft.com/office/drawing/2014/main" id="{AC99DEB6-F2C8-49B1-874B-D9B8E6406E4B}"/>
               </a:ext>
             </a:extLst>
           </p:cNvPr>
@@ -10923,7 +11079,7 @@
           <p:nvPr/>
         </p:nvPicPr>
         <p:blipFill>
-          <a:blip xmlns:r="http://schemas.openxmlformats.org/officeDocument/2006/relationships" xmlns:a="http://schemas.openxmlformats.org/drawingml/2006/main" r:embed="Rd0ff0c99815d436c"/>
+          <a:blip xmlns:r="http://schemas.openxmlformats.org/officeDocument/2006/relationships" xmlns:a="http://schemas.openxmlformats.org/drawingml/2006/main" r:embed="R7da769fce5304fa2"/>
           <a:stretch xmlns:a="http://schemas.openxmlformats.org/drawingml/2006/main"/>
         </p:blipFill>
         <p:spPr>
@@ -10941,7 +11097,7 @@
           <p:cNvPr id="6" name="">
             <a:extLst xmlns:a="http://schemas.openxmlformats.org/drawingml/2006/main">
               <a:ext uri="{FF2B5EF4-FFF2-40B4-BE49-F238E27FC236}">
-                <a16:creationId xmlns:a16="http://schemas.microsoft.com/office/drawing/2014/main" id="{0915AB62-7AEE-4049-9139-0D7F1F25D6B8}"/>
+                <a16:creationId xmlns:a16="http://schemas.microsoft.com/office/drawing/2014/main" id="{594AC0EE-C976-4520-8EE2-B53254E5B94F}"/>
               </a:ext>
             </a:extLst>
           </p:cNvPr>
@@ -10969,7 +11125,7 @@
             <a:defPPr>
               <a:defRPr sz="1350" b="0">
                 <a:solidFill>
-                  <a:srgbClr val="647168"/>
+                  <a:srgbClr val="595959"/>
                 </a:solidFill>
                 <a:latin typeface="Arial"/>
                 <a:ea typeface="Arial"/>
@@ -10979,7 +11135,7 @@
             <a:lvl1pPr>
               <a:defRPr sz="1350" b="0">
                 <a:solidFill>
-                  <a:srgbClr val="647168"/>
+                  <a:srgbClr val="595959"/>
                 </a:solidFill>
                 <a:latin typeface="Arial"/>
                 <a:ea typeface="Arial"/>
@@ -10989,7 +11145,7 @@
             <a:lvl2pPr>
               <a:defRPr sz="1350" b="0">
                 <a:solidFill>
-                  <a:srgbClr val="647168"/>
+                  <a:srgbClr val="595959"/>
                 </a:solidFill>
                 <a:latin typeface="Arial"/>
                 <a:ea typeface="Arial"/>
@@ -10999,7 +11155,7 @@
             <a:lvl3pPr>
               <a:defRPr sz="1350" b="0">
                 <a:solidFill>
-                  <a:srgbClr val="647168"/>
+                  <a:srgbClr val="595959"/>
                 </a:solidFill>
                 <a:latin typeface="Arial"/>
                 <a:ea typeface="Arial"/>
@@ -11009,7 +11165,7 @@
             <a:lvl4pPr>
               <a:defRPr sz="1350" b="0">
                 <a:solidFill>
-                  <a:srgbClr val="647168"/>
+                  <a:srgbClr val="595959"/>
                 </a:solidFill>
                 <a:latin typeface="Arial"/>
                 <a:ea typeface="Arial"/>
@@ -11019,7 +11175,7 @@
             <a:lvl5pPr>
               <a:defRPr sz="1350" b="0">
                 <a:solidFill>
-                  <a:srgbClr val="647168"/>
+                  <a:srgbClr val="595959"/>
                 </a:solidFill>
                 <a:latin typeface="Arial"/>
                 <a:ea typeface="Arial"/>
@@ -11029,7 +11185,7 @@
             <a:lvl6pPr>
               <a:defRPr sz="1350" b="0">
                 <a:solidFill>
-                  <a:srgbClr val="647168"/>
+                  <a:srgbClr val="595959"/>
                 </a:solidFill>
                 <a:latin typeface="Arial"/>
                 <a:ea typeface="Arial"/>
@@ -11039,7 +11195,7 @@
             <a:lvl7pPr>
               <a:defRPr sz="1350" b="0">
                 <a:solidFill>
-                  <a:srgbClr val="647168"/>
+                  <a:srgbClr val="595959"/>
                 </a:solidFill>
                 <a:latin typeface="Arial"/>
                 <a:ea typeface="Arial"/>
@@ -11049,7 +11205,7 @@
             <a:lvl8pPr>
               <a:defRPr sz="1350" b="0">
                 <a:solidFill>
-                  <a:srgbClr val="647168"/>
+                  <a:srgbClr val="595959"/>
                 </a:solidFill>
                 <a:latin typeface="Arial"/>
                 <a:ea typeface="Arial"/>
@@ -11059,7 +11215,7 @@
             <a:lvl9pPr>
               <a:defRPr sz="1350" b="0">
                 <a:solidFill>
-                  <a:srgbClr val="647168"/>
+                  <a:srgbClr val="595959"/>
                 </a:solidFill>
                 <a:latin typeface="Arial"/>
                 <a:ea typeface="Arial"/>
@@ -11071,7 +11227,7 @@
             <a:pPr>
               <a:defRPr sz="1350" b="0">
                 <a:solidFill>
-                  <a:srgbClr val="647168"/>
+                  <a:srgbClr val="595959"/>
                 </a:solidFill>
                 <a:latin typeface="Arial"/>
                 <a:ea typeface="Arial"/>
@@ -11081,7 +11237,7 @@
             <a:r>
               <a:rPr sz="1350" b="0">
                 <a:solidFill>
-                  <a:srgbClr val="647168"/>
+                  <a:srgbClr val="595959"/>
                 </a:solidFill>
                 <a:latin typeface="Arial"/>
                 <a:ea typeface="Arial"/>
@@ -11095,7 +11251,7 @@
     </p:spTree>
     <p:extLst>
       <p:ext uri="{BB962C8B-B14F-4D97-AF65-F5344CB8AC3E}">
-        <p14:creationId xmlns:p14="http://schemas.microsoft.com/office/powerpoint/2010/main" val="405507386"/>
+        <p14:creationId xmlns:p14="http://schemas.microsoft.com/office/powerpoint/2010/main" val="1657157465"/>
       </p:ext>
     </p:extLst>
   </p:cSld>
@@ -11108,7 +11264,7 @@
     <p:bg>
       <p:bgPr>
         <a:solidFill xmlns:a="http://schemas.openxmlformats.org/drawingml/2006/main">
-          <a:srgbClr val="233D34"/>
+          <a:srgbClr val="000000"/>
         </a:solidFill>
       </p:bgPr>
     </p:bg>
@@ -11126,7 +11282,7 @@
           <p:cNvPr id="8" name="">
             <a:extLst xmlns:a="http://schemas.openxmlformats.org/drawingml/2006/main">
               <a:ext uri="{FF2B5EF4-FFF2-40B4-BE49-F238E27FC236}">
-                <a16:creationId xmlns:a16="http://schemas.microsoft.com/office/drawing/2014/main" id="{7DFDAC52-A94F-4AB5-809A-F34D34595FAD}"/>
+                <a16:creationId xmlns:a16="http://schemas.microsoft.com/office/drawing/2014/main" id="{0CE8838D-64FD-4B54-88FD-CEDCBECEEB4B}"/>
               </a:ext>
             </a:extLst>
           </p:cNvPr>
@@ -11154,7 +11310,7 @@
             <a:defPPr>
               <a:defRPr sz="3600" b="1">
                 <a:solidFill>
-                  <a:srgbClr val="F6F4EC"/>
+                  <a:srgbClr val="FFFFFF"/>
                 </a:solidFill>
                 <a:latin typeface="Arial"/>
                 <a:ea typeface="Arial"/>
@@ -11164,7 +11320,7 @@
             <a:lvl1pPr>
               <a:defRPr sz="3600" b="1">
                 <a:solidFill>
-                  <a:srgbClr val="F6F4EC"/>
+                  <a:srgbClr val="FFFFFF"/>
                 </a:solidFill>
                 <a:latin typeface="Arial"/>
                 <a:ea typeface="Arial"/>
@@ -11174,7 +11330,7 @@
             <a:lvl2pPr>
               <a:defRPr sz="3600" b="1">
                 <a:solidFill>
-                  <a:srgbClr val="F6F4EC"/>
+                  <a:srgbClr val="FFFFFF"/>
                 </a:solidFill>
                 <a:latin typeface="Arial"/>
                 <a:ea typeface="Arial"/>
@@ -11184,7 +11340,7 @@
             <a:lvl3pPr>
               <a:defRPr sz="3600" b="1">
                 <a:solidFill>
-                  <a:srgbClr val="F6F4EC"/>
+                  <a:srgbClr val="FFFFFF"/>
                 </a:solidFill>
                 <a:latin typeface="Arial"/>
                 <a:ea typeface="Arial"/>
@@ -11194,7 +11350,7 @@
             <a:lvl4pPr>
               <a:defRPr sz="3600" b="1">
                 <a:solidFill>
-                  <a:srgbClr val="F6F4EC"/>
+                  <a:srgbClr val="FFFFFF"/>
                 </a:solidFill>
                 <a:latin typeface="Arial"/>
                 <a:ea typeface="Arial"/>
@@ -11204,7 +11360,7 @@
             <a:lvl5pPr>
               <a:defRPr sz="3600" b="1">
                 <a:solidFill>
-                  <a:srgbClr val="F6F4EC"/>
+                  <a:srgbClr val="FFFFFF"/>
                 </a:solidFill>
                 <a:latin typeface="Arial"/>
                 <a:ea typeface="Arial"/>
@@ -11214,7 +11370,7 @@
             <a:lvl6pPr>
               <a:defRPr sz="3600" b="1">
                 <a:solidFill>
-                  <a:srgbClr val="F6F4EC"/>
+                  <a:srgbClr val="FFFFFF"/>
                 </a:solidFill>
                 <a:latin typeface="Arial"/>
                 <a:ea typeface="Arial"/>
@@ -11224,7 +11380,7 @@
             <a:lvl7pPr>
               <a:defRPr sz="3600" b="1">
                 <a:solidFill>
-                  <a:srgbClr val="F6F4EC"/>
+                  <a:srgbClr val="FFFFFF"/>
                 </a:solidFill>
                 <a:latin typeface="Arial"/>
                 <a:ea typeface="Arial"/>
@@ -11234,7 +11390,7 @@
             <a:lvl8pPr>
               <a:defRPr sz="3600" b="1">
                 <a:solidFill>
-                  <a:srgbClr val="F6F4EC"/>
+                  <a:srgbClr val="FFFFFF"/>
                 </a:solidFill>
                 <a:latin typeface="Arial"/>
                 <a:ea typeface="Arial"/>
@@ -11244,7 +11400,7 @@
             <a:lvl9pPr>
               <a:defRPr sz="3600" b="1">
                 <a:solidFill>
-                  <a:srgbClr val="F6F4EC"/>
+                  <a:srgbClr val="FFFFFF"/>
                 </a:solidFill>
                 <a:latin typeface="Arial"/>
                 <a:ea typeface="Arial"/>
@@ -11256,7 +11412,7 @@
             <a:pPr>
               <a:defRPr sz="3600" b="1">
                 <a:solidFill>
-                  <a:srgbClr val="F6F4EC"/>
+                  <a:srgbClr val="FFFFFF"/>
                 </a:solidFill>
                 <a:latin typeface="Arial"/>
                 <a:ea typeface="Arial"/>
@@ -11266,7 +11422,7 @@
             <a:r>
               <a:rPr sz="3600" b="1">
                 <a:solidFill>
-                  <a:srgbClr val="F6F4EC"/>
+                  <a:srgbClr val="FFFFFF"/>
                 </a:solidFill>
                 <a:latin typeface="Arial"/>
                 <a:ea typeface="Arial"/>
@@ -11282,7 +11438,7 @@
           <p:cNvPr id="2" name="">
             <a:extLst xmlns:a="http://schemas.openxmlformats.org/drawingml/2006/main">
               <a:ext uri="{FF2B5EF4-FFF2-40B4-BE49-F238E27FC236}">
-                <a16:creationId xmlns:a16="http://schemas.microsoft.com/office/drawing/2014/main" id="{39B19DED-72DE-4493-BF2F-48904E6A0057}"/>
+                <a16:creationId xmlns:a16="http://schemas.microsoft.com/office/drawing/2014/main" id="{475B1F5B-AA97-4520-AE53-4021789FF921}"/>
               </a:ext>
             </a:extLst>
           </p:cNvPr>
@@ -11310,7 +11466,7 @@
             <a:defPPr>
               <a:defRPr sz="1425" b="0">
                 <a:solidFill>
-                  <a:srgbClr val="DDE8DF"/>
+                  <a:srgbClr val="FFFFFF"/>
                 </a:solidFill>
                 <a:latin typeface="Arial"/>
                 <a:ea typeface="Arial"/>
@@ -11320,7 +11476,7 @@
             <a:lvl1pPr>
               <a:defRPr sz="1425" b="0">
                 <a:solidFill>
-                  <a:srgbClr val="DDE8DF"/>
+                  <a:srgbClr val="FFFFFF"/>
                 </a:solidFill>
                 <a:latin typeface="Arial"/>
                 <a:ea typeface="Arial"/>
@@ -11330,7 +11486,7 @@
             <a:lvl2pPr>
               <a:defRPr sz="1425" b="0">
                 <a:solidFill>
-                  <a:srgbClr val="DDE8DF"/>
+                  <a:srgbClr val="FFFFFF"/>
                 </a:solidFill>
                 <a:latin typeface="Arial"/>
                 <a:ea typeface="Arial"/>
@@ -11340,7 +11496,7 @@
             <a:lvl3pPr>
               <a:defRPr sz="1425" b="0">
                 <a:solidFill>
-                  <a:srgbClr val="DDE8DF"/>
+                  <a:srgbClr val="FFFFFF"/>
                 </a:solidFill>
                 <a:latin typeface="Arial"/>
                 <a:ea typeface="Arial"/>
@@ -11350,7 +11506,7 @@
             <a:lvl4pPr>
               <a:defRPr sz="1425" b="0">
                 <a:solidFill>
-                  <a:srgbClr val="DDE8DF"/>
+                  <a:srgbClr val="FFFFFF"/>
                 </a:solidFill>
                 <a:latin typeface="Arial"/>
                 <a:ea typeface="Arial"/>
@@ -11360,7 +11516,7 @@
             <a:lvl5pPr>
               <a:defRPr sz="1425" b="0">
                 <a:solidFill>
-                  <a:srgbClr val="DDE8DF"/>
+                  <a:srgbClr val="FFFFFF"/>
                 </a:solidFill>
                 <a:latin typeface="Arial"/>
                 <a:ea typeface="Arial"/>
@@ -11370,7 +11526,7 @@
             <a:lvl6pPr>
               <a:defRPr sz="1425" b="0">
                 <a:solidFill>
-                  <a:srgbClr val="DDE8DF"/>
+                  <a:srgbClr val="FFFFFF"/>
                 </a:solidFill>
                 <a:latin typeface="Arial"/>
                 <a:ea typeface="Arial"/>
@@ -11380,7 +11536,7 @@
             <a:lvl7pPr>
               <a:defRPr sz="1425" b="0">
                 <a:solidFill>
-                  <a:srgbClr val="DDE8DF"/>
+                  <a:srgbClr val="FFFFFF"/>
                 </a:solidFill>
                 <a:latin typeface="Arial"/>
                 <a:ea typeface="Arial"/>
@@ -11390,7 +11546,7 @@
             <a:lvl8pPr>
               <a:defRPr sz="1425" b="0">
                 <a:solidFill>
-                  <a:srgbClr val="DDE8DF"/>
+                  <a:srgbClr val="FFFFFF"/>
                 </a:solidFill>
                 <a:latin typeface="Arial"/>
                 <a:ea typeface="Arial"/>
@@ -11400,7 +11556,7 @@
             <a:lvl9pPr>
               <a:defRPr sz="1425" b="0">
                 <a:solidFill>
-                  <a:srgbClr val="DDE8DF"/>
+                  <a:srgbClr val="FFFFFF"/>
                 </a:solidFill>
                 <a:latin typeface="Arial"/>
                 <a:ea typeface="Arial"/>
@@ -11412,7 +11568,7 @@
             <a:pPr>
               <a:defRPr sz="1425" b="0">
                 <a:solidFill>
-                  <a:srgbClr val="DDE8DF"/>
+                  <a:srgbClr val="FFFFFF"/>
                 </a:solidFill>
                 <a:latin typeface="Arial"/>
                 <a:ea typeface="Arial"/>
@@ -11422,7 +11578,7 @@
             <a:r>
               <a:rPr sz="1425" b="0">
                 <a:solidFill>
-                  <a:srgbClr val="DDE8DF"/>
+                  <a:srgbClr val="FFFFFF"/>
                 </a:solidFill>
                 <a:latin typeface="Arial"/>
                 <a:ea typeface="Arial"/>
@@ -11438,7 +11594,7 @@
           <p:cNvPr id="3" name="">
             <a:extLst xmlns:a="http://schemas.openxmlformats.org/drawingml/2006/main">
               <a:ext uri="{FF2B5EF4-FFF2-40B4-BE49-F238E27FC236}">
-                <a16:creationId xmlns:a16="http://schemas.microsoft.com/office/drawing/2014/main" id="{B1B29C81-ACA1-4006-9E66-48AD8E72DAA5}"/>
+                <a16:creationId xmlns:a16="http://schemas.microsoft.com/office/drawing/2014/main" id="{7DB20D11-1455-478D-AB92-0CFE2807A67D}"/>
               </a:ext>
             </a:extLst>
           </p:cNvPr>
@@ -11466,7 +11622,7 @@
             <a:defPPr>
               <a:defRPr sz="8700" b="1">
                 <a:solidFill>
-                  <a:srgbClr val="F6F4EC"/>
+                  <a:srgbClr val="FFFFFF"/>
                 </a:solidFill>
                 <a:latin typeface="Arial"/>
                 <a:ea typeface="Arial"/>
@@ -11476,7 +11632,7 @@
             <a:lvl1pPr>
               <a:defRPr sz="8700" b="1">
                 <a:solidFill>
-                  <a:srgbClr val="F6F4EC"/>
+                  <a:srgbClr val="FFFFFF"/>
                 </a:solidFill>
                 <a:latin typeface="Arial"/>
                 <a:ea typeface="Arial"/>
@@ -11486,7 +11642,7 @@
             <a:lvl2pPr>
               <a:defRPr sz="8700" b="1">
                 <a:solidFill>
-                  <a:srgbClr val="F6F4EC"/>
+                  <a:srgbClr val="FFFFFF"/>
                 </a:solidFill>
                 <a:latin typeface="Arial"/>
                 <a:ea typeface="Arial"/>
@@ -11496,7 +11652,7 @@
             <a:lvl3pPr>
               <a:defRPr sz="8700" b="1">
                 <a:solidFill>
-                  <a:srgbClr val="F6F4EC"/>
+                  <a:srgbClr val="FFFFFF"/>
                 </a:solidFill>
                 <a:latin typeface="Arial"/>
                 <a:ea typeface="Arial"/>
@@ -11506,7 +11662,7 @@
             <a:lvl4pPr>
               <a:defRPr sz="8700" b="1">
                 <a:solidFill>
-                  <a:srgbClr val="F6F4EC"/>
+                  <a:srgbClr val="FFFFFF"/>
                 </a:solidFill>
                 <a:latin typeface="Arial"/>
                 <a:ea typeface="Arial"/>
@@ -11516,7 +11672,7 @@
             <a:lvl5pPr>
               <a:defRPr sz="8700" b="1">
                 <a:solidFill>
-                  <a:srgbClr val="F6F4EC"/>
+                  <a:srgbClr val="FFFFFF"/>
                 </a:solidFill>
                 <a:latin typeface="Arial"/>
                 <a:ea typeface="Arial"/>
@@ -11526,7 +11682,7 @@
             <a:lvl6pPr>
               <a:defRPr sz="8700" b="1">
                 <a:solidFill>
-                  <a:srgbClr val="F6F4EC"/>
+                  <a:srgbClr val="FFFFFF"/>
                 </a:solidFill>
                 <a:latin typeface="Arial"/>
                 <a:ea typeface="Arial"/>
@@ -11536,7 +11692,7 @@
             <a:lvl7pPr>
               <a:defRPr sz="8700" b="1">
                 <a:solidFill>
-                  <a:srgbClr val="F6F4EC"/>
+                  <a:srgbClr val="FFFFFF"/>
                 </a:solidFill>
                 <a:latin typeface="Arial"/>
                 <a:ea typeface="Arial"/>
@@ -11546,7 +11702,7 @@
             <a:lvl8pPr>
               <a:defRPr sz="8700" b="1">
                 <a:solidFill>
-                  <a:srgbClr val="F6F4EC"/>
+                  <a:srgbClr val="FFFFFF"/>
                 </a:solidFill>
                 <a:latin typeface="Arial"/>
                 <a:ea typeface="Arial"/>
@@ -11556,7 +11712,7 @@
             <a:lvl9pPr>
               <a:defRPr sz="8700" b="1">
                 <a:solidFill>
-                  <a:srgbClr val="F6F4EC"/>
+                  <a:srgbClr val="FFFFFF"/>
                 </a:solidFill>
                 <a:latin typeface="Arial"/>
                 <a:ea typeface="Arial"/>
@@ -11568,7 +11724,7 @@
             <a:pPr>
               <a:defRPr sz="8700" b="1">
                 <a:solidFill>
-                  <a:srgbClr val="F6F4EC"/>
+                  <a:srgbClr val="FFFFFF"/>
                 </a:solidFill>
                 <a:latin typeface="Arial"/>
                 <a:ea typeface="Arial"/>
@@ -11578,7 +11734,7 @@
             <a:r>
               <a:rPr sz="8700" b="1">
                 <a:solidFill>
-                  <a:srgbClr val="F6F4EC"/>
+                  <a:srgbClr val="FFFFFF"/>
                 </a:solidFill>
                 <a:latin typeface="Arial"/>
                 <a:ea typeface="Arial"/>
@@ -11594,7 +11750,7 @@
           <p:cNvPr id="4" name="">
             <a:extLst xmlns:a="http://schemas.openxmlformats.org/drawingml/2006/main">
               <a:ext uri="{FF2B5EF4-FFF2-40B4-BE49-F238E27FC236}">
-                <a16:creationId xmlns:a16="http://schemas.microsoft.com/office/drawing/2014/main" id="{4F3C3A16-4D78-4263-82B2-BEA9B10C2898}"/>
+                <a16:creationId xmlns:a16="http://schemas.microsoft.com/office/drawing/2014/main" id="{09BBE3E7-A1D3-45FD-B57C-856AE120BFFD}"/>
               </a:ext>
             </a:extLst>
           </p:cNvPr>
@@ -11622,7 +11778,7 @@
             <a:defPPr>
               <a:defRPr sz="2325" b="0">
                 <a:solidFill>
-                  <a:srgbClr val="DDE8DF"/>
+                  <a:srgbClr val="FFFFFF"/>
                 </a:solidFill>
                 <a:latin typeface="Arial"/>
                 <a:ea typeface="Arial"/>
@@ -11632,7 +11788,7 @@
             <a:lvl1pPr>
               <a:defRPr sz="2325" b="0">
                 <a:solidFill>
-                  <a:srgbClr val="DDE8DF"/>
+                  <a:srgbClr val="FFFFFF"/>
                 </a:solidFill>
                 <a:latin typeface="Arial"/>
                 <a:ea typeface="Arial"/>
@@ -11642,7 +11798,7 @@
             <a:lvl2pPr>
               <a:defRPr sz="2325" b="0">
                 <a:solidFill>
-                  <a:srgbClr val="DDE8DF"/>
+                  <a:srgbClr val="FFFFFF"/>
                 </a:solidFill>
                 <a:latin typeface="Arial"/>
                 <a:ea typeface="Arial"/>
@@ -11652,7 +11808,7 @@
             <a:lvl3pPr>
               <a:defRPr sz="2325" b="0">
                 <a:solidFill>
-                  <a:srgbClr val="DDE8DF"/>
+                  <a:srgbClr val="FFFFFF"/>
                 </a:solidFill>
                 <a:latin typeface="Arial"/>
                 <a:ea typeface="Arial"/>
@@ -11662,7 +11818,7 @@
             <a:lvl4pPr>
               <a:defRPr sz="2325" b="0">
                 <a:solidFill>
-                  <a:srgbClr val="DDE8DF"/>
+                  <a:srgbClr val="FFFFFF"/>
                 </a:solidFill>
                 <a:latin typeface="Arial"/>
                 <a:ea typeface="Arial"/>
@@ -11672,7 +11828,7 @@
             <a:lvl5pPr>
               <a:defRPr sz="2325" b="0">
                 <a:solidFill>
-                  <a:srgbClr val="DDE8DF"/>
+                  <a:srgbClr val="FFFFFF"/>
                 </a:solidFill>
                 <a:latin typeface="Arial"/>
                 <a:ea typeface="Arial"/>
@@ -11682,7 +11838,7 @@
             <a:lvl6pPr>
               <a:defRPr sz="2325" b="0">
                 <a:solidFill>
-                  <a:srgbClr val="DDE8DF"/>
+                  <a:srgbClr val="FFFFFF"/>
                 </a:solidFill>
                 <a:latin typeface="Arial"/>
                 <a:ea typeface="Arial"/>
@@ -11692,7 +11848,7 @@
             <a:lvl7pPr>
               <a:defRPr sz="2325" b="0">
                 <a:solidFill>
-                  <a:srgbClr val="DDE8DF"/>
+                  <a:srgbClr val="FFFFFF"/>
                 </a:solidFill>
                 <a:latin typeface="Arial"/>
                 <a:ea typeface="Arial"/>
@@ -11702,7 +11858,7 @@
             <a:lvl8pPr>
               <a:defRPr sz="2325" b="0">
                 <a:solidFill>
-                  <a:srgbClr val="DDE8DF"/>
+                  <a:srgbClr val="FFFFFF"/>
                 </a:solidFill>
                 <a:latin typeface="Arial"/>
                 <a:ea typeface="Arial"/>
@@ -11712,7 +11868,7 @@
             <a:lvl9pPr>
               <a:defRPr sz="2325" b="0">
                 <a:solidFill>
-                  <a:srgbClr val="DDE8DF"/>
+                  <a:srgbClr val="FFFFFF"/>
                 </a:solidFill>
                 <a:latin typeface="Arial"/>
                 <a:ea typeface="Arial"/>
@@ -11724,7 +11880,7 @@
             <a:pPr>
               <a:defRPr sz="2325" b="0">
                 <a:solidFill>
-                  <a:srgbClr val="DDE8DF"/>
+                  <a:srgbClr val="FFFFFF"/>
                 </a:solidFill>
                 <a:latin typeface="Arial"/>
                 <a:ea typeface="Arial"/>
@@ -11734,7 +11890,7 @@
             <a:r>
               <a:rPr sz="2325" b="0">
                 <a:solidFill>
-                  <a:srgbClr val="DDE8DF"/>
+                  <a:srgbClr val="FFFFFF"/>
                 </a:solidFill>
                 <a:latin typeface="Arial"/>
                 <a:ea typeface="Arial"/>
@@ -11750,7 +11906,7 @@
           <p:cNvPr id="5" name="">
             <a:extLst xmlns:a="http://schemas.openxmlformats.org/drawingml/2006/main">
               <a:ext uri="{FF2B5EF4-FFF2-40B4-BE49-F238E27FC236}">
-                <a16:creationId xmlns:a16="http://schemas.microsoft.com/office/drawing/2014/main" id="{62390406-2881-4796-AA57-BFE15D628D58}"/>
+                <a16:creationId xmlns:a16="http://schemas.microsoft.com/office/drawing/2014/main" id="{B81DBB18-1060-4328-B0D6-A43D990CA191}"/>
               </a:ext>
             </a:extLst>
           </p:cNvPr>
@@ -11778,7 +11934,7 @@
             <a:defPPr>
               <a:defRPr sz="2700" b="1">
                 <a:solidFill>
-                  <a:srgbClr val="F6F4EC"/>
+                  <a:srgbClr val="FFFFFF"/>
                 </a:solidFill>
                 <a:latin typeface="Arial"/>
                 <a:ea typeface="Arial"/>
@@ -11788,7 +11944,7 @@
             <a:lvl1pPr>
               <a:defRPr sz="2700" b="1">
                 <a:solidFill>
-                  <a:srgbClr val="F6F4EC"/>
+                  <a:srgbClr val="FFFFFF"/>
                 </a:solidFill>
                 <a:latin typeface="Arial"/>
                 <a:ea typeface="Arial"/>
@@ -11798,7 +11954,7 @@
             <a:lvl2pPr>
               <a:defRPr sz="2700" b="1">
                 <a:solidFill>
-                  <a:srgbClr val="F6F4EC"/>
+                  <a:srgbClr val="FFFFFF"/>
                 </a:solidFill>
                 <a:latin typeface="Arial"/>
                 <a:ea typeface="Arial"/>
@@ -11808,7 +11964,7 @@
             <a:lvl3pPr>
               <a:defRPr sz="2700" b="1">
                 <a:solidFill>
-                  <a:srgbClr val="F6F4EC"/>
+                  <a:srgbClr val="FFFFFF"/>
                 </a:solidFill>
                 <a:latin typeface="Arial"/>
                 <a:ea typeface="Arial"/>
@@ -11818,7 +11974,7 @@
             <a:lvl4pPr>
               <a:defRPr sz="2700" b="1">
                 <a:solidFill>
-                  <a:srgbClr val="F6F4EC"/>
+                  <a:srgbClr val="FFFFFF"/>
                 </a:solidFill>
                 <a:latin typeface="Arial"/>
                 <a:ea typeface="Arial"/>
@@ -11828,7 +11984,7 @@
             <a:lvl5pPr>
               <a:defRPr sz="2700" b="1">
                 <a:solidFill>
-                  <a:srgbClr val="F6F4EC"/>
+                  <a:srgbClr val="FFFFFF"/>
                 </a:solidFill>
                 <a:latin typeface="Arial"/>
                 <a:ea typeface="Arial"/>
@@ -11838,7 +11994,7 @@
             <a:lvl6pPr>
               <a:defRPr sz="2700" b="1">
                 <a:solidFill>
-                  <a:srgbClr val="F6F4EC"/>
+                  <a:srgbClr val="FFFFFF"/>
                 </a:solidFill>
                 <a:latin typeface="Arial"/>
                 <a:ea typeface="Arial"/>
@@ -11848,7 +12004,7 @@
             <a:lvl7pPr>
               <a:defRPr sz="2700" b="1">
                 <a:solidFill>
-                  <a:srgbClr val="F6F4EC"/>
+                  <a:srgbClr val="FFFFFF"/>
                 </a:solidFill>
                 <a:latin typeface="Arial"/>
                 <a:ea typeface="Arial"/>
@@ -11858,7 +12014,7 @@
             <a:lvl8pPr>
               <a:defRPr sz="2700" b="1">
                 <a:solidFill>
-                  <a:srgbClr val="F6F4EC"/>
+                  <a:srgbClr val="FFFFFF"/>
                 </a:solidFill>
                 <a:latin typeface="Arial"/>
                 <a:ea typeface="Arial"/>
@@ -11868,7 +12024,7 @@
             <a:lvl9pPr>
               <a:defRPr sz="2700" b="1">
                 <a:solidFill>
-                  <a:srgbClr val="F6F4EC"/>
+                  <a:srgbClr val="FFFFFF"/>
                 </a:solidFill>
                 <a:latin typeface="Arial"/>
                 <a:ea typeface="Arial"/>
@@ -11880,7 +12036,7 @@
             <a:pPr>
               <a:defRPr sz="2700" b="1">
                 <a:solidFill>
-                  <a:srgbClr val="F6F4EC"/>
+                  <a:srgbClr val="FFFFFF"/>
                 </a:solidFill>
                 <a:latin typeface="Arial"/>
                 <a:ea typeface="Arial"/>
@@ -11890,7 +12046,7 @@
             <a:r>
               <a:rPr sz="2700" b="1">
                 <a:solidFill>
-                  <a:srgbClr val="F6F4EC"/>
+                  <a:srgbClr val="FFFFFF"/>
                 </a:solidFill>
                 <a:latin typeface="Arial"/>
                 <a:ea typeface="Arial"/>
@@ -11903,7 +12059,7 @@
             <a:pPr>
               <a:defRPr sz="2700" b="1">
                 <a:solidFill>
-                  <a:srgbClr val="F6F4EC"/>
+                  <a:srgbClr val="FFFFFF"/>
                 </a:solidFill>
                 <a:latin typeface="Arial"/>
                 <a:ea typeface="Arial"/>
@@ -11913,7 +12069,7 @@
             <a:r>
               <a:rPr sz="2700" b="1">
                 <a:solidFill>
-                  <a:srgbClr val="F6F4EC"/>
+                  <a:srgbClr val="FFFFFF"/>
                 </a:solidFill>
                 <a:latin typeface="Arial"/>
                 <a:ea typeface="Arial"/>
@@ -11926,7 +12082,7 @@
             <a:pPr>
               <a:defRPr sz="2700" b="1">
                 <a:solidFill>
-                  <a:srgbClr val="F6F4EC"/>
+                  <a:srgbClr val="FFFFFF"/>
                 </a:solidFill>
                 <a:latin typeface="Arial"/>
                 <a:ea typeface="Arial"/>
@@ -11936,7 +12092,7 @@
             <a:r>
               <a:rPr sz="2700" b="1">
                 <a:solidFill>
-                  <a:srgbClr val="F6F4EC"/>
+                  <a:srgbClr val="FFFFFF"/>
                 </a:solidFill>
                 <a:latin typeface="Arial"/>
                 <a:ea typeface="Arial"/>
@@ -11952,7 +12108,7 @@
           <p:cNvPr id="6" name="">
             <a:extLst xmlns:a="http://schemas.openxmlformats.org/drawingml/2006/main">
               <a:ext uri="{FF2B5EF4-FFF2-40B4-BE49-F238E27FC236}">
-                <a16:creationId xmlns:a16="http://schemas.microsoft.com/office/drawing/2014/main" id="{C31685B9-42E6-4123-980E-977DF035D184}"/>
+                <a16:creationId xmlns:a16="http://schemas.microsoft.com/office/drawing/2014/main" id="{5D855DF0-ADE5-4C17-BFC1-EBD16ABE1214}"/>
               </a:ext>
             </a:extLst>
           </p:cNvPr>
@@ -11980,7 +12136,7 @@
             <a:defPPr>
               <a:defRPr sz="2400" b="0">
                 <a:solidFill>
-                  <a:srgbClr val="F6F4EC"/>
+                  <a:srgbClr val="FFFFFF"/>
                 </a:solidFill>
                 <a:latin typeface="Arial"/>
                 <a:ea typeface="Arial"/>
@@ -11990,7 +12146,7 @@
             <a:lvl1pPr>
               <a:defRPr sz="2400" b="0">
                 <a:solidFill>
-                  <a:srgbClr val="F6F4EC"/>
+                  <a:srgbClr val="FFFFFF"/>
                 </a:solidFill>
                 <a:latin typeface="Arial"/>
                 <a:ea typeface="Arial"/>
@@ -12000,7 +12156,7 @@
             <a:lvl2pPr>
               <a:defRPr sz="2400" b="0">
                 <a:solidFill>
-                  <a:srgbClr val="F6F4EC"/>
+                  <a:srgbClr val="FFFFFF"/>
                 </a:solidFill>
                 <a:latin typeface="Arial"/>
                 <a:ea typeface="Arial"/>
@@ -12010,7 +12166,7 @@
             <a:lvl3pPr>
               <a:defRPr sz="2400" b="0">
                 <a:solidFill>
-                  <a:srgbClr val="F6F4EC"/>
+                  <a:srgbClr val="FFFFFF"/>
                 </a:solidFill>
                 <a:latin typeface="Arial"/>
                 <a:ea typeface="Arial"/>
@@ -12020,7 +12176,7 @@
             <a:lvl4pPr>
               <a:defRPr sz="2400" b="0">
                 <a:solidFill>
-                  <a:srgbClr val="F6F4EC"/>
+                  <a:srgbClr val="FFFFFF"/>
                 </a:solidFill>
                 <a:latin typeface="Arial"/>
                 <a:ea typeface="Arial"/>
@@ -12030,7 +12186,7 @@
             <a:lvl5pPr>
               <a:defRPr sz="2400" b="0">
                 <a:solidFill>
-                  <a:srgbClr val="F6F4EC"/>
+                  <a:srgbClr val="FFFFFF"/>
                 </a:solidFill>
                 <a:latin typeface="Arial"/>
                 <a:ea typeface="Arial"/>
@@ -12040,7 +12196,7 @@
             <a:lvl6pPr>
               <a:defRPr sz="2400" b="0">
                 <a:solidFill>
-                  <a:srgbClr val="F6F4EC"/>
+                  <a:srgbClr val="FFFFFF"/>
                 </a:solidFill>
                 <a:latin typeface="Arial"/>
                 <a:ea typeface="Arial"/>
@@ -12050,7 +12206,7 @@
             <a:lvl7pPr>
               <a:defRPr sz="2400" b="0">
                 <a:solidFill>
-                  <a:srgbClr val="F6F4EC"/>
+                  <a:srgbClr val="FFFFFF"/>
                 </a:solidFill>
                 <a:latin typeface="Arial"/>
                 <a:ea typeface="Arial"/>
@@ -12060,7 +12216,7 @@
             <a:lvl8pPr>
               <a:defRPr sz="2400" b="0">
                 <a:solidFill>
-                  <a:srgbClr val="F6F4EC"/>
+                  <a:srgbClr val="FFFFFF"/>
                 </a:solidFill>
                 <a:latin typeface="Arial"/>
                 <a:ea typeface="Arial"/>
@@ -12070,7 +12226,7 @@
             <a:lvl9pPr>
               <a:defRPr sz="2400" b="0">
                 <a:solidFill>
-                  <a:srgbClr val="F6F4EC"/>
+                  <a:srgbClr val="FFFFFF"/>
                 </a:solidFill>
                 <a:latin typeface="Arial"/>
                 <a:ea typeface="Arial"/>
@@ -12082,7 +12238,7 @@
             <a:pPr>
               <a:defRPr sz="2400" b="0">
                 <a:solidFill>
-                  <a:srgbClr val="F6F4EC"/>
+                  <a:srgbClr val="FFFFFF"/>
                 </a:solidFill>
                 <a:latin typeface="Arial"/>
                 <a:ea typeface="Arial"/>
@@ -12092,7 +12248,7 @@
             <a:r>
               <a:rPr sz="2400" b="0">
                 <a:solidFill>
-                  <a:srgbClr val="F6F4EC"/>
+                  <a:srgbClr val="FFFFFF"/>
                 </a:solidFill>
                 <a:latin typeface="Arial"/>
                 <a:ea typeface="Arial"/>
@@ -12108,7 +12264,7 @@
           <p:cNvPr id="7" name="">
             <a:extLst xmlns:a="http://schemas.openxmlformats.org/drawingml/2006/main">
               <a:ext uri="{FF2B5EF4-FFF2-40B4-BE49-F238E27FC236}">
-                <a16:creationId xmlns:a16="http://schemas.microsoft.com/office/drawing/2014/main" id="{EE05F41E-DD64-4B53-873E-942E0E0D17F1}"/>
+                <a16:creationId xmlns:a16="http://schemas.microsoft.com/office/drawing/2014/main" id="{FA314333-3031-41F9-8418-280001426931}"/>
               </a:ext>
             </a:extLst>
           </p:cNvPr>
@@ -12136,7 +12292,7 @@
             <a:defPPr>
               <a:defRPr sz="1350" b="0">
                 <a:solidFill>
-                  <a:srgbClr val="DDE8DF"/>
+                  <a:srgbClr val="FFFFFF"/>
                 </a:solidFill>
                 <a:latin typeface="Arial"/>
                 <a:ea typeface="Arial"/>
@@ -12146,7 +12302,7 @@
             <a:lvl1pPr>
               <a:defRPr sz="1350" b="0">
                 <a:solidFill>
-                  <a:srgbClr val="DDE8DF"/>
+                  <a:srgbClr val="FFFFFF"/>
                 </a:solidFill>
                 <a:latin typeface="Arial"/>
                 <a:ea typeface="Arial"/>
@@ -12156,7 +12312,7 @@
             <a:lvl2pPr>
               <a:defRPr sz="1350" b="0">
                 <a:solidFill>
-                  <a:srgbClr val="DDE8DF"/>
+                  <a:srgbClr val="FFFFFF"/>
                 </a:solidFill>
                 <a:latin typeface="Arial"/>
                 <a:ea typeface="Arial"/>
@@ -12166,7 +12322,7 @@
             <a:lvl3pPr>
               <a:defRPr sz="1350" b="0">
                 <a:solidFill>
-                  <a:srgbClr val="DDE8DF"/>
+                  <a:srgbClr val="FFFFFF"/>
                 </a:solidFill>
                 <a:latin typeface="Arial"/>
                 <a:ea typeface="Arial"/>
@@ -12176,7 +12332,7 @@
             <a:lvl4pPr>
               <a:defRPr sz="1350" b="0">
                 <a:solidFill>
-                  <a:srgbClr val="DDE8DF"/>
+                  <a:srgbClr val="FFFFFF"/>
                 </a:solidFill>
                 <a:latin typeface="Arial"/>
                 <a:ea typeface="Arial"/>
@@ -12186,7 +12342,7 @@
             <a:lvl5pPr>
               <a:defRPr sz="1350" b="0">
                 <a:solidFill>
-                  <a:srgbClr val="DDE8DF"/>
+                  <a:srgbClr val="FFFFFF"/>
                 </a:solidFill>
                 <a:latin typeface="Arial"/>
                 <a:ea typeface="Arial"/>
@@ -12196,7 +12352,7 @@
             <a:lvl6pPr>
               <a:defRPr sz="1350" b="0">
                 <a:solidFill>
-                  <a:srgbClr val="DDE8DF"/>
+                  <a:srgbClr val="FFFFFF"/>
                 </a:solidFill>
                 <a:latin typeface="Arial"/>
                 <a:ea typeface="Arial"/>
@@ -12206,7 +12362,7 @@
             <a:lvl7pPr>
               <a:defRPr sz="1350" b="0">
                 <a:solidFill>
-                  <a:srgbClr val="DDE8DF"/>
+                  <a:srgbClr val="FFFFFF"/>
                 </a:solidFill>
                 <a:latin typeface="Arial"/>
                 <a:ea typeface="Arial"/>
@@ -12216,7 +12372,7 @@
             <a:lvl8pPr>
               <a:defRPr sz="1350" b="0">
                 <a:solidFill>
-                  <a:srgbClr val="DDE8DF"/>
+                  <a:srgbClr val="FFFFFF"/>
                 </a:solidFill>
                 <a:latin typeface="Arial"/>
                 <a:ea typeface="Arial"/>
@@ -12226,7 +12382,7 @@
             <a:lvl9pPr>
               <a:defRPr sz="1350" b="0">
                 <a:solidFill>
-                  <a:srgbClr val="DDE8DF"/>
+                  <a:srgbClr val="FFFFFF"/>
                 </a:solidFill>
                 <a:latin typeface="Arial"/>
                 <a:ea typeface="Arial"/>
@@ -12238,7 +12394,7 @@
             <a:pPr>
               <a:defRPr sz="1350" b="0">
                 <a:solidFill>
-                  <a:srgbClr val="DDE8DF"/>
+                  <a:srgbClr val="FFFFFF"/>
                 </a:solidFill>
                 <a:latin typeface="Arial"/>
                 <a:ea typeface="Arial"/>
@@ -12248,7 +12404,7 @@
             <a:r>
               <a:rPr sz="1350" b="0">
                 <a:solidFill>
-                  <a:srgbClr val="DDE8DF"/>
+                  <a:srgbClr val="FFFFFF"/>
                 </a:solidFill>
                 <a:latin typeface="Arial"/>
                 <a:ea typeface="Arial"/>
@@ -12262,7 +12418,7 @@
     </p:spTree>
     <p:extLst>
       <p:ext uri="{BB962C8B-B14F-4D97-AF65-F5344CB8AC3E}">
-        <p14:creationId xmlns:p14="http://schemas.microsoft.com/office/powerpoint/2010/main" val="242710658"/>
+        <p14:creationId xmlns:p14="http://schemas.microsoft.com/office/powerpoint/2010/main" val="202088310"/>
       </p:ext>
     </p:extLst>
   </p:cSld>
@@ -12275,7 +12431,7 @@
     <p:bg>
       <p:bgPr>
         <a:solidFill xmlns:a="http://schemas.openxmlformats.org/drawingml/2006/main">
-          <a:srgbClr val="F6F4EC"/>
+          <a:srgbClr val="FFFFFF"/>
         </a:solidFill>
       </p:bgPr>
     </p:bg>
@@ -12293,7 +12449,7 @@
           <p:cNvPr id="11" name="">
             <a:extLst xmlns:a="http://schemas.openxmlformats.org/drawingml/2006/main">
               <a:ext uri="{FF2B5EF4-FFF2-40B4-BE49-F238E27FC236}">
-                <a16:creationId xmlns:a16="http://schemas.microsoft.com/office/drawing/2014/main" id="{B2FD1A33-1D72-4D7E-A169-6AB89C4DB338}"/>
+                <a16:creationId xmlns:a16="http://schemas.microsoft.com/office/drawing/2014/main" id="{465DAE4C-3E77-44EC-A58F-FFEEFE3BAFD7}"/>
               </a:ext>
             </a:extLst>
           </p:cNvPr>
@@ -12321,7 +12477,7 @@
             <a:defPPr>
               <a:defRPr sz="3600" b="1">
                 <a:solidFill>
-                  <a:srgbClr val="233D34"/>
+                  <a:srgbClr val="CC0000"/>
                 </a:solidFill>
                 <a:latin typeface="Arial"/>
                 <a:ea typeface="Arial"/>
@@ -12331,7 +12487,7 @@
             <a:lvl1pPr>
               <a:defRPr sz="3600" b="1">
                 <a:solidFill>
-                  <a:srgbClr val="233D34"/>
+                  <a:srgbClr val="CC0000"/>
                 </a:solidFill>
                 <a:latin typeface="Arial"/>
                 <a:ea typeface="Arial"/>
@@ -12341,7 +12497,7 @@
             <a:lvl2pPr>
               <a:defRPr sz="3600" b="1">
                 <a:solidFill>
-                  <a:srgbClr val="233D34"/>
+                  <a:srgbClr val="CC0000"/>
                 </a:solidFill>
                 <a:latin typeface="Arial"/>
                 <a:ea typeface="Arial"/>
@@ -12351,7 +12507,7 @@
             <a:lvl3pPr>
               <a:defRPr sz="3600" b="1">
                 <a:solidFill>
-                  <a:srgbClr val="233D34"/>
+                  <a:srgbClr val="CC0000"/>
                 </a:solidFill>
                 <a:latin typeface="Arial"/>
                 <a:ea typeface="Arial"/>
@@ -12361,7 +12517,7 @@
             <a:lvl4pPr>
               <a:defRPr sz="3600" b="1">
                 <a:solidFill>
-                  <a:srgbClr val="233D34"/>
+                  <a:srgbClr val="CC0000"/>
                 </a:solidFill>
                 <a:latin typeface="Arial"/>
                 <a:ea typeface="Arial"/>
@@ -12371,7 +12527,7 @@
             <a:lvl5pPr>
               <a:defRPr sz="3600" b="1">
                 <a:solidFill>
-                  <a:srgbClr val="233D34"/>
+                  <a:srgbClr val="CC0000"/>
                 </a:solidFill>
                 <a:latin typeface="Arial"/>
                 <a:ea typeface="Arial"/>
@@ -12381,7 +12537,7 @@
             <a:lvl6pPr>
               <a:defRPr sz="3600" b="1">
                 <a:solidFill>
-                  <a:srgbClr val="233D34"/>
+                  <a:srgbClr val="CC0000"/>
                 </a:solidFill>
                 <a:latin typeface="Arial"/>
                 <a:ea typeface="Arial"/>
@@ -12391,7 +12547,7 @@
             <a:lvl7pPr>
               <a:defRPr sz="3600" b="1">
                 <a:solidFill>
-                  <a:srgbClr val="233D34"/>
+                  <a:srgbClr val="CC0000"/>
                 </a:solidFill>
                 <a:latin typeface="Arial"/>
                 <a:ea typeface="Arial"/>
@@ -12401,7 +12557,7 @@
             <a:lvl8pPr>
               <a:defRPr sz="3600" b="1">
                 <a:solidFill>
-                  <a:srgbClr val="233D34"/>
+                  <a:srgbClr val="CC0000"/>
                 </a:solidFill>
                 <a:latin typeface="Arial"/>
                 <a:ea typeface="Arial"/>
@@ -12411,7 +12567,7 @@
             <a:lvl9pPr>
               <a:defRPr sz="3600" b="1">
                 <a:solidFill>
-                  <a:srgbClr val="233D34"/>
+                  <a:srgbClr val="CC0000"/>
                 </a:solidFill>
                 <a:latin typeface="Arial"/>
                 <a:ea typeface="Arial"/>
@@ -12423,7 +12579,7 @@
             <a:pPr>
               <a:defRPr sz="3600" b="1">
                 <a:solidFill>
-                  <a:srgbClr val="233D34"/>
+                  <a:srgbClr val="CC0000"/>
                 </a:solidFill>
                 <a:latin typeface="Arial"/>
                 <a:ea typeface="Arial"/>
@@ -12433,7 +12589,7 @@
             <a:r>
               <a:rPr sz="3600" b="1">
                 <a:solidFill>
-                  <a:srgbClr val="233D34"/>
+                  <a:srgbClr val="CC0000"/>
                 </a:solidFill>
                 <a:latin typeface="Arial"/>
                 <a:ea typeface="Arial"/>
@@ -12449,7 +12605,7 @@
           <p:cNvPr id="2" name="">
             <a:extLst xmlns:a="http://schemas.openxmlformats.org/drawingml/2006/main">
               <a:ext uri="{FF2B5EF4-FFF2-40B4-BE49-F238E27FC236}">
-                <a16:creationId xmlns:a16="http://schemas.microsoft.com/office/drawing/2014/main" id="{4E3CC9B6-3589-4761-AC8C-77BA1447A3F4}"/>
+                <a16:creationId xmlns:a16="http://schemas.microsoft.com/office/drawing/2014/main" id="{7DD71763-3CFA-43BD-81DC-ED8387FD1A36}"/>
               </a:ext>
             </a:extLst>
           </p:cNvPr>
@@ -12477,7 +12633,7 @@
             <a:defPPr>
               <a:defRPr sz="1425" b="0">
                 <a:solidFill>
-                  <a:srgbClr val="647168"/>
+                  <a:srgbClr val="595959"/>
                 </a:solidFill>
                 <a:latin typeface="Arial"/>
                 <a:ea typeface="Arial"/>
@@ -12487,7 +12643,7 @@
             <a:lvl1pPr>
               <a:defRPr sz="1425" b="0">
                 <a:solidFill>
-                  <a:srgbClr val="647168"/>
+                  <a:srgbClr val="595959"/>
                 </a:solidFill>
                 <a:latin typeface="Arial"/>
                 <a:ea typeface="Arial"/>
@@ -12497,7 +12653,7 @@
             <a:lvl2pPr>
               <a:defRPr sz="1425" b="0">
                 <a:solidFill>
-                  <a:srgbClr val="647168"/>
+                  <a:srgbClr val="595959"/>
                 </a:solidFill>
                 <a:latin typeface="Arial"/>
                 <a:ea typeface="Arial"/>
@@ -12507,7 +12663,7 @@
             <a:lvl3pPr>
               <a:defRPr sz="1425" b="0">
                 <a:solidFill>
-                  <a:srgbClr val="647168"/>
+                  <a:srgbClr val="595959"/>
                 </a:solidFill>
                 <a:latin typeface="Arial"/>
                 <a:ea typeface="Arial"/>
@@ -12517,7 +12673,7 @@
             <a:lvl4pPr>
               <a:defRPr sz="1425" b="0">
                 <a:solidFill>
-                  <a:srgbClr val="647168"/>
+                  <a:srgbClr val="595959"/>
                 </a:solidFill>
                 <a:latin typeface="Arial"/>
                 <a:ea typeface="Arial"/>
@@ -12527,7 +12683,7 @@
             <a:lvl5pPr>
               <a:defRPr sz="1425" b="0">
                 <a:solidFill>
-                  <a:srgbClr val="647168"/>
+                  <a:srgbClr val="595959"/>
                 </a:solidFill>
                 <a:latin typeface="Arial"/>
                 <a:ea typeface="Arial"/>
@@ -12537,7 +12693,7 @@
             <a:lvl6pPr>
               <a:defRPr sz="1425" b="0">
                 <a:solidFill>
-                  <a:srgbClr val="647168"/>
+                  <a:srgbClr val="595959"/>
                 </a:solidFill>
                 <a:latin typeface="Arial"/>
                 <a:ea typeface="Arial"/>
@@ -12547,7 +12703,7 @@
             <a:lvl7pPr>
               <a:defRPr sz="1425" b="0">
                 <a:solidFill>
-                  <a:srgbClr val="647168"/>
+                  <a:srgbClr val="595959"/>
                 </a:solidFill>
                 <a:latin typeface="Arial"/>
                 <a:ea typeface="Arial"/>
@@ -12557,7 +12713,7 @@
             <a:lvl8pPr>
               <a:defRPr sz="1425" b="0">
                 <a:solidFill>
-                  <a:srgbClr val="647168"/>
+                  <a:srgbClr val="595959"/>
                 </a:solidFill>
                 <a:latin typeface="Arial"/>
                 <a:ea typeface="Arial"/>
@@ -12567,7 +12723,7 @@
             <a:lvl9pPr>
               <a:defRPr sz="1425" b="0">
                 <a:solidFill>
-                  <a:srgbClr val="647168"/>
+                  <a:srgbClr val="595959"/>
                 </a:solidFill>
                 <a:latin typeface="Arial"/>
                 <a:ea typeface="Arial"/>
@@ -12579,7 +12735,7 @@
             <a:pPr>
               <a:defRPr sz="1425" b="0">
                 <a:solidFill>
-                  <a:srgbClr val="647168"/>
+                  <a:srgbClr val="595959"/>
                 </a:solidFill>
                 <a:latin typeface="Arial"/>
                 <a:ea typeface="Arial"/>
@@ -12589,7 +12745,7 @@
             <a:r>
               <a:rPr sz="1425" b="0">
                 <a:solidFill>
-                  <a:srgbClr val="647168"/>
+                  <a:srgbClr val="595959"/>
                 </a:solidFill>
                 <a:latin typeface="Arial"/>
                 <a:ea typeface="Arial"/>
@@ -12605,7 +12761,7 @@
           <p:cNvPr id="3" name="">
             <a:extLst xmlns:a="http://schemas.openxmlformats.org/drawingml/2006/main">
               <a:ext uri="{FF2B5EF4-FFF2-40B4-BE49-F238E27FC236}">
-                <a16:creationId xmlns:a16="http://schemas.microsoft.com/office/drawing/2014/main" id="{91419D7B-F3B9-4CED-A265-2F8B73CF8446}"/>
+                <a16:creationId xmlns:a16="http://schemas.microsoft.com/office/drawing/2014/main" id="{C38485BA-F8F4-4329-B53A-1A46E3CA0BAB}"/>
               </a:ext>
             </a:extLst>
           </p:cNvPr>
@@ -12633,7 +12789,7 @@
             <a:defPPr>
               <a:defRPr sz="2775" b="1">
                 <a:solidFill>
-                  <a:srgbClr val="B9362D"/>
+                  <a:srgbClr val="CC0000"/>
                 </a:solidFill>
                 <a:latin typeface="Arial"/>
                 <a:ea typeface="Arial"/>
@@ -12643,7 +12799,7 @@
             <a:lvl1pPr>
               <a:defRPr sz="2775" b="1">
                 <a:solidFill>
-                  <a:srgbClr val="B9362D"/>
+                  <a:srgbClr val="CC0000"/>
                 </a:solidFill>
                 <a:latin typeface="Arial"/>
                 <a:ea typeface="Arial"/>
@@ -12653,7 +12809,7 @@
             <a:lvl2pPr>
               <a:defRPr sz="2775" b="1">
                 <a:solidFill>
-                  <a:srgbClr val="B9362D"/>
+                  <a:srgbClr val="CC0000"/>
                 </a:solidFill>
                 <a:latin typeface="Arial"/>
                 <a:ea typeface="Arial"/>
@@ -12663,7 +12819,7 @@
             <a:lvl3pPr>
               <a:defRPr sz="2775" b="1">
                 <a:solidFill>
-                  <a:srgbClr val="B9362D"/>
+                  <a:srgbClr val="CC0000"/>
                 </a:solidFill>
                 <a:latin typeface="Arial"/>
                 <a:ea typeface="Arial"/>
@@ -12673,7 +12829,7 @@
             <a:lvl4pPr>
               <a:defRPr sz="2775" b="1">
                 <a:solidFill>
-                  <a:srgbClr val="B9362D"/>
+                  <a:srgbClr val="CC0000"/>
                 </a:solidFill>
                 <a:latin typeface="Arial"/>
                 <a:ea typeface="Arial"/>
@@ -12683,7 +12839,7 @@
             <a:lvl5pPr>
               <a:defRPr sz="2775" b="1">
                 <a:solidFill>
-                  <a:srgbClr val="B9362D"/>
+                  <a:srgbClr val="CC0000"/>
                 </a:solidFill>
                 <a:latin typeface="Arial"/>
                 <a:ea typeface="Arial"/>
@@ -12693,7 +12849,7 @@
             <a:lvl6pPr>
               <a:defRPr sz="2775" b="1">
                 <a:solidFill>
-                  <a:srgbClr val="B9362D"/>
+                  <a:srgbClr val="CC0000"/>
                 </a:solidFill>
                 <a:latin typeface="Arial"/>
                 <a:ea typeface="Arial"/>
@@ -12703,7 +12859,7 @@
             <a:lvl7pPr>
               <a:defRPr sz="2775" b="1">
                 <a:solidFill>
-                  <a:srgbClr val="B9362D"/>
+                  <a:srgbClr val="CC0000"/>
                 </a:solidFill>
                 <a:latin typeface="Arial"/>
                 <a:ea typeface="Arial"/>
@@ -12713,7 +12869,7 @@
             <a:lvl8pPr>
               <a:defRPr sz="2775" b="1">
                 <a:solidFill>
-                  <a:srgbClr val="B9362D"/>
+                  <a:srgbClr val="CC0000"/>
                 </a:solidFill>
                 <a:latin typeface="Arial"/>
                 <a:ea typeface="Arial"/>
@@ -12723,7 +12879,7 @@
             <a:lvl9pPr>
               <a:defRPr sz="2775" b="1">
                 <a:solidFill>
-                  <a:srgbClr val="B9362D"/>
+                  <a:srgbClr val="CC0000"/>
                 </a:solidFill>
                 <a:latin typeface="Arial"/>
                 <a:ea typeface="Arial"/>
@@ -12735,7 +12891,7 @@
             <a:pPr>
               <a:defRPr sz="2775" b="1">
                 <a:solidFill>
-                  <a:srgbClr val="B9362D"/>
+                  <a:srgbClr val="CC0000"/>
                 </a:solidFill>
                 <a:latin typeface="Arial"/>
                 <a:ea typeface="Arial"/>
@@ -12745,7 +12901,7 @@
             <a:r>
               <a:rPr sz="2775" b="1">
                 <a:solidFill>
-                  <a:srgbClr val="B9362D"/>
+                  <a:srgbClr val="CC0000"/>
                 </a:solidFill>
                 <a:latin typeface="Arial"/>
                 <a:ea typeface="Arial"/>
@@ -12761,7 +12917,7 @@
           <p:cNvPr id="4" name="">
             <a:extLst xmlns:a="http://schemas.openxmlformats.org/drawingml/2006/main">
               <a:ext uri="{FF2B5EF4-FFF2-40B4-BE49-F238E27FC236}">
-                <a16:creationId xmlns:a16="http://schemas.microsoft.com/office/drawing/2014/main" id="{07BCECA6-C641-40B5-AF10-DAE0836C5C9F}"/>
+                <a16:creationId xmlns:a16="http://schemas.microsoft.com/office/drawing/2014/main" id="{5DE2031E-8CFE-4CE8-95F9-8EDA1B018E15}"/>
               </a:ext>
             </a:extLst>
           </p:cNvPr>
@@ -12789,7 +12945,7 @@
             <a:defPPr>
               <a:defRPr sz="2475" b="0">
                 <a:solidFill>
-                  <a:srgbClr val="233D34"/>
+                  <a:srgbClr val="000000"/>
                 </a:solidFill>
                 <a:latin typeface="Arial"/>
                 <a:ea typeface="Arial"/>
@@ -12799,7 +12955,7 @@
             <a:lvl1pPr>
               <a:defRPr sz="2475" b="0">
                 <a:solidFill>
-                  <a:srgbClr val="233D34"/>
+                  <a:srgbClr val="000000"/>
                 </a:solidFill>
                 <a:latin typeface="Arial"/>
                 <a:ea typeface="Arial"/>
@@ -12809,7 +12965,7 @@
             <a:lvl2pPr>
               <a:defRPr sz="2475" b="0">
                 <a:solidFill>
-                  <a:srgbClr val="233D34"/>
+                  <a:srgbClr val="000000"/>
                 </a:solidFill>
                 <a:latin typeface="Arial"/>
                 <a:ea typeface="Arial"/>
@@ -12819,7 +12975,7 @@
             <a:lvl3pPr>
               <a:defRPr sz="2475" b="0">
                 <a:solidFill>
-                  <a:srgbClr val="233D34"/>
+                  <a:srgbClr val="000000"/>
                 </a:solidFill>
                 <a:latin typeface="Arial"/>
                 <a:ea typeface="Arial"/>
@@ -12829,7 +12985,7 @@
             <a:lvl4pPr>
               <a:defRPr sz="2475" b="0">
                 <a:solidFill>
-                  <a:srgbClr val="233D34"/>
+                  <a:srgbClr val="000000"/>
                 </a:solidFill>
                 <a:latin typeface="Arial"/>
                 <a:ea typeface="Arial"/>
@@ -12839,7 +12995,7 @@
             <a:lvl5pPr>
               <a:defRPr sz="2475" b="0">
                 <a:solidFill>
-                  <a:srgbClr val="233D34"/>
+                  <a:srgbClr val="000000"/>
                 </a:solidFill>
                 <a:latin typeface="Arial"/>
                 <a:ea typeface="Arial"/>
@@ -12849,7 +13005,7 @@
             <a:lvl6pPr>
               <a:defRPr sz="2475" b="0">
                 <a:solidFill>
-                  <a:srgbClr val="233D34"/>
+                  <a:srgbClr val="000000"/>
                 </a:solidFill>
                 <a:latin typeface="Arial"/>
                 <a:ea typeface="Arial"/>
@@ -12859,7 +13015,7 @@
             <a:lvl7pPr>
               <a:defRPr sz="2475" b="0">
                 <a:solidFill>
-                  <a:srgbClr val="233D34"/>
+                  <a:srgbClr val="000000"/>
                 </a:solidFill>
                 <a:latin typeface="Arial"/>
                 <a:ea typeface="Arial"/>
@@ -12869,7 +13025,7 @@
             <a:lvl8pPr>
               <a:defRPr sz="2475" b="0">
                 <a:solidFill>
-                  <a:srgbClr val="233D34"/>
+                  <a:srgbClr val="000000"/>
                 </a:solidFill>
                 <a:latin typeface="Arial"/>
                 <a:ea typeface="Arial"/>
@@ -12879,7 +13035,7 @@
             <a:lvl9pPr>
               <a:defRPr sz="2475" b="0">
                 <a:solidFill>
-                  <a:srgbClr val="233D34"/>
+                  <a:srgbClr val="000000"/>
                 </a:solidFill>
                 <a:latin typeface="Arial"/>
                 <a:ea typeface="Arial"/>
@@ -12891,7 +13047,7 @@
             <a:pPr>
               <a:defRPr sz="2475" b="0">
                 <a:solidFill>
-                  <a:srgbClr val="233D34"/>
+                  <a:srgbClr val="000000"/>
                 </a:solidFill>
                 <a:latin typeface="Arial"/>
                 <a:ea typeface="Arial"/>
@@ -12901,7 +13057,7 @@
             <a:r>
               <a:rPr sz="2475" b="0">
                 <a:solidFill>
-                  <a:srgbClr val="233D34"/>
+                  <a:srgbClr val="000000"/>
                 </a:solidFill>
                 <a:latin typeface="Arial"/>
                 <a:ea typeface="Arial"/>
@@ -12917,7 +13073,7 @@
           <p:cNvPr id="5" name="">
             <a:extLst xmlns:a="http://schemas.openxmlformats.org/drawingml/2006/main">
               <a:ext uri="{FF2B5EF4-FFF2-40B4-BE49-F238E27FC236}">
-                <a16:creationId xmlns:a16="http://schemas.microsoft.com/office/drawing/2014/main" id="{721FACF2-82AD-47ED-B4DE-5C73F88A7099}"/>
+                <a16:creationId xmlns:a16="http://schemas.microsoft.com/office/drawing/2014/main" id="{38E941F4-B869-467B-AFF7-F7A77E51EEA4}"/>
               </a:ext>
             </a:extLst>
           </p:cNvPr>
@@ -12945,7 +13101,7 @@
             <a:defPPr>
               <a:defRPr sz="1950" b="0">
                 <a:solidFill>
-                  <a:srgbClr val="647168"/>
+                  <a:srgbClr val="595959"/>
                 </a:solidFill>
                 <a:latin typeface="Arial"/>
                 <a:ea typeface="Arial"/>
@@ -12955,7 +13111,7 @@
             <a:lvl1pPr>
               <a:defRPr sz="1950" b="0">
                 <a:solidFill>
-                  <a:srgbClr val="647168"/>
+                  <a:srgbClr val="595959"/>
                 </a:solidFill>
                 <a:latin typeface="Arial"/>
                 <a:ea typeface="Arial"/>
@@ -12965,7 +13121,7 @@
             <a:lvl2pPr>
               <a:defRPr sz="1950" b="0">
                 <a:solidFill>
-                  <a:srgbClr val="647168"/>
+                  <a:srgbClr val="595959"/>
                 </a:solidFill>
                 <a:latin typeface="Arial"/>
                 <a:ea typeface="Arial"/>
@@ -12975,7 +13131,7 @@
             <a:lvl3pPr>
               <a:defRPr sz="1950" b="0">
                 <a:solidFill>
-                  <a:srgbClr val="647168"/>
+                  <a:srgbClr val="595959"/>
                 </a:solidFill>
                 <a:latin typeface="Arial"/>
                 <a:ea typeface="Arial"/>
@@ -12985,7 +13141,7 @@
             <a:lvl4pPr>
               <a:defRPr sz="1950" b="0">
                 <a:solidFill>
-                  <a:srgbClr val="647168"/>
+                  <a:srgbClr val="595959"/>
                 </a:solidFill>
                 <a:latin typeface="Arial"/>
                 <a:ea typeface="Arial"/>
@@ -12995,7 +13151,7 @@
             <a:lvl5pPr>
               <a:defRPr sz="1950" b="0">
                 <a:solidFill>
-                  <a:srgbClr val="647168"/>
+                  <a:srgbClr val="595959"/>
                 </a:solidFill>
                 <a:latin typeface="Arial"/>
                 <a:ea typeface="Arial"/>
@@ -13005,7 +13161,7 @@
             <a:lvl6pPr>
               <a:defRPr sz="1950" b="0">
                 <a:solidFill>
-                  <a:srgbClr val="647168"/>
+                  <a:srgbClr val="595959"/>
                 </a:solidFill>
                 <a:latin typeface="Arial"/>
                 <a:ea typeface="Arial"/>
@@ -13015,7 +13171,7 @@
             <a:lvl7pPr>
               <a:defRPr sz="1950" b="0">
                 <a:solidFill>
-                  <a:srgbClr val="647168"/>
+                  <a:srgbClr val="595959"/>
                 </a:solidFill>
                 <a:latin typeface="Arial"/>
                 <a:ea typeface="Arial"/>
@@ -13025,7 +13181,7 @@
             <a:lvl8pPr>
               <a:defRPr sz="1950" b="0">
                 <a:solidFill>
-                  <a:srgbClr val="647168"/>
+                  <a:srgbClr val="595959"/>
                 </a:solidFill>
                 <a:latin typeface="Arial"/>
                 <a:ea typeface="Arial"/>
@@ -13035,7 +13191,7 @@
             <a:lvl9pPr>
               <a:defRPr sz="1950" b="0">
                 <a:solidFill>
-                  <a:srgbClr val="647168"/>
+                  <a:srgbClr val="595959"/>
                 </a:solidFill>
                 <a:latin typeface="Arial"/>
                 <a:ea typeface="Arial"/>
@@ -13047,7 +13203,7 @@
             <a:pPr>
               <a:defRPr sz="1950" b="0">
                 <a:solidFill>
-                  <a:srgbClr val="647168"/>
+                  <a:srgbClr val="595959"/>
                 </a:solidFill>
                 <a:latin typeface="Arial"/>
                 <a:ea typeface="Arial"/>
@@ -13057,7 +13213,7 @@
             <a:r>
               <a:rPr sz="1950" b="0">
                 <a:solidFill>
-                  <a:srgbClr val="647168"/>
+                  <a:srgbClr val="595959"/>
                 </a:solidFill>
                 <a:latin typeface="Arial"/>
                 <a:ea typeface="Arial"/>
@@ -13073,7 +13229,7 @@
           <p:cNvPr id="6" name="">
             <a:extLst xmlns:a="http://schemas.openxmlformats.org/drawingml/2006/main">
               <a:ext uri="{FF2B5EF4-FFF2-40B4-BE49-F238E27FC236}">
-                <a16:creationId xmlns:a16="http://schemas.microsoft.com/office/drawing/2014/main" id="{8AA07839-8113-47CE-BEF8-A5B4E985685D}"/>
+                <a16:creationId xmlns:a16="http://schemas.microsoft.com/office/drawing/2014/main" id="{EFB6E0B6-6D89-496A-B7A5-7CBA4023DAF5}"/>
               </a:ext>
             </a:extLst>
           </p:cNvPr>
@@ -13101,7 +13257,7 @@
             <a:defPPr>
               <a:defRPr sz="2475" b="1">
                 <a:solidFill>
-                  <a:srgbClr val="233D34"/>
+                  <a:srgbClr val="000000"/>
                 </a:solidFill>
                 <a:latin typeface="Arial"/>
                 <a:ea typeface="Arial"/>
@@ -13111,7 +13267,7 @@
             <a:lvl1pPr>
               <a:defRPr sz="2475" b="1">
                 <a:solidFill>
-                  <a:srgbClr val="233D34"/>
+                  <a:srgbClr val="000000"/>
                 </a:solidFill>
                 <a:latin typeface="Arial"/>
                 <a:ea typeface="Arial"/>
@@ -13121,7 +13277,7 @@
             <a:lvl2pPr>
               <a:defRPr sz="2475" b="1">
                 <a:solidFill>
-                  <a:srgbClr val="233D34"/>
+                  <a:srgbClr val="000000"/>
                 </a:solidFill>
                 <a:latin typeface="Arial"/>
                 <a:ea typeface="Arial"/>
@@ -13131,7 +13287,7 @@
             <a:lvl3pPr>
               <a:defRPr sz="2475" b="1">
                 <a:solidFill>
-                  <a:srgbClr val="233D34"/>
+                  <a:srgbClr val="000000"/>
                 </a:solidFill>
                 <a:latin typeface="Arial"/>
                 <a:ea typeface="Arial"/>
@@ -13141,7 +13297,7 @@
             <a:lvl4pPr>
               <a:defRPr sz="2475" b="1">
                 <a:solidFill>
-                  <a:srgbClr val="233D34"/>
+                  <a:srgbClr val="000000"/>
                 </a:solidFill>
                 <a:latin typeface="Arial"/>
                 <a:ea typeface="Arial"/>
@@ -13151,7 +13307,7 @@
             <a:lvl5pPr>
               <a:defRPr sz="2475" b="1">
                 <a:solidFill>
-                  <a:srgbClr val="233D34"/>
+                  <a:srgbClr val="000000"/>
                 </a:solidFill>
                 <a:latin typeface="Arial"/>
                 <a:ea typeface="Arial"/>
@@ -13161,7 +13317,7 @@
             <a:lvl6pPr>
               <a:defRPr sz="2475" b="1">
                 <a:solidFill>
-                  <a:srgbClr val="233D34"/>
+                  <a:srgbClr val="000000"/>
                 </a:solidFill>
                 <a:latin typeface="Arial"/>
                 <a:ea typeface="Arial"/>
@@ -13171,7 +13327,7 @@
             <a:lvl7pPr>
               <a:defRPr sz="2475" b="1">
                 <a:solidFill>
-                  <a:srgbClr val="233D34"/>
+                  <a:srgbClr val="000000"/>
                 </a:solidFill>
                 <a:latin typeface="Arial"/>
                 <a:ea typeface="Arial"/>
@@ -13181,7 +13337,7 @@
             <a:lvl8pPr>
               <a:defRPr sz="2475" b="1">
                 <a:solidFill>
-                  <a:srgbClr val="233D34"/>
+                  <a:srgbClr val="000000"/>
                 </a:solidFill>
                 <a:latin typeface="Arial"/>
                 <a:ea typeface="Arial"/>
@@ -13191,7 +13347,7 @@
             <a:lvl9pPr>
               <a:defRPr sz="2475" b="1">
                 <a:solidFill>
-                  <a:srgbClr val="233D34"/>
+                  <a:srgbClr val="000000"/>
                 </a:solidFill>
                 <a:latin typeface="Arial"/>
                 <a:ea typeface="Arial"/>
@@ -13203,7 +13359,7 @@
             <a:pPr>
               <a:defRPr sz="2475" b="1">
                 <a:solidFill>
-                  <a:srgbClr val="233D34"/>
+                  <a:srgbClr val="000000"/>
                 </a:solidFill>
                 <a:latin typeface="Arial"/>
                 <a:ea typeface="Arial"/>
@@ -13213,7 +13369,7 @@
             <a:r>
               <a:rPr sz="2475" b="1">
                 <a:solidFill>
-                  <a:srgbClr val="233D34"/>
+                  <a:srgbClr val="000000"/>
                 </a:solidFill>
                 <a:latin typeface="Arial"/>
                 <a:ea typeface="Arial"/>
@@ -13229,7 +13385,7 @@
           <p:cNvPr id="7" name="">
             <a:extLst xmlns:a="http://schemas.openxmlformats.org/drawingml/2006/main">
               <a:ext uri="{FF2B5EF4-FFF2-40B4-BE49-F238E27FC236}">
-                <a16:creationId xmlns:a16="http://schemas.microsoft.com/office/drawing/2014/main" id="{194EE63D-D9E0-40F8-97F0-41430E5B34A2}"/>
+                <a16:creationId xmlns:a16="http://schemas.microsoft.com/office/drawing/2014/main" id="{22EBA510-86A8-4598-8C2C-22B38B14233F}"/>
               </a:ext>
             </a:extLst>
           </p:cNvPr>
@@ -13257,7 +13413,7 @@
             <a:defPPr>
               <a:defRPr sz="2025" b="0">
                 <a:solidFill>
-                  <a:srgbClr val="233D34"/>
+                  <a:srgbClr val="000000"/>
                 </a:solidFill>
                 <a:latin typeface="Arial"/>
                 <a:ea typeface="Arial"/>
@@ -13267,7 +13423,7 @@
             <a:lvl1pPr>
               <a:defRPr sz="2025" b="0">
                 <a:solidFill>
-                  <a:srgbClr val="233D34"/>
+                  <a:srgbClr val="000000"/>
                 </a:solidFill>
                 <a:latin typeface="Arial"/>
                 <a:ea typeface="Arial"/>
@@ -13277,7 +13433,7 @@
             <a:lvl2pPr>
               <a:defRPr sz="2025" b="0">
                 <a:solidFill>
-                  <a:srgbClr val="233D34"/>
+                  <a:srgbClr val="000000"/>
                 </a:solidFill>
                 <a:latin typeface="Arial"/>
                 <a:ea typeface="Arial"/>
@@ -13287,7 +13443,7 @@
             <a:lvl3pPr>
               <a:defRPr sz="2025" b="0">
                 <a:solidFill>
-                  <a:srgbClr val="233D34"/>
+                  <a:srgbClr val="000000"/>
                 </a:solidFill>
                 <a:latin typeface="Arial"/>
                 <a:ea typeface="Arial"/>
@@ -13297,7 +13453,7 @@
             <a:lvl4pPr>
               <a:defRPr sz="2025" b="0">
                 <a:solidFill>
-                  <a:srgbClr val="233D34"/>
+                  <a:srgbClr val="000000"/>
                 </a:solidFill>
                 <a:latin typeface="Arial"/>
                 <a:ea typeface="Arial"/>
@@ -13307,7 +13463,7 @@
             <a:lvl5pPr>
               <a:defRPr sz="2025" b="0">
                 <a:solidFill>
-                  <a:srgbClr val="233D34"/>
+                  <a:srgbClr val="000000"/>
                 </a:solidFill>
                 <a:latin typeface="Arial"/>
                 <a:ea typeface="Arial"/>
@@ -13317,7 +13473,7 @@
             <a:lvl6pPr>
               <a:defRPr sz="2025" b="0">
                 <a:solidFill>
-                  <a:srgbClr val="233D34"/>
+                  <a:srgbClr val="000000"/>
                 </a:solidFill>
                 <a:latin typeface="Arial"/>
                 <a:ea typeface="Arial"/>
@@ -13327,7 +13483,7 @@
             <a:lvl7pPr>
               <a:defRPr sz="2025" b="0">
                 <a:solidFill>
-                  <a:srgbClr val="233D34"/>
+                  <a:srgbClr val="000000"/>
                 </a:solidFill>
                 <a:latin typeface="Arial"/>
                 <a:ea typeface="Arial"/>
@@ -13337,7 +13493,7 @@
             <a:lvl8pPr>
               <a:defRPr sz="2025" b="0">
                 <a:solidFill>
-                  <a:srgbClr val="233D34"/>
+                  <a:srgbClr val="000000"/>
                 </a:solidFill>
                 <a:latin typeface="Arial"/>
                 <a:ea typeface="Arial"/>
@@ -13347,7 +13503,7 @@
             <a:lvl9pPr>
               <a:defRPr sz="2025" b="0">
                 <a:solidFill>
-                  <a:srgbClr val="233D34"/>
+                  <a:srgbClr val="000000"/>
                 </a:solidFill>
                 <a:latin typeface="Arial"/>
                 <a:ea typeface="Arial"/>
@@ -13359,7 +13515,7 @@
             <a:pPr>
               <a:defRPr sz="2025" b="0">
                 <a:solidFill>
-                  <a:srgbClr val="233D34"/>
+                  <a:srgbClr val="000000"/>
                 </a:solidFill>
                 <a:latin typeface="Arial"/>
                 <a:ea typeface="Arial"/>
@@ -13369,7 +13525,7 @@
             <a:r>
               <a:rPr sz="2025" b="0">
                 <a:solidFill>
-                  <a:srgbClr val="233D34"/>
+                  <a:srgbClr val="000000"/>
                 </a:solidFill>
                 <a:latin typeface="Arial"/>
                 <a:ea typeface="Arial"/>
@@ -13382,7 +13538,7 @@
             <a:pPr>
               <a:defRPr sz="2025" b="0">
                 <a:solidFill>
-                  <a:srgbClr val="233D34"/>
+                  <a:srgbClr val="000000"/>
                 </a:solidFill>
                 <a:latin typeface="Arial"/>
                 <a:ea typeface="Arial"/>
@@ -13392,7 +13548,7 @@
             <a:r>
               <a:rPr sz="2025" b="0">
                 <a:solidFill>
-                  <a:srgbClr val="233D34"/>
+                  <a:srgbClr val="000000"/>
                 </a:solidFill>
                 <a:latin typeface="Arial"/>
                 <a:ea typeface="Arial"/>
@@ -13408,7 +13564,7 @@
           <p:cNvPr id="8" name="">
             <a:extLst xmlns:a="http://schemas.openxmlformats.org/drawingml/2006/main">
               <a:ext uri="{FF2B5EF4-FFF2-40B4-BE49-F238E27FC236}">
-                <a16:creationId xmlns:a16="http://schemas.microsoft.com/office/drawing/2014/main" id="{CE33D851-A86A-4808-944B-ECBA931D4B5F}"/>
+                <a16:creationId xmlns:a16="http://schemas.microsoft.com/office/drawing/2014/main" id="{AC370AC8-A081-466B-B396-F3AF9E2443E6}"/>
               </a:ext>
             </a:extLst>
           </p:cNvPr>
@@ -13436,7 +13592,7 @@
             <a:defPPr>
               <a:defRPr sz="2475" b="0">
                 <a:solidFill>
-                  <a:srgbClr val="233D34"/>
+                  <a:srgbClr val="000000"/>
                 </a:solidFill>
                 <a:latin typeface="Arial"/>
                 <a:ea typeface="Arial"/>
@@ -13446,7 +13602,7 @@
             <a:lvl1pPr>
               <a:defRPr sz="2475" b="0">
                 <a:solidFill>
-                  <a:srgbClr val="233D34"/>
+                  <a:srgbClr val="000000"/>
                 </a:solidFill>
                 <a:latin typeface="Arial"/>
                 <a:ea typeface="Arial"/>
@@ -13456,7 +13612,7 @@
             <a:lvl2pPr>
               <a:defRPr sz="2475" b="0">
                 <a:solidFill>
-                  <a:srgbClr val="233D34"/>
+                  <a:srgbClr val="000000"/>
                 </a:solidFill>
                 <a:latin typeface="Arial"/>
                 <a:ea typeface="Arial"/>
@@ -13466,7 +13622,7 @@
             <a:lvl3pPr>
               <a:defRPr sz="2475" b="0">
                 <a:solidFill>
-                  <a:srgbClr val="233D34"/>
+                  <a:srgbClr val="000000"/>
                 </a:solidFill>
                 <a:latin typeface="Arial"/>
                 <a:ea typeface="Arial"/>
@@ -13476,7 +13632,7 @@
             <a:lvl4pPr>
               <a:defRPr sz="2475" b="0">
                 <a:solidFill>
-                  <a:srgbClr val="233D34"/>
+                  <a:srgbClr val="000000"/>
                 </a:solidFill>
                 <a:latin typeface="Arial"/>
                 <a:ea typeface="Arial"/>
@@ -13486,7 +13642,7 @@
             <a:lvl5pPr>
               <a:defRPr sz="2475" b="0">
                 <a:solidFill>
-                  <a:srgbClr val="233D34"/>
+                  <a:srgbClr val="000000"/>
                 </a:solidFill>
                 <a:latin typeface="Arial"/>
                 <a:ea typeface="Arial"/>
@@ -13496,7 +13652,7 @@
             <a:lvl6pPr>
               <a:defRPr sz="2475" b="0">
                 <a:solidFill>
-                  <a:srgbClr val="233D34"/>
+                  <a:srgbClr val="000000"/>
                 </a:solidFill>
                 <a:latin typeface="Arial"/>
                 <a:ea typeface="Arial"/>
@@ -13506,7 +13662,7 @@
             <a:lvl7pPr>
               <a:defRPr sz="2475" b="0">
                 <a:solidFill>
-                  <a:srgbClr val="233D34"/>
+                  <a:srgbClr val="000000"/>
                 </a:solidFill>
                 <a:latin typeface="Arial"/>
                 <a:ea typeface="Arial"/>
@@ -13516,7 +13672,7 @@
             <a:lvl8pPr>
               <a:defRPr sz="2475" b="0">
                 <a:solidFill>
-                  <a:srgbClr val="233D34"/>
+                  <a:srgbClr val="000000"/>
                 </a:solidFill>
                 <a:latin typeface="Arial"/>
                 <a:ea typeface="Arial"/>
@@ -13526,7 +13682,7 @@
             <a:lvl9pPr>
               <a:defRPr sz="2475" b="0">
                 <a:solidFill>
-                  <a:srgbClr val="233D34"/>
+                  <a:srgbClr val="000000"/>
                 </a:solidFill>
                 <a:latin typeface="Arial"/>
                 <a:ea typeface="Arial"/>
@@ -13538,7 +13694,7 @@
             <a:pPr>
               <a:defRPr sz="2475" b="0">
                 <a:solidFill>
-                  <a:srgbClr val="233D34"/>
+                  <a:srgbClr val="000000"/>
                 </a:solidFill>
                 <a:latin typeface="Arial"/>
                 <a:ea typeface="Arial"/>
@@ -13548,7 +13704,7 @@
             <a:r>
               <a:rPr sz="2475" b="0">
                 <a:solidFill>
-                  <a:srgbClr val="233D34"/>
+                  <a:srgbClr val="000000"/>
                 </a:solidFill>
                 <a:latin typeface="Arial"/>
                 <a:ea typeface="Arial"/>
@@ -13564,7 +13720,7 @@
           <p:cNvPr id="9" name="">
             <a:extLst xmlns:a="http://schemas.openxmlformats.org/drawingml/2006/main">
               <a:ext uri="{FF2B5EF4-FFF2-40B4-BE49-F238E27FC236}">
-                <a16:creationId xmlns:a16="http://schemas.microsoft.com/office/drawing/2014/main" id="{B5CAAE3D-CC17-415F-97D1-2591C80BBA11}"/>
+                <a16:creationId xmlns:a16="http://schemas.microsoft.com/office/drawing/2014/main" id="{6AF788CA-8D85-4CB3-A32C-9614C999F0DF}"/>
               </a:ext>
             </a:extLst>
           </p:cNvPr>
@@ -13592,7 +13748,7 @@
             <a:defPPr>
               <a:defRPr sz="2025" b="0">
                 <a:solidFill>
-                  <a:srgbClr val="233D34"/>
+                  <a:srgbClr val="000000"/>
                 </a:solidFill>
                 <a:latin typeface="Arial"/>
                 <a:ea typeface="Arial"/>
@@ -13602,7 +13758,7 @@
             <a:lvl1pPr>
               <a:defRPr sz="2025" b="0">
                 <a:solidFill>
-                  <a:srgbClr val="233D34"/>
+                  <a:srgbClr val="000000"/>
                 </a:solidFill>
                 <a:latin typeface="Arial"/>
                 <a:ea typeface="Arial"/>
@@ -13612,7 +13768,7 @@
             <a:lvl2pPr>
               <a:defRPr sz="2025" b="0">
                 <a:solidFill>
-                  <a:srgbClr val="233D34"/>
+                  <a:srgbClr val="000000"/>
                 </a:solidFill>
                 <a:latin typeface="Arial"/>
                 <a:ea typeface="Arial"/>
@@ -13622,7 +13778,7 @@
             <a:lvl3pPr>
               <a:defRPr sz="2025" b="0">
                 <a:solidFill>
-                  <a:srgbClr val="233D34"/>
+                  <a:srgbClr val="000000"/>
                 </a:solidFill>
                 <a:latin typeface="Arial"/>
                 <a:ea typeface="Arial"/>
@@ -13632,7 +13788,7 @@
             <a:lvl4pPr>
               <a:defRPr sz="2025" b="0">
                 <a:solidFill>
-                  <a:srgbClr val="233D34"/>
+                  <a:srgbClr val="000000"/>
                 </a:solidFill>
                 <a:latin typeface="Arial"/>
                 <a:ea typeface="Arial"/>
@@ -13642,7 +13798,7 @@
             <a:lvl5pPr>
               <a:defRPr sz="2025" b="0">
                 <a:solidFill>
-                  <a:srgbClr val="233D34"/>
+                  <a:srgbClr val="000000"/>
                 </a:solidFill>
                 <a:latin typeface="Arial"/>
                 <a:ea typeface="Arial"/>
@@ -13652,7 +13808,7 @@
             <a:lvl6pPr>
               <a:defRPr sz="2025" b="0">
                 <a:solidFill>
-                  <a:srgbClr val="233D34"/>
+                  <a:srgbClr val="000000"/>
                 </a:solidFill>
                 <a:latin typeface="Arial"/>
                 <a:ea typeface="Arial"/>
@@ -13662,7 +13818,7 @@
             <a:lvl7pPr>
               <a:defRPr sz="2025" b="0">
                 <a:solidFill>
-                  <a:srgbClr val="233D34"/>
+                  <a:srgbClr val="000000"/>
                 </a:solidFill>
                 <a:latin typeface="Arial"/>
                 <a:ea typeface="Arial"/>
@@ -13672,7 +13828,7 @@
             <a:lvl8pPr>
               <a:defRPr sz="2025" b="0">
                 <a:solidFill>
-                  <a:srgbClr val="233D34"/>
+                  <a:srgbClr val="000000"/>
                 </a:solidFill>
                 <a:latin typeface="Arial"/>
                 <a:ea typeface="Arial"/>
@@ -13682,7 +13838,7 @@
             <a:lvl9pPr>
               <a:defRPr sz="2025" b="0">
                 <a:solidFill>
-                  <a:srgbClr val="233D34"/>
+                  <a:srgbClr val="000000"/>
                 </a:solidFill>
                 <a:latin typeface="Arial"/>
                 <a:ea typeface="Arial"/>
@@ -13694,7 +13850,7 @@
             <a:pPr>
               <a:defRPr sz="2025" b="0">
                 <a:solidFill>
-                  <a:srgbClr val="233D34"/>
+                  <a:srgbClr val="000000"/>
                 </a:solidFill>
                 <a:latin typeface="Arial"/>
                 <a:ea typeface="Arial"/>
@@ -13704,7 +13860,7 @@
             <a:r>
               <a:rPr sz="2025" b="0">
                 <a:solidFill>
-                  <a:srgbClr val="233D34"/>
+                  <a:srgbClr val="000000"/>
                 </a:solidFill>
                 <a:latin typeface="Arial"/>
                 <a:ea typeface="Arial"/>
@@ -13717,7 +13873,7 @@
             <a:pPr>
               <a:defRPr sz="2025" b="0">
                 <a:solidFill>
-                  <a:srgbClr val="233D34"/>
+                  <a:srgbClr val="000000"/>
                 </a:solidFill>
                 <a:latin typeface="Arial"/>
                 <a:ea typeface="Arial"/>
@@ -13727,7 +13883,7 @@
             <a:r>
               <a:rPr sz="2025" b="0">
                 <a:solidFill>
-                  <a:srgbClr val="233D34"/>
+                  <a:srgbClr val="000000"/>
                 </a:solidFill>
                 <a:latin typeface="Arial"/>
                 <a:ea typeface="Arial"/>
@@ -13743,7 +13899,7 @@
           <p:cNvPr id="10" name="">
             <a:extLst xmlns:a="http://schemas.openxmlformats.org/drawingml/2006/main">
               <a:ext uri="{FF2B5EF4-FFF2-40B4-BE49-F238E27FC236}">
-                <a16:creationId xmlns:a16="http://schemas.microsoft.com/office/drawing/2014/main" id="{A870467C-74E1-4E9F-A591-76F964821B9F}"/>
+                <a16:creationId xmlns:a16="http://schemas.microsoft.com/office/drawing/2014/main" id="{73C9A6B4-19BA-4B4F-8A53-68116133ED9A}"/>
               </a:ext>
             </a:extLst>
           </p:cNvPr>
@@ -13771,7 +13927,7 @@
             <a:defPPr>
               <a:defRPr sz="1350" b="0">
                 <a:solidFill>
-                  <a:srgbClr val="647168"/>
+                  <a:srgbClr val="595959"/>
                 </a:solidFill>
                 <a:latin typeface="Arial"/>
                 <a:ea typeface="Arial"/>
@@ -13781,7 +13937,7 @@
             <a:lvl1pPr>
               <a:defRPr sz="1350" b="0">
                 <a:solidFill>
-                  <a:srgbClr val="647168"/>
+                  <a:srgbClr val="595959"/>
                 </a:solidFill>
                 <a:latin typeface="Arial"/>
                 <a:ea typeface="Arial"/>
@@ -13791,7 +13947,7 @@
             <a:lvl2pPr>
               <a:defRPr sz="1350" b="0">
                 <a:solidFill>
-                  <a:srgbClr val="647168"/>
+                  <a:srgbClr val="595959"/>
                 </a:solidFill>
                 <a:latin typeface="Arial"/>
                 <a:ea typeface="Arial"/>
@@ -13801,7 +13957,7 @@
             <a:lvl3pPr>
               <a:defRPr sz="1350" b="0">
                 <a:solidFill>
-                  <a:srgbClr val="647168"/>
+                  <a:srgbClr val="595959"/>
                 </a:solidFill>
                 <a:latin typeface="Arial"/>
                 <a:ea typeface="Arial"/>
@@ -13811,7 +13967,7 @@
             <a:lvl4pPr>
               <a:defRPr sz="1350" b="0">
                 <a:solidFill>
-                  <a:srgbClr val="647168"/>
+                  <a:srgbClr val="595959"/>
                 </a:solidFill>
                 <a:latin typeface="Arial"/>
                 <a:ea typeface="Arial"/>
@@ -13821,7 +13977,7 @@
             <a:lvl5pPr>
               <a:defRPr sz="1350" b="0">
                 <a:solidFill>
-                  <a:srgbClr val="647168"/>
+                  <a:srgbClr val="595959"/>
                 </a:solidFill>
                 <a:latin typeface="Arial"/>
                 <a:ea typeface="Arial"/>
@@ -13831,7 +13987,7 @@
             <a:lvl6pPr>
               <a:defRPr sz="1350" b="0">
                 <a:solidFill>
-                  <a:srgbClr val="647168"/>
+                  <a:srgbClr val="595959"/>
                 </a:solidFill>
                 <a:latin typeface="Arial"/>
                 <a:ea typeface="Arial"/>
@@ -13841,7 +13997,7 @@
             <a:lvl7pPr>
               <a:defRPr sz="1350" b="0">
                 <a:solidFill>
-                  <a:srgbClr val="647168"/>
+                  <a:srgbClr val="595959"/>
                 </a:solidFill>
                 <a:latin typeface="Arial"/>
                 <a:ea typeface="Arial"/>
@@ -13851,7 +14007,7 @@
             <a:lvl8pPr>
               <a:defRPr sz="1350" b="0">
                 <a:solidFill>
-                  <a:srgbClr val="647168"/>
+                  <a:srgbClr val="595959"/>
                 </a:solidFill>
                 <a:latin typeface="Arial"/>
                 <a:ea typeface="Arial"/>
@@ -13861,7 +14017,7 @@
             <a:lvl9pPr>
               <a:defRPr sz="1350" b="0">
                 <a:solidFill>
-                  <a:srgbClr val="647168"/>
+                  <a:srgbClr val="595959"/>
                 </a:solidFill>
                 <a:latin typeface="Arial"/>
                 <a:ea typeface="Arial"/>
@@ -13873,7 +14029,7 @@
             <a:pPr>
               <a:defRPr sz="1350" b="0">
                 <a:solidFill>
-                  <a:srgbClr val="647168"/>
+                  <a:srgbClr val="595959"/>
                 </a:solidFill>
                 <a:latin typeface="Arial"/>
                 <a:ea typeface="Arial"/>
@@ -13883,7 +14039,7 @@
             <a:r>
               <a:rPr sz="1350" b="0">
                 <a:solidFill>
-                  <a:srgbClr val="647168"/>
+                  <a:srgbClr val="595959"/>
                 </a:solidFill>
                 <a:latin typeface="Arial"/>
                 <a:ea typeface="Arial"/>
@@ -13897,7 +14053,7 @@
     </p:spTree>
     <p:extLst>
       <p:ext uri="{BB962C8B-B14F-4D97-AF65-F5344CB8AC3E}">
-        <p14:creationId xmlns:p14="http://schemas.microsoft.com/office/powerpoint/2010/main" val="1770667774"/>
+        <p14:creationId xmlns:p14="http://schemas.microsoft.com/office/powerpoint/2010/main" val="554922143"/>
       </p:ext>
     </p:extLst>
   </p:cSld>
@@ -13910,7 +14066,7 @@
     <p:bg>
       <p:bgPr>
         <a:solidFill xmlns:a="http://schemas.openxmlformats.org/drawingml/2006/main">
-          <a:srgbClr val="F6F4EC"/>
+          <a:srgbClr val="FFFFFF"/>
         </a:solidFill>
       </p:bgPr>
     </p:bg>
@@ -13928,7 +14084,7 @@
           <p:cNvPr id="12" name="">
             <a:extLst xmlns:a="http://schemas.openxmlformats.org/drawingml/2006/main">
               <a:ext uri="{FF2B5EF4-FFF2-40B4-BE49-F238E27FC236}">
-                <a16:creationId xmlns:a16="http://schemas.microsoft.com/office/drawing/2014/main" id="{AE63E6F6-5C87-45D3-988B-9F8137C9C3B4}"/>
+                <a16:creationId xmlns:a16="http://schemas.microsoft.com/office/drawing/2014/main" id="{8FA84AD5-C911-4C4A-96EF-19B6F965C535}"/>
               </a:ext>
             </a:extLst>
           </p:cNvPr>
@@ -13956,7 +14112,7 @@
             <a:defPPr>
               <a:defRPr sz="3600" b="1">
                 <a:solidFill>
-                  <a:srgbClr val="233D34"/>
+                  <a:srgbClr val="CC0000"/>
                 </a:solidFill>
                 <a:latin typeface="Arial"/>
                 <a:ea typeface="Arial"/>
@@ -13966,7 +14122,7 @@
             <a:lvl1pPr>
               <a:defRPr sz="3600" b="1">
                 <a:solidFill>
-                  <a:srgbClr val="233D34"/>
+                  <a:srgbClr val="CC0000"/>
                 </a:solidFill>
                 <a:latin typeface="Arial"/>
                 <a:ea typeface="Arial"/>
@@ -13976,7 +14132,7 @@
             <a:lvl2pPr>
               <a:defRPr sz="3600" b="1">
                 <a:solidFill>
-                  <a:srgbClr val="233D34"/>
+                  <a:srgbClr val="CC0000"/>
                 </a:solidFill>
                 <a:latin typeface="Arial"/>
                 <a:ea typeface="Arial"/>
@@ -13986,7 +14142,7 @@
             <a:lvl3pPr>
               <a:defRPr sz="3600" b="1">
                 <a:solidFill>
-                  <a:srgbClr val="233D34"/>
+                  <a:srgbClr val="CC0000"/>
                 </a:solidFill>
                 <a:latin typeface="Arial"/>
                 <a:ea typeface="Arial"/>
@@ -13996,7 +14152,7 @@
             <a:lvl4pPr>
               <a:defRPr sz="3600" b="1">
                 <a:solidFill>
-                  <a:srgbClr val="233D34"/>
+                  <a:srgbClr val="CC0000"/>
                 </a:solidFill>
                 <a:latin typeface="Arial"/>
                 <a:ea typeface="Arial"/>
@@ -14006,7 +14162,7 @@
             <a:lvl5pPr>
               <a:defRPr sz="3600" b="1">
                 <a:solidFill>
-                  <a:srgbClr val="233D34"/>
+                  <a:srgbClr val="CC0000"/>
                 </a:solidFill>
                 <a:latin typeface="Arial"/>
                 <a:ea typeface="Arial"/>
@@ -14016,7 +14172,7 @@
             <a:lvl6pPr>
               <a:defRPr sz="3600" b="1">
                 <a:solidFill>
-                  <a:srgbClr val="233D34"/>
+                  <a:srgbClr val="CC0000"/>
                 </a:solidFill>
                 <a:latin typeface="Arial"/>
                 <a:ea typeface="Arial"/>
@@ -14026,7 +14182,7 @@
             <a:lvl7pPr>
               <a:defRPr sz="3600" b="1">
                 <a:solidFill>
-                  <a:srgbClr val="233D34"/>
+                  <a:srgbClr val="CC0000"/>
                 </a:solidFill>
                 <a:latin typeface="Arial"/>
                 <a:ea typeface="Arial"/>
@@ -14036,7 +14192,7 @@
             <a:lvl8pPr>
               <a:defRPr sz="3600" b="1">
                 <a:solidFill>
-                  <a:srgbClr val="233D34"/>
+                  <a:srgbClr val="CC0000"/>
                 </a:solidFill>
                 <a:latin typeface="Arial"/>
                 <a:ea typeface="Arial"/>
@@ -14046,7 +14202,7 @@
             <a:lvl9pPr>
               <a:defRPr sz="3600" b="1">
                 <a:solidFill>
-                  <a:srgbClr val="233D34"/>
+                  <a:srgbClr val="CC0000"/>
                 </a:solidFill>
                 <a:latin typeface="Arial"/>
                 <a:ea typeface="Arial"/>
@@ -14058,7 +14214,7 @@
             <a:pPr>
               <a:defRPr sz="3600" b="1">
                 <a:solidFill>
-                  <a:srgbClr val="233D34"/>
+                  <a:srgbClr val="CC0000"/>
                 </a:solidFill>
                 <a:latin typeface="Arial"/>
                 <a:ea typeface="Arial"/>
@@ -14068,7 +14224,7 @@
             <a:r>
               <a:rPr sz="3600" b="1">
                 <a:solidFill>
-                  <a:srgbClr val="233D34"/>
+                  <a:srgbClr val="CC0000"/>
                 </a:solidFill>
                 <a:latin typeface="Arial"/>
                 <a:ea typeface="Arial"/>
@@ -14084,7 +14240,7 @@
           <p:cNvPr id="2" name="">
             <a:extLst xmlns:a="http://schemas.openxmlformats.org/drawingml/2006/main">
               <a:ext uri="{FF2B5EF4-FFF2-40B4-BE49-F238E27FC236}">
-                <a16:creationId xmlns:a16="http://schemas.microsoft.com/office/drawing/2014/main" id="{8A71658A-45CE-49C6-98EE-FA9D01677C73}"/>
+                <a16:creationId xmlns:a16="http://schemas.microsoft.com/office/drawing/2014/main" id="{0A57C113-879A-4324-99B9-27A7C19B0FC1}"/>
               </a:ext>
             </a:extLst>
           </p:cNvPr>
@@ -14112,7 +14268,7 @@
             <a:defPPr>
               <a:defRPr sz="1425" b="0">
                 <a:solidFill>
-                  <a:srgbClr val="647168"/>
+                  <a:srgbClr val="595959"/>
                 </a:solidFill>
                 <a:latin typeface="Arial"/>
                 <a:ea typeface="Arial"/>
@@ -14122,7 +14278,7 @@
             <a:lvl1pPr>
               <a:defRPr sz="1425" b="0">
                 <a:solidFill>
-                  <a:srgbClr val="647168"/>
+                  <a:srgbClr val="595959"/>
                 </a:solidFill>
                 <a:latin typeface="Arial"/>
                 <a:ea typeface="Arial"/>
@@ -14132,7 +14288,7 @@
             <a:lvl2pPr>
               <a:defRPr sz="1425" b="0">
                 <a:solidFill>
-                  <a:srgbClr val="647168"/>
+                  <a:srgbClr val="595959"/>
                 </a:solidFill>
                 <a:latin typeface="Arial"/>
                 <a:ea typeface="Arial"/>
@@ -14142,7 +14298,7 @@
             <a:lvl3pPr>
               <a:defRPr sz="1425" b="0">
                 <a:solidFill>
-                  <a:srgbClr val="647168"/>
+                  <a:srgbClr val="595959"/>
                 </a:solidFill>
                 <a:latin typeface="Arial"/>
                 <a:ea typeface="Arial"/>
@@ -14152,7 +14308,7 @@
             <a:lvl4pPr>
               <a:defRPr sz="1425" b="0">
                 <a:solidFill>
-                  <a:srgbClr val="647168"/>
+                  <a:srgbClr val="595959"/>
                 </a:solidFill>
                 <a:latin typeface="Arial"/>
                 <a:ea typeface="Arial"/>
@@ -14162,7 +14318,7 @@
             <a:lvl5pPr>
               <a:defRPr sz="1425" b="0">
                 <a:solidFill>
-                  <a:srgbClr val="647168"/>
+                  <a:srgbClr val="595959"/>
                 </a:solidFill>
                 <a:latin typeface="Arial"/>
                 <a:ea typeface="Arial"/>
@@ -14172,7 +14328,7 @@
             <a:lvl6pPr>
               <a:defRPr sz="1425" b="0">
                 <a:solidFill>
-                  <a:srgbClr val="647168"/>
+                  <a:srgbClr val="595959"/>
                 </a:solidFill>
                 <a:latin typeface="Arial"/>
                 <a:ea typeface="Arial"/>
@@ -14182,7 +14338,7 @@
             <a:lvl7pPr>
               <a:defRPr sz="1425" b="0">
                 <a:solidFill>
-                  <a:srgbClr val="647168"/>
+                  <a:srgbClr val="595959"/>
                 </a:solidFill>
                 <a:latin typeface="Arial"/>
                 <a:ea typeface="Arial"/>
@@ -14192,7 +14348,7 @@
             <a:lvl8pPr>
               <a:defRPr sz="1425" b="0">
                 <a:solidFill>
-                  <a:srgbClr val="647168"/>
+                  <a:srgbClr val="595959"/>
                 </a:solidFill>
                 <a:latin typeface="Arial"/>
                 <a:ea typeface="Arial"/>
@@ -14202,7 +14358,7 @@
             <a:lvl9pPr>
               <a:defRPr sz="1425" b="0">
                 <a:solidFill>
-                  <a:srgbClr val="647168"/>
+                  <a:srgbClr val="595959"/>
                 </a:solidFill>
                 <a:latin typeface="Arial"/>
                 <a:ea typeface="Arial"/>
@@ -14214,7 +14370,7 @@
             <a:pPr>
               <a:defRPr sz="1425" b="0">
                 <a:solidFill>
-                  <a:srgbClr val="647168"/>
+                  <a:srgbClr val="595959"/>
                 </a:solidFill>
                 <a:latin typeface="Arial"/>
                 <a:ea typeface="Arial"/>
@@ -14224,7 +14380,7 @@
             <a:r>
               <a:rPr sz="1425" b="0">
                 <a:solidFill>
-                  <a:srgbClr val="647168"/>
+                  <a:srgbClr val="595959"/>
                 </a:solidFill>
                 <a:latin typeface="Arial"/>
                 <a:ea typeface="Arial"/>
@@ -14240,7 +14396,7 @@
           <p:cNvPr id="3" name="">
             <a:extLst xmlns:a="http://schemas.openxmlformats.org/drawingml/2006/main">
               <a:ext uri="{FF2B5EF4-FFF2-40B4-BE49-F238E27FC236}">
-                <a16:creationId xmlns:a16="http://schemas.microsoft.com/office/drawing/2014/main" id="{20D82755-4FF1-41FC-B4E2-67258258EDFD}"/>
+                <a16:creationId xmlns:a16="http://schemas.microsoft.com/office/drawing/2014/main" id="{F2A8192E-63A6-4E59-A6C9-481261D0AC55}"/>
               </a:ext>
             </a:extLst>
           </p:cNvPr>
@@ -14268,7 +14424,7 @@
             <a:defPPr>
               <a:defRPr sz="3225" b="1">
                 <a:solidFill>
-                  <a:srgbClr val="B9362D"/>
+                  <a:srgbClr val="CC0000"/>
                 </a:solidFill>
                 <a:latin typeface="Arial"/>
                 <a:ea typeface="Arial"/>
@@ -14278,7 +14434,7 @@
             <a:lvl1pPr>
               <a:defRPr sz="3225" b="1">
                 <a:solidFill>
-                  <a:srgbClr val="B9362D"/>
+                  <a:srgbClr val="CC0000"/>
                 </a:solidFill>
                 <a:latin typeface="Arial"/>
                 <a:ea typeface="Arial"/>
@@ -14288,7 +14444,7 @@
             <a:lvl2pPr>
               <a:defRPr sz="3225" b="1">
                 <a:solidFill>
-                  <a:srgbClr val="B9362D"/>
+                  <a:srgbClr val="CC0000"/>
                 </a:solidFill>
                 <a:latin typeface="Arial"/>
                 <a:ea typeface="Arial"/>
@@ -14298,7 +14454,7 @@
             <a:lvl3pPr>
               <a:defRPr sz="3225" b="1">
                 <a:solidFill>
-                  <a:srgbClr val="B9362D"/>
+                  <a:srgbClr val="CC0000"/>
                 </a:solidFill>
                 <a:latin typeface="Arial"/>
                 <a:ea typeface="Arial"/>
@@ -14308,7 +14464,7 @@
             <a:lvl4pPr>
               <a:defRPr sz="3225" b="1">
                 <a:solidFill>
-                  <a:srgbClr val="B9362D"/>
+                  <a:srgbClr val="CC0000"/>
                 </a:solidFill>
                 <a:latin typeface="Arial"/>
                 <a:ea typeface="Arial"/>
@@ -14318,7 +14474,7 @@
             <a:lvl5pPr>
               <a:defRPr sz="3225" b="1">
                 <a:solidFill>
-                  <a:srgbClr val="B9362D"/>
+                  <a:srgbClr val="CC0000"/>
                 </a:solidFill>
                 <a:latin typeface="Arial"/>
                 <a:ea typeface="Arial"/>
@@ -14328,7 +14484,7 @@
             <a:lvl6pPr>
               <a:defRPr sz="3225" b="1">
                 <a:solidFill>
-                  <a:srgbClr val="B9362D"/>
+                  <a:srgbClr val="CC0000"/>
                 </a:solidFill>
                 <a:latin typeface="Arial"/>
                 <a:ea typeface="Arial"/>
@@ -14338,7 +14494,7 @@
             <a:lvl7pPr>
               <a:defRPr sz="3225" b="1">
                 <a:solidFill>
-                  <a:srgbClr val="B9362D"/>
+                  <a:srgbClr val="CC0000"/>
                 </a:solidFill>
                 <a:latin typeface="Arial"/>
                 <a:ea typeface="Arial"/>
@@ -14348,7 +14504,7 @@
             <a:lvl8pPr>
               <a:defRPr sz="3225" b="1">
                 <a:solidFill>
-                  <a:srgbClr val="B9362D"/>
+                  <a:srgbClr val="CC0000"/>
                 </a:solidFill>
                 <a:latin typeface="Arial"/>
                 <a:ea typeface="Arial"/>
@@ -14358,7 +14514,7 @@
             <a:lvl9pPr>
               <a:defRPr sz="3225" b="1">
                 <a:solidFill>
-                  <a:srgbClr val="B9362D"/>
+                  <a:srgbClr val="CC0000"/>
                 </a:solidFill>
                 <a:latin typeface="Arial"/>
                 <a:ea typeface="Arial"/>
@@ -14370,7 +14526,7 @@
             <a:pPr>
               <a:defRPr sz="3225" b="1">
                 <a:solidFill>
-                  <a:srgbClr val="B9362D"/>
+                  <a:srgbClr val="CC0000"/>
                 </a:solidFill>
                 <a:latin typeface="Arial"/>
                 <a:ea typeface="Arial"/>
@@ -14380,7 +14536,7 @@
             <a:r>
               <a:rPr sz="3225" b="1">
                 <a:solidFill>
-                  <a:srgbClr val="B9362D"/>
+                  <a:srgbClr val="CC0000"/>
                 </a:solidFill>
                 <a:latin typeface="Arial"/>
                 <a:ea typeface="Arial"/>
@@ -14396,7 +14552,7 @@
           <p:cNvPr id="4" name="">
             <a:extLst xmlns:a="http://schemas.openxmlformats.org/drawingml/2006/main">
               <a:ext uri="{FF2B5EF4-FFF2-40B4-BE49-F238E27FC236}">
-                <a16:creationId xmlns:a16="http://schemas.microsoft.com/office/drawing/2014/main" id="{60A42166-5056-4FE8-B926-2F7DE97E1801}"/>
+                <a16:creationId xmlns:a16="http://schemas.microsoft.com/office/drawing/2014/main" id="{BA085F66-96DE-45D3-98FF-4A33345C9078}"/>
               </a:ext>
             </a:extLst>
           </p:cNvPr>
@@ -14424,7 +14580,7 @@
             <a:defPPr>
               <a:defRPr sz="2475" b="1">
                 <a:solidFill>
-                  <a:srgbClr val="233D34"/>
+                  <a:srgbClr val="000000"/>
                 </a:solidFill>
                 <a:latin typeface="Arial"/>
                 <a:ea typeface="Arial"/>
@@ -14434,7 +14590,7 @@
             <a:lvl1pPr>
               <a:defRPr sz="2475" b="1">
                 <a:solidFill>
-                  <a:srgbClr val="233D34"/>
+                  <a:srgbClr val="000000"/>
                 </a:solidFill>
                 <a:latin typeface="Arial"/>
                 <a:ea typeface="Arial"/>
@@ -14444,7 +14600,7 @@
             <a:lvl2pPr>
               <a:defRPr sz="2475" b="1">
                 <a:solidFill>
-                  <a:srgbClr val="233D34"/>
+                  <a:srgbClr val="000000"/>
                 </a:solidFill>
                 <a:latin typeface="Arial"/>
                 <a:ea typeface="Arial"/>
@@ -14454,7 +14610,7 @@
             <a:lvl3pPr>
               <a:defRPr sz="2475" b="1">
                 <a:solidFill>
-                  <a:srgbClr val="233D34"/>
+                  <a:srgbClr val="000000"/>
                 </a:solidFill>
                 <a:latin typeface="Arial"/>
                 <a:ea typeface="Arial"/>
@@ -14464,7 +14620,7 @@
             <a:lvl4pPr>
               <a:defRPr sz="2475" b="1">
                 <a:solidFill>
-                  <a:srgbClr val="233D34"/>
+                  <a:srgbClr val="000000"/>
                 </a:solidFill>
                 <a:latin typeface="Arial"/>
                 <a:ea typeface="Arial"/>
@@ -14474,7 +14630,7 @@
             <a:lvl5pPr>
               <a:defRPr sz="2475" b="1">
                 <a:solidFill>
-                  <a:srgbClr val="233D34"/>
+                  <a:srgbClr val="000000"/>
                 </a:solidFill>
                 <a:latin typeface="Arial"/>
                 <a:ea typeface="Arial"/>
@@ -14484,7 +14640,7 @@
             <a:lvl6pPr>
               <a:defRPr sz="2475" b="1">
                 <a:solidFill>
-                  <a:srgbClr val="233D34"/>
+                  <a:srgbClr val="000000"/>
                 </a:solidFill>
                 <a:latin typeface="Arial"/>
                 <a:ea typeface="Arial"/>
@@ -14494,7 +14650,7 @@
             <a:lvl7pPr>
               <a:defRPr sz="2475" b="1">
                 <a:solidFill>
-                  <a:srgbClr val="233D34"/>
+                  <a:srgbClr val="000000"/>
                 </a:solidFill>
                 <a:latin typeface="Arial"/>
                 <a:ea typeface="Arial"/>
@@ -14504,7 +14660,7 @@
             <a:lvl8pPr>
               <a:defRPr sz="2475" b="1">
                 <a:solidFill>
-                  <a:srgbClr val="233D34"/>
+                  <a:srgbClr val="000000"/>
                 </a:solidFill>
                 <a:latin typeface="Arial"/>
                 <a:ea typeface="Arial"/>
@@ -14514,7 +14670,7 @@
             <a:lvl9pPr>
               <a:defRPr sz="2475" b="1">
                 <a:solidFill>
-                  <a:srgbClr val="233D34"/>
+                  <a:srgbClr val="000000"/>
                 </a:solidFill>
                 <a:latin typeface="Arial"/>
                 <a:ea typeface="Arial"/>
@@ -14526,7 +14682,7 @@
             <a:pPr>
               <a:defRPr sz="2475" b="1">
                 <a:solidFill>
-                  <a:srgbClr val="233D34"/>
+                  <a:srgbClr val="000000"/>
                 </a:solidFill>
                 <a:latin typeface="Arial"/>
                 <a:ea typeface="Arial"/>
@@ -14536,7 +14692,7 @@
             <a:r>
               <a:rPr sz="2475" b="1">
                 <a:solidFill>
-                  <a:srgbClr val="233D34"/>
+                  <a:srgbClr val="000000"/>
                 </a:solidFill>
                 <a:latin typeface="Arial"/>
                 <a:ea typeface="Arial"/>
@@ -14552,7 +14708,7 @@
           <p:cNvPr id="5" name="">
             <a:extLst xmlns:a="http://schemas.openxmlformats.org/drawingml/2006/main">
               <a:ext uri="{FF2B5EF4-FFF2-40B4-BE49-F238E27FC236}">
-                <a16:creationId xmlns:a16="http://schemas.microsoft.com/office/drawing/2014/main" id="{8760DB46-B02C-43FC-B22F-CB46DAB34575}"/>
+                <a16:creationId xmlns:a16="http://schemas.microsoft.com/office/drawing/2014/main" id="{AE0284A1-10D2-4357-B3CA-B16F148BDF48}"/>
               </a:ext>
             </a:extLst>
           </p:cNvPr>
@@ -14580,7 +14736,7 @@
             <a:defPPr>
               <a:defRPr sz="1950" b="0">
                 <a:solidFill>
-                  <a:srgbClr val="647168"/>
+                  <a:srgbClr val="595959"/>
                 </a:solidFill>
                 <a:latin typeface="Arial"/>
                 <a:ea typeface="Arial"/>
@@ -14590,7 +14746,7 @@
             <a:lvl1pPr>
               <a:defRPr sz="1950" b="0">
                 <a:solidFill>
-                  <a:srgbClr val="647168"/>
+                  <a:srgbClr val="595959"/>
                 </a:solidFill>
                 <a:latin typeface="Arial"/>
                 <a:ea typeface="Arial"/>
@@ -14600,7 +14756,7 @@
             <a:lvl2pPr>
               <a:defRPr sz="1950" b="0">
                 <a:solidFill>
-                  <a:srgbClr val="647168"/>
+                  <a:srgbClr val="595959"/>
                 </a:solidFill>
                 <a:latin typeface="Arial"/>
                 <a:ea typeface="Arial"/>
@@ -14610,7 +14766,7 @@
             <a:lvl3pPr>
               <a:defRPr sz="1950" b="0">
                 <a:solidFill>
-                  <a:srgbClr val="647168"/>
+                  <a:srgbClr val="595959"/>
                 </a:solidFill>
                 <a:latin typeface="Arial"/>
                 <a:ea typeface="Arial"/>
@@ -14620,7 +14776,7 @@
             <a:lvl4pPr>
               <a:defRPr sz="1950" b="0">
                 <a:solidFill>
-                  <a:srgbClr val="647168"/>
+                  <a:srgbClr val="595959"/>
                 </a:solidFill>
                 <a:latin typeface="Arial"/>
                 <a:ea typeface="Arial"/>
@@ -14630,7 +14786,7 @@
             <a:lvl5pPr>
               <a:defRPr sz="1950" b="0">
                 <a:solidFill>
-                  <a:srgbClr val="647168"/>
+                  <a:srgbClr val="595959"/>
                 </a:solidFill>
                 <a:latin typeface="Arial"/>
                 <a:ea typeface="Arial"/>
@@ -14640,7 +14796,7 @@
             <a:lvl6pPr>
               <a:defRPr sz="1950" b="0">
                 <a:solidFill>
-                  <a:srgbClr val="647168"/>
+                  <a:srgbClr val="595959"/>
                 </a:solidFill>
                 <a:latin typeface="Arial"/>
                 <a:ea typeface="Arial"/>
@@ -14650,7 +14806,7 @@
             <a:lvl7pPr>
               <a:defRPr sz="1950" b="0">
                 <a:solidFill>
-                  <a:srgbClr val="647168"/>
+                  <a:srgbClr val="595959"/>
                 </a:solidFill>
                 <a:latin typeface="Arial"/>
                 <a:ea typeface="Arial"/>
@@ -14660,7 +14816,7 @@
             <a:lvl8pPr>
               <a:defRPr sz="1950" b="0">
                 <a:solidFill>
-                  <a:srgbClr val="647168"/>
+                  <a:srgbClr val="595959"/>
                 </a:solidFill>
                 <a:latin typeface="Arial"/>
                 <a:ea typeface="Arial"/>
@@ -14670,7 +14826,7 @@
             <a:lvl9pPr>
               <a:defRPr sz="1950" b="0">
                 <a:solidFill>
-                  <a:srgbClr val="647168"/>
+                  <a:srgbClr val="595959"/>
                 </a:solidFill>
                 <a:latin typeface="Arial"/>
                 <a:ea typeface="Arial"/>
@@ -14682,7 +14838,7 @@
             <a:pPr>
               <a:defRPr sz="1950" b="0">
                 <a:solidFill>
-                  <a:srgbClr val="647168"/>
+                  <a:srgbClr val="595959"/>
                 </a:solidFill>
                 <a:latin typeface="Arial"/>
                 <a:ea typeface="Arial"/>
@@ -14692,7 +14848,7 @@
             <a:r>
               <a:rPr sz="1950" b="0">
                 <a:solidFill>
-                  <a:srgbClr val="647168"/>
+                  <a:srgbClr val="595959"/>
                 </a:solidFill>
                 <a:latin typeface="Arial"/>
                 <a:ea typeface="Arial"/>
@@ -14708,7 +14864,7 @@
           <p:cNvPr id="6" name="">
             <a:extLst xmlns:a="http://schemas.openxmlformats.org/drawingml/2006/main">
               <a:ext uri="{FF2B5EF4-FFF2-40B4-BE49-F238E27FC236}">
-                <a16:creationId xmlns:a16="http://schemas.microsoft.com/office/drawing/2014/main" id="{DB40812C-051E-40C8-8E35-684A3986A1B2}"/>
+                <a16:creationId xmlns:a16="http://schemas.microsoft.com/office/drawing/2014/main" id="{69038F31-BD9E-4585-9DFA-76AB999B5B9B}"/>
               </a:ext>
             </a:extLst>
           </p:cNvPr>
@@ -14736,7 +14892,7 @@
             <a:defPPr>
               <a:defRPr sz="3225" b="1">
                 <a:solidFill>
-                  <a:srgbClr val="B9362D"/>
+                  <a:srgbClr val="CC0000"/>
                 </a:solidFill>
                 <a:latin typeface="Arial"/>
                 <a:ea typeface="Arial"/>
@@ -14746,7 +14902,7 @@
             <a:lvl1pPr>
               <a:defRPr sz="3225" b="1">
                 <a:solidFill>
-                  <a:srgbClr val="B9362D"/>
+                  <a:srgbClr val="CC0000"/>
                 </a:solidFill>
                 <a:latin typeface="Arial"/>
                 <a:ea typeface="Arial"/>
@@ -14756,7 +14912,7 @@
             <a:lvl2pPr>
               <a:defRPr sz="3225" b="1">
                 <a:solidFill>
-                  <a:srgbClr val="B9362D"/>
+                  <a:srgbClr val="CC0000"/>
                 </a:solidFill>
                 <a:latin typeface="Arial"/>
                 <a:ea typeface="Arial"/>
@@ -14766,7 +14922,7 @@
             <a:lvl3pPr>
               <a:defRPr sz="3225" b="1">
                 <a:solidFill>
-                  <a:srgbClr val="B9362D"/>
+                  <a:srgbClr val="CC0000"/>
                 </a:solidFill>
                 <a:latin typeface="Arial"/>
                 <a:ea typeface="Arial"/>
@@ -14776,7 +14932,7 @@
             <a:lvl4pPr>
               <a:defRPr sz="3225" b="1">
                 <a:solidFill>
-                  <a:srgbClr val="B9362D"/>
+                  <a:srgbClr val="CC0000"/>
                 </a:solidFill>
                 <a:latin typeface="Arial"/>
                 <a:ea typeface="Arial"/>
@@ -14786,7 +14942,7 @@
             <a:lvl5pPr>
               <a:defRPr sz="3225" b="1">
                 <a:solidFill>
-                  <a:srgbClr val="B9362D"/>
+                  <a:srgbClr val="CC0000"/>
                 </a:solidFill>
                 <a:latin typeface="Arial"/>
                 <a:ea typeface="Arial"/>
@@ -14796,7 +14952,7 @@
             <a:lvl6pPr>
               <a:defRPr sz="3225" b="1">
                 <a:solidFill>
-                  <a:srgbClr val="B9362D"/>
+                  <a:srgbClr val="CC0000"/>
                 </a:solidFill>
                 <a:latin typeface="Arial"/>
                 <a:ea typeface="Arial"/>
@@ -14806,7 +14962,7 @@
             <a:lvl7pPr>
               <a:defRPr sz="3225" b="1">
                 <a:solidFill>
-                  <a:srgbClr val="B9362D"/>
+                  <a:srgbClr val="CC0000"/>
                 </a:solidFill>
                 <a:latin typeface="Arial"/>
                 <a:ea typeface="Arial"/>
@@ -14816,7 +14972,7 @@
             <a:lvl8pPr>
               <a:defRPr sz="3225" b="1">
                 <a:solidFill>
-                  <a:srgbClr val="B9362D"/>
+                  <a:srgbClr val="CC0000"/>
                 </a:solidFill>
                 <a:latin typeface="Arial"/>
                 <a:ea typeface="Arial"/>
@@ -14826,7 +14982,7 @@
             <a:lvl9pPr>
               <a:defRPr sz="3225" b="1">
                 <a:solidFill>
-                  <a:srgbClr val="B9362D"/>
+                  <a:srgbClr val="CC0000"/>
                 </a:solidFill>
                 <a:latin typeface="Arial"/>
                 <a:ea typeface="Arial"/>
@@ -14838,7 +14994,7 @@
             <a:pPr>
               <a:defRPr sz="3225" b="1">
                 <a:solidFill>
-                  <a:srgbClr val="B9362D"/>
+                  <a:srgbClr val="CC0000"/>
                 </a:solidFill>
                 <a:latin typeface="Arial"/>
                 <a:ea typeface="Arial"/>
@@ -14848,7 +15004,7 @@
             <a:r>
               <a:rPr sz="3225" b="1">
                 <a:solidFill>
-                  <a:srgbClr val="B9362D"/>
+                  <a:srgbClr val="CC0000"/>
                 </a:solidFill>
                 <a:latin typeface="Arial"/>
                 <a:ea typeface="Arial"/>
@@ -14864,7 +15020,7 @@
           <p:cNvPr id="7" name="">
             <a:extLst xmlns:a="http://schemas.openxmlformats.org/drawingml/2006/main">
               <a:ext uri="{FF2B5EF4-FFF2-40B4-BE49-F238E27FC236}">
-                <a16:creationId xmlns:a16="http://schemas.microsoft.com/office/drawing/2014/main" id="{49C32AF5-9603-4C26-8711-D07DDDDCDF88}"/>
+                <a16:creationId xmlns:a16="http://schemas.microsoft.com/office/drawing/2014/main" id="{3CAFC731-1861-4591-9640-B919D91B889B}"/>
               </a:ext>
             </a:extLst>
           </p:cNvPr>
@@ -14892,7 +15048,7 @@
             <a:defPPr>
               <a:defRPr sz="2475" b="1">
                 <a:solidFill>
-                  <a:srgbClr val="233D34"/>
+                  <a:srgbClr val="000000"/>
                 </a:solidFill>
                 <a:latin typeface="Arial"/>
                 <a:ea typeface="Arial"/>
@@ -14902,7 +15058,7 @@
             <a:lvl1pPr>
               <a:defRPr sz="2475" b="1">
                 <a:solidFill>
-                  <a:srgbClr val="233D34"/>
+                  <a:srgbClr val="000000"/>
                 </a:solidFill>
                 <a:latin typeface="Arial"/>
                 <a:ea typeface="Arial"/>
@@ -14912,7 +15068,7 @@
             <a:lvl2pPr>
               <a:defRPr sz="2475" b="1">
                 <a:solidFill>
-                  <a:srgbClr val="233D34"/>
+                  <a:srgbClr val="000000"/>
                 </a:solidFill>
                 <a:latin typeface="Arial"/>
                 <a:ea typeface="Arial"/>
@@ -14922,7 +15078,7 @@
             <a:lvl3pPr>
               <a:defRPr sz="2475" b="1">
                 <a:solidFill>
-                  <a:srgbClr val="233D34"/>
+                  <a:srgbClr val="000000"/>
                 </a:solidFill>
                 <a:latin typeface="Arial"/>
                 <a:ea typeface="Arial"/>
@@ -14932,7 +15088,7 @@
             <a:lvl4pPr>
               <a:defRPr sz="2475" b="1">
                 <a:solidFill>
-                  <a:srgbClr val="233D34"/>
+                  <a:srgbClr val="000000"/>
                 </a:solidFill>
                 <a:latin typeface="Arial"/>
                 <a:ea typeface="Arial"/>
@@ -14942,7 +15098,7 @@
             <a:lvl5pPr>
               <a:defRPr sz="2475" b="1">
                 <a:solidFill>
-                  <a:srgbClr val="233D34"/>
+                  <a:srgbClr val="000000"/>
                 </a:solidFill>
                 <a:latin typeface="Arial"/>
                 <a:ea typeface="Arial"/>
@@ -14952,7 +15108,7 @@
             <a:lvl6pPr>
               <a:defRPr sz="2475" b="1">
                 <a:solidFill>
-                  <a:srgbClr val="233D34"/>
+                  <a:srgbClr val="000000"/>
                 </a:solidFill>
                 <a:latin typeface="Arial"/>
                 <a:ea typeface="Arial"/>
@@ -14962,7 +15118,7 @@
             <a:lvl7pPr>
               <a:defRPr sz="2475" b="1">
                 <a:solidFill>
-                  <a:srgbClr val="233D34"/>
+                  <a:srgbClr val="000000"/>
                 </a:solidFill>
                 <a:latin typeface="Arial"/>
                 <a:ea typeface="Arial"/>
@@ -14972,7 +15128,7 @@
             <a:lvl8pPr>
               <a:defRPr sz="2475" b="1">
                 <a:solidFill>
-                  <a:srgbClr val="233D34"/>
+                  <a:srgbClr val="000000"/>
                 </a:solidFill>
                 <a:latin typeface="Arial"/>
                 <a:ea typeface="Arial"/>
@@ -14982,7 +15138,7 @@
             <a:lvl9pPr>
               <a:defRPr sz="2475" b="1">
                 <a:solidFill>
-                  <a:srgbClr val="233D34"/>
+                  <a:srgbClr val="000000"/>
                 </a:solidFill>
                 <a:latin typeface="Arial"/>
                 <a:ea typeface="Arial"/>
@@ -14994,7 +15150,7 @@
             <a:pPr>
               <a:defRPr sz="2475" b="1">
                 <a:solidFill>
-                  <a:srgbClr val="233D34"/>
+                  <a:srgbClr val="000000"/>
                 </a:solidFill>
                 <a:latin typeface="Arial"/>
                 <a:ea typeface="Arial"/>
@@ -15004,7 +15160,7 @@
             <a:r>
               <a:rPr sz="2475" b="1">
                 <a:solidFill>
-                  <a:srgbClr val="233D34"/>
+                  <a:srgbClr val="000000"/>
                 </a:solidFill>
                 <a:latin typeface="Arial"/>
                 <a:ea typeface="Arial"/>
@@ -15020,7 +15176,7 @@
           <p:cNvPr id="8" name="">
             <a:extLst xmlns:a="http://schemas.openxmlformats.org/drawingml/2006/main">
               <a:ext uri="{FF2B5EF4-FFF2-40B4-BE49-F238E27FC236}">
-                <a16:creationId xmlns:a16="http://schemas.microsoft.com/office/drawing/2014/main" id="{8B237A00-2E28-458C-B183-62A06C9CE18C}"/>
+                <a16:creationId xmlns:a16="http://schemas.microsoft.com/office/drawing/2014/main" id="{F2AB4EEC-3E36-4227-BDCA-A2DCE99A58D8}"/>
               </a:ext>
             </a:extLst>
           </p:cNvPr>
@@ -15048,7 +15204,7 @@
             <a:defPPr>
               <a:defRPr sz="1950" b="0">
                 <a:solidFill>
-                  <a:srgbClr val="647168"/>
+                  <a:srgbClr val="595959"/>
                 </a:solidFill>
                 <a:latin typeface="Arial"/>
                 <a:ea typeface="Arial"/>
@@ -15058,7 +15214,7 @@
             <a:lvl1pPr>
               <a:defRPr sz="1950" b="0">
                 <a:solidFill>
-                  <a:srgbClr val="647168"/>
+                  <a:srgbClr val="595959"/>
                 </a:solidFill>
                 <a:latin typeface="Arial"/>
                 <a:ea typeface="Arial"/>
@@ -15068,7 +15224,7 @@
             <a:lvl2pPr>
               <a:defRPr sz="1950" b="0">
                 <a:solidFill>
-                  <a:srgbClr val="647168"/>
+                  <a:srgbClr val="595959"/>
                 </a:solidFill>
                 <a:latin typeface="Arial"/>
                 <a:ea typeface="Arial"/>
@@ -15078,7 +15234,7 @@
             <a:lvl3pPr>
               <a:defRPr sz="1950" b="0">
                 <a:solidFill>
-                  <a:srgbClr val="647168"/>
+                  <a:srgbClr val="595959"/>
                 </a:solidFill>
                 <a:latin typeface="Arial"/>
                 <a:ea typeface="Arial"/>
@@ -15088,7 +15244,7 @@
             <a:lvl4pPr>
               <a:defRPr sz="1950" b="0">
                 <a:solidFill>
-                  <a:srgbClr val="647168"/>
+                  <a:srgbClr val="595959"/>
                 </a:solidFill>
                 <a:latin typeface="Arial"/>
                 <a:ea typeface="Arial"/>
@@ -15098,7 +15254,7 @@
             <a:lvl5pPr>
               <a:defRPr sz="1950" b="0">
                 <a:solidFill>
-                  <a:srgbClr val="647168"/>
+                  <a:srgbClr val="595959"/>
                 </a:solidFill>
                 <a:latin typeface="Arial"/>
                 <a:ea typeface="Arial"/>
@@ -15108,7 +15264,7 @@
             <a:lvl6pPr>
               <a:defRPr sz="1950" b="0">
                 <a:solidFill>
-                  <a:srgbClr val="647168"/>
+                  <a:srgbClr val="595959"/>
                 </a:solidFill>
                 <a:latin typeface="Arial"/>
                 <a:ea typeface="Arial"/>
@@ -15118,7 +15274,7 @@
             <a:lvl7pPr>
               <a:defRPr sz="1950" b="0">
                 <a:solidFill>
-                  <a:srgbClr val="647168"/>
+                  <a:srgbClr val="595959"/>
                 </a:solidFill>
                 <a:latin typeface="Arial"/>
                 <a:ea typeface="Arial"/>
@@ -15128,7 +15284,7 @@
             <a:lvl8pPr>
               <a:defRPr sz="1950" b="0">
                 <a:solidFill>
-                  <a:srgbClr val="647168"/>
+                  <a:srgbClr val="595959"/>
                 </a:solidFill>
                 <a:latin typeface="Arial"/>
                 <a:ea typeface="Arial"/>
@@ -15138,7 +15294,7 @@
             <a:lvl9pPr>
               <a:defRPr sz="1950" b="0">
                 <a:solidFill>
-                  <a:srgbClr val="647168"/>
+                  <a:srgbClr val="595959"/>
                 </a:solidFill>
                 <a:latin typeface="Arial"/>
                 <a:ea typeface="Arial"/>
@@ -15150,7 +15306,7 @@
             <a:pPr>
               <a:defRPr sz="1950" b="0">
                 <a:solidFill>
-                  <a:srgbClr val="647168"/>
+                  <a:srgbClr val="595959"/>
                 </a:solidFill>
                 <a:latin typeface="Arial"/>
                 <a:ea typeface="Arial"/>
@@ -15160,7 +15316,7 @@
             <a:r>
               <a:rPr sz="1950" b="0">
                 <a:solidFill>
-                  <a:srgbClr val="647168"/>
+                  <a:srgbClr val="595959"/>
                 </a:solidFill>
                 <a:latin typeface="Arial"/>
                 <a:ea typeface="Arial"/>
@@ -15176,7 +15332,7 @@
           <p:cNvPr id="9" name="">
             <a:extLst xmlns:a="http://schemas.openxmlformats.org/drawingml/2006/main">
               <a:ext uri="{FF2B5EF4-FFF2-40B4-BE49-F238E27FC236}">
-                <a16:creationId xmlns:a16="http://schemas.microsoft.com/office/drawing/2014/main" id="{87FED458-5C4B-4980-BB61-D1E8F0F75B13}"/>
+                <a16:creationId xmlns:a16="http://schemas.microsoft.com/office/drawing/2014/main" id="{6EC41E41-59B9-4FFC-8887-4C70024432C1}"/>
               </a:ext>
             </a:extLst>
           </p:cNvPr>
@@ -15204,7 +15360,7 @@
             <a:defPPr>
               <a:defRPr sz="3225" b="1">
                 <a:solidFill>
-                  <a:srgbClr val="B9362D"/>
+                  <a:srgbClr val="CC0000"/>
                 </a:solidFill>
                 <a:latin typeface="Arial"/>
                 <a:ea typeface="Arial"/>
@@ -15214,7 +15370,7 @@
             <a:lvl1pPr>
               <a:defRPr sz="3225" b="1">
                 <a:solidFill>
-                  <a:srgbClr val="B9362D"/>
+                  <a:srgbClr val="CC0000"/>
                 </a:solidFill>
                 <a:latin typeface="Arial"/>
                 <a:ea typeface="Arial"/>
@@ -15224,7 +15380,7 @@
             <a:lvl2pPr>
               <a:defRPr sz="3225" b="1">
                 <a:solidFill>
-                  <a:srgbClr val="B9362D"/>
+                  <a:srgbClr val="CC0000"/>
                 </a:solidFill>
                 <a:latin typeface="Arial"/>
                 <a:ea typeface="Arial"/>
@@ -15234,7 +15390,7 @@
             <a:lvl3pPr>
               <a:defRPr sz="3225" b="1">
                 <a:solidFill>
-                  <a:srgbClr val="B9362D"/>
+                  <a:srgbClr val="CC0000"/>
                 </a:solidFill>
                 <a:latin typeface="Arial"/>
                 <a:ea typeface="Arial"/>
@@ -15244,7 +15400,7 @@
             <a:lvl4pPr>
               <a:defRPr sz="3225" b="1">
                 <a:solidFill>
-                  <a:srgbClr val="B9362D"/>
+                  <a:srgbClr val="CC0000"/>
                 </a:solidFill>
                 <a:latin typeface="Arial"/>
                 <a:ea typeface="Arial"/>
@@ -15254,7 +15410,7 @@
             <a:lvl5pPr>
               <a:defRPr sz="3225" b="1">
                 <a:solidFill>
-                  <a:srgbClr val="B9362D"/>
+                  <a:srgbClr val="CC0000"/>
                 </a:solidFill>
                 <a:latin typeface="Arial"/>
                 <a:ea typeface="Arial"/>
@@ -15264,7 +15420,7 @@
             <a:lvl6pPr>
               <a:defRPr sz="3225" b="1">
                 <a:solidFill>
-                  <a:srgbClr val="B9362D"/>
+                  <a:srgbClr val="CC0000"/>
                 </a:solidFill>
                 <a:latin typeface="Arial"/>
                 <a:ea typeface="Arial"/>
@@ -15274,7 +15430,7 @@
             <a:lvl7pPr>
               <a:defRPr sz="3225" b="1">
                 <a:solidFill>
-                  <a:srgbClr val="B9362D"/>
+                  <a:srgbClr val="CC0000"/>
                 </a:solidFill>
                 <a:latin typeface="Arial"/>
                 <a:ea typeface="Arial"/>
@@ -15284,7 +15440,7 @@
             <a:lvl8pPr>
               <a:defRPr sz="3225" b="1">
                 <a:solidFill>
-                  <a:srgbClr val="B9362D"/>
+                  <a:srgbClr val="CC0000"/>
                 </a:solidFill>
                 <a:latin typeface="Arial"/>
                 <a:ea typeface="Arial"/>
@@ -15294,7 +15450,7 @@
             <a:lvl9pPr>
               <a:defRPr sz="3225" b="1">
                 <a:solidFill>
-                  <a:srgbClr val="B9362D"/>
+                  <a:srgbClr val="CC0000"/>
                 </a:solidFill>
                 <a:latin typeface="Arial"/>
                 <a:ea typeface="Arial"/>
@@ -15306,7 +15462,7 @@
             <a:pPr>
               <a:defRPr sz="3225" b="1">
                 <a:solidFill>
-                  <a:srgbClr val="B9362D"/>
+                  <a:srgbClr val="CC0000"/>
                 </a:solidFill>
                 <a:latin typeface="Arial"/>
                 <a:ea typeface="Arial"/>
@@ -15316,7 +15472,7 @@
             <a:r>
               <a:rPr sz="3225" b="1">
                 <a:solidFill>
-                  <a:srgbClr val="B9362D"/>
+                  <a:srgbClr val="CC0000"/>
                 </a:solidFill>
                 <a:latin typeface="Arial"/>
                 <a:ea typeface="Arial"/>
@@ -15332,7 +15488,7 @@
           <p:cNvPr id="10" name="">
             <a:extLst xmlns:a="http://schemas.openxmlformats.org/drawingml/2006/main">
               <a:ext uri="{FF2B5EF4-FFF2-40B4-BE49-F238E27FC236}">
-                <a16:creationId xmlns:a16="http://schemas.microsoft.com/office/drawing/2014/main" id="{5AD31F06-094C-4141-AD84-C103D14026E4}"/>
+                <a16:creationId xmlns:a16="http://schemas.microsoft.com/office/drawing/2014/main" id="{9B3D2FEE-7125-451D-A398-F613CC71ADD9}"/>
               </a:ext>
             </a:extLst>
           </p:cNvPr>
@@ -15360,7 +15516,7 @@
             <a:defPPr>
               <a:defRPr sz="2475" b="1">
                 <a:solidFill>
-                  <a:srgbClr val="233D34"/>
+                  <a:srgbClr val="000000"/>
                 </a:solidFill>
                 <a:latin typeface="Arial"/>
                 <a:ea typeface="Arial"/>
@@ -15370,7 +15526,7 @@
             <a:lvl1pPr>
               <a:defRPr sz="2475" b="1">
                 <a:solidFill>
-                  <a:srgbClr val="233D34"/>
+                  <a:srgbClr val="000000"/>
                 </a:solidFill>
                 <a:latin typeface="Arial"/>
                 <a:ea typeface="Arial"/>
@@ -15380,7 +15536,7 @@
             <a:lvl2pPr>
               <a:defRPr sz="2475" b="1">
                 <a:solidFill>
-                  <a:srgbClr val="233D34"/>
+                  <a:srgbClr val="000000"/>
                 </a:solidFill>
                 <a:latin typeface="Arial"/>
                 <a:ea typeface="Arial"/>
@@ -15390,7 +15546,7 @@
             <a:lvl3pPr>
               <a:defRPr sz="2475" b="1">
                 <a:solidFill>
-                  <a:srgbClr val="233D34"/>
+                  <a:srgbClr val="000000"/>
                 </a:solidFill>
                 <a:latin typeface="Arial"/>
                 <a:ea typeface="Arial"/>
@@ -15400,7 +15556,7 @@
             <a:lvl4pPr>
               <a:defRPr sz="2475" b="1">
                 <a:solidFill>
-                  <a:srgbClr val="233D34"/>
+                  <a:srgbClr val="000000"/>
                 </a:solidFill>
                 <a:latin typeface="Arial"/>
                 <a:ea typeface="Arial"/>
@@ -15410,7 +15566,7 @@
             <a:lvl5pPr>
               <a:defRPr sz="2475" b="1">
                 <a:solidFill>
-                  <a:srgbClr val="233D34"/>
+                  <a:srgbClr val="000000"/>
                 </a:solidFill>
                 <a:latin typeface="Arial"/>
                 <a:ea typeface="Arial"/>
@@ -15420,7 +15576,7 @@
             <a:lvl6pPr>
               <a:defRPr sz="2475" b="1">
                 <a:solidFill>
-                  <a:srgbClr val="233D34"/>
+                  <a:srgbClr val="000000"/>
                 </a:solidFill>
                 <a:latin typeface="Arial"/>
                 <a:ea typeface="Arial"/>
@@ -15430,7 +15586,7 @@
             <a:lvl7pPr>
               <a:defRPr sz="2475" b="1">
                 <a:solidFill>
-                  <a:srgbClr val="233D34"/>
+                  <a:srgbClr val="000000"/>
                 </a:solidFill>
                 <a:latin typeface="Arial"/>
                 <a:ea typeface="Arial"/>
@@ -15440,7 +15596,7 @@
             <a:lvl8pPr>
               <a:defRPr sz="2475" b="1">
                 <a:solidFill>
-                  <a:srgbClr val="233D34"/>
+                  <a:srgbClr val="000000"/>
                 </a:solidFill>
                 <a:latin typeface="Arial"/>
                 <a:ea typeface="Arial"/>
@@ -15450,7 +15606,7 @@
             <a:lvl9pPr>
               <a:defRPr sz="2475" b="1">
                 <a:solidFill>
-                  <a:srgbClr val="233D34"/>
+                  <a:srgbClr val="000000"/>
                 </a:solidFill>
                 <a:latin typeface="Arial"/>
                 <a:ea typeface="Arial"/>
@@ -15462,7 +15618,7 @@
             <a:pPr>
               <a:defRPr sz="2475" b="1">
                 <a:solidFill>
-                  <a:srgbClr val="233D34"/>
+                  <a:srgbClr val="000000"/>
                 </a:solidFill>
                 <a:latin typeface="Arial"/>
                 <a:ea typeface="Arial"/>
@@ -15472,7 +15628,7 @@
             <a:r>
               <a:rPr sz="2475" b="1">
                 <a:solidFill>
-                  <a:srgbClr val="233D34"/>
+                  <a:srgbClr val="000000"/>
                 </a:solidFill>
                 <a:latin typeface="Arial"/>
                 <a:ea typeface="Arial"/>
@@ -15488,7 +15644,7 @@
           <p:cNvPr id="11" name="">
             <a:extLst xmlns:a="http://schemas.openxmlformats.org/drawingml/2006/main">
               <a:ext uri="{FF2B5EF4-FFF2-40B4-BE49-F238E27FC236}">
-                <a16:creationId xmlns:a16="http://schemas.microsoft.com/office/drawing/2014/main" id="{B424A5FB-9730-4405-B875-975B67E9AECC}"/>
+                <a16:creationId xmlns:a16="http://schemas.microsoft.com/office/drawing/2014/main" id="{390959E1-949C-435F-AA0D-526F7E012992}"/>
               </a:ext>
             </a:extLst>
           </p:cNvPr>
@@ -15516,7 +15672,7 @@
             <a:defPPr>
               <a:defRPr sz="1950" b="0">
                 <a:solidFill>
-                  <a:srgbClr val="647168"/>
+                  <a:srgbClr val="595959"/>
                 </a:solidFill>
                 <a:latin typeface="Arial"/>
                 <a:ea typeface="Arial"/>
@@ -15526,7 +15682,7 @@
             <a:lvl1pPr>
               <a:defRPr sz="1950" b="0">
                 <a:solidFill>
-                  <a:srgbClr val="647168"/>
+                  <a:srgbClr val="595959"/>
                 </a:solidFill>
                 <a:latin typeface="Arial"/>
                 <a:ea typeface="Arial"/>
@@ -15536,7 +15692,7 @@
             <a:lvl2pPr>
               <a:defRPr sz="1950" b="0">
                 <a:solidFill>
-                  <a:srgbClr val="647168"/>
+                  <a:srgbClr val="595959"/>
                 </a:solidFill>
                 <a:latin typeface="Arial"/>
                 <a:ea typeface="Arial"/>
@@ -15546,7 +15702,7 @@
             <a:lvl3pPr>
               <a:defRPr sz="1950" b="0">
                 <a:solidFill>
-                  <a:srgbClr val="647168"/>
+                  <a:srgbClr val="595959"/>
                 </a:solidFill>
                 <a:latin typeface="Arial"/>
                 <a:ea typeface="Arial"/>
@@ -15556,7 +15712,7 @@
             <a:lvl4pPr>
               <a:defRPr sz="1950" b="0">
                 <a:solidFill>
-                  <a:srgbClr val="647168"/>
+                  <a:srgbClr val="595959"/>
                 </a:solidFill>
                 <a:latin typeface="Arial"/>
                 <a:ea typeface="Arial"/>
@@ -15566,7 +15722,7 @@
             <a:lvl5pPr>
               <a:defRPr sz="1950" b="0">
                 <a:solidFill>
-                  <a:srgbClr val="647168"/>
+                  <a:srgbClr val="595959"/>
                 </a:solidFill>
                 <a:latin typeface="Arial"/>
                 <a:ea typeface="Arial"/>
@@ -15576,7 +15732,7 @@
             <a:lvl6pPr>
               <a:defRPr sz="1950" b="0">
                 <a:solidFill>
-                  <a:srgbClr val="647168"/>
+                  <a:srgbClr val="595959"/>
                 </a:solidFill>
                 <a:latin typeface="Arial"/>
                 <a:ea typeface="Arial"/>
@@ -15586,7 +15742,7 @@
             <a:lvl7pPr>
               <a:defRPr sz="1950" b="0">
                 <a:solidFill>
-                  <a:srgbClr val="647168"/>
+                  <a:srgbClr val="595959"/>
                 </a:solidFill>
                 <a:latin typeface="Arial"/>
                 <a:ea typeface="Arial"/>
@@ -15596,7 +15752,7 @@
             <a:lvl8pPr>
               <a:defRPr sz="1950" b="0">
                 <a:solidFill>
-                  <a:srgbClr val="647168"/>
+                  <a:srgbClr val="595959"/>
                 </a:solidFill>
                 <a:latin typeface="Arial"/>
                 <a:ea typeface="Arial"/>
@@ -15606,7 +15762,7 @@
             <a:lvl9pPr>
               <a:defRPr sz="1950" b="0">
                 <a:solidFill>
-                  <a:srgbClr val="647168"/>
+                  <a:srgbClr val="595959"/>
                 </a:solidFill>
                 <a:latin typeface="Arial"/>
                 <a:ea typeface="Arial"/>
@@ -15618,7 +15774,7 @@
             <a:pPr>
               <a:defRPr sz="1950" b="0">
                 <a:solidFill>
-                  <a:srgbClr val="647168"/>
+                  <a:srgbClr val="595959"/>
                 </a:solidFill>
                 <a:latin typeface="Arial"/>
                 <a:ea typeface="Arial"/>
@@ -15628,7 +15784,7 @@
             <a:r>
               <a:rPr sz="1950" b="0">
                 <a:solidFill>
-                  <a:srgbClr val="647168"/>
+                  <a:srgbClr val="595959"/>
                 </a:solidFill>
                 <a:latin typeface="Arial"/>
                 <a:ea typeface="Arial"/>
@@ -15642,7 +15798,7 @@
     </p:spTree>
     <p:extLst>
       <p:ext uri="{BB962C8B-B14F-4D97-AF65-F5344CB8AC3E}">
-        <p14:creationId xmlns:p14="http://schemas.microsoft.com/office/powerpoint/2010/main" val="609635463"/>
+        <p14:creationId xmlns:p14="http://schemas.microsoft.com/office/powerpoint/2010/main" val="902421041"/>
       </p:ext>
     </p:extLst>
   </p:cSld>
